--- a/Docs/images.pptx
+++ b/Docs/images.pptx
@@ -5,16 +5,18 @@
     <p:sldMasterId id="2147483648" r:id="rId4"/>
   </p:sldMasterIdLst>
   <p:notesMasterIdLst>
-    <p:notesMasterId r:id="rId9"/>
+    <p:notesMasterId r:id="rId11"/>
   </p:notesMasterIdLst>
   <p:handoutMasterIdLst>
-    <p:handoutMasterId r:id="rId10"/>
+    <p:handoutMasterId r:id="rId12"/>
   </p:handoutMasterIdLst>
   <p:sldIdLst>
     <p:sldId id="275" r:id="rId5"/>
     <p:sldId id="276" r:id="rId6"/>
     <p:sldId id="278" r:id="rId7"/>
     <p:sldId id="277" r:id="rId8"/>
+    <p:sldId id="279" r:id="rId9"/>
+    <p:sldId id="280" r:id="rId10"/>
   </p:sldIdLst>
   <p:sldSz cx="12192000" cy="6858000"/>
   <p:notesSz cx="6858000" cy="9144000"/>
@@ -229,7 +231,7 @@
             <a:fld id="{5F993C83-2184-4286-ABE1-941A40B40C8F}" type="datetimeFigureOut">
               <a:rPr lang="en-US" smtClean="0"/>
               <a:pPr/>
-              <a:t>11/27/2025</a:t>
+              <a:t>12/10/2025</a:t>
             </a:fld>
             <a:endParaRPr lang="en-US"/>
           </a:p>
@@ -396,7 +398,7 @@
             <a:fld id="{6053241F-7ED4-45AC-844C-15DB0D5F9CCD}" type="datetimeFigureOut">
               <a:rPr lang="en-US" smtClean="0"/>
               <a:pPr/>
-              <a:t>11/27/2025</a:t>
+              <a:t>12/10/2025</a:t>
             </a:fld>
             <a:endParaRPr lang="en-US"/>
           </a:p>
@@ -12510,6 +12512,6571 @@
 </p:sld>
 </file>
 
+<file path=ppt/slides/slide5.xml><?xml version="1.0" encoding="utf-8"?>
+<p:sld xmlns:a="http://schemas.openxmlformats.org/drawingml/2006/main" xmlns:r="http://schemas.openxmlformats.org/officeDocument/2006/relationships" xmlns:p="http://schemas.openxmlformats.org/presentationml/2006/main">
+  <p:cSld>
+    <p:spTree>
+      <p:nvGrpSpPr>
+        <p:cNvPr id="1" name=""/>
+        <p:cNvGrpSpPr/>
+        <p:nvPr/>
+      </p:nvGrpSpPr>
+      <p:grpSpPr>
+        <a:xfrm>
+          <a:off x="0" y="0"/>
+          <a:ext cx="0" cy="0"/>
+          <a:chOff x="0" y="0"/>
+          <a:chExt cx="0" cy="0"/>
+        </a:xfrm>
+      </p:grpSpPr>
+      <p:sp>
+        <p:nvSpPr>
+          <p:cNvPr id="83" name="TextBox 82">
+            <a:extLst>
+              <a:ext uri="{FF2B5EF4-FFF2-40B4-BE49-F238E27FC236}">
+                <a16:creationId xmlns:a16="http://schemas.microsoft.com/office/drawing/2014/main" id="{436113DB-2EFA-765F-A6CC-8CC4C098A69D}"/>
+              </a:ext>
+            </a:extLst>
+          </p:cNvPr>
+          <p:cNvSpPr txBox="1"/>
+          <p:nvPr/>
+        </p:nvSpPr>
+        <p:spPr>
+          <a:xfrm>
+            <a:off x="666718" y="3056260"/>
+            <a:ext cx="849891" cy="253916"/>
+          </a:xfrm>
+          <a:prstGeom prst="rect">
+            <a:avLst/>
+          </a:prstGeom>
+          <a:noFill/>
+        </p:spPr>
+        <p:txBody>
+          <a:bodyPr wrap="square" rtlCol="0">
+            <a:spAutoFit/>
+          </a:bodyPr>
+          <a:lstStyle/>
+          <a:p>
+            <a:r>
+              <a:rPr lang="en-US" sz="1050" b="1" dirty="0">
+                <a:latin typeface="Courier New" panose="02070309020205020404" pitchFamily="49" charset="0"/>
+                <a:cs typeface="Courier New" panose="02070309020205020404" pitchFamily="49" charset="0"/>
+              </a:rPr>
+              <a:t>HEXTubeH</a:t>
+            </a:r>
+          </a:p>
+        </p:txBody>
+      </p:sp>
+      <p:sp>
+        <p:nvSpPr>
+          <p:cNvPr id="72" name="TextBox 71">
+            <a:extLst>
+              <a:ext uri="{FF2B5EF4-FFF2-40B4-BE49-F238E27FC236}">
+                <a16:creationId xmlns:a16="http://schemas.microsoft.com/office/drawing/2014/main" id="{E8DE8801-EDD2-9C08-602B-390B9244CAF6}"/>
+              </a:ext>
+            </a:extLst>
+          </p:cNvPr>
+          <p:cNvSpPr txBox="1"/>
+          <p:nvPr/>
+        </p:nvSpPr>
+        <p:spPr>
+          <a:xfrm>
+            <a:off x="1450405" y="5413682"/>
+            <a:ext cx="849891" cy="253916"/>
+          </a:xfrm>
+          <a:prstGeom prst="rect">
+            <a:avLst/>
+          </a:prstGeom>
+          <a:noFill/>
+        </p:spPr>
+        <p:txBody>
+          <a:bodyPr wrap="square" rtlCol="0">
+            <a:spAutoFit/>
+          </a:bodyPr>
+          <a:lstStyle/>
+          <a:p>
+            <a:r>
+              <a:rPr lang="en-US" sz="1050" b="1" dirty="0">
+                <a:latin typeface="Courier New" panose="02070309020205020404" pitchFamily="49" charset="0"/>
+                <a:cs typeface="Courier New" panose="02070309020205020404" pitchFamily="49" charset="0"/>
+              </a:rPr>
+              <a:t>HEXTubeW</a:t>
+            </a:r>
+          </a:p>
+        </p:txBody>
+      </p:sp>
+      <p:sp>
+        <p:nvSpPr>
+          <p:cNvPr id="67" name="Cube 66">
+            <a:extLst>
+              <a:ext uri="{FF2B5EF4-FFF2-40B4-BE49-F238E27FC236}">
+                <a16:creationId xmlns:a16="http://schemas.microsoft.com/office/drawing/2014/main" id="{E14C4360-CF63-0349-DDF7-B6B08B51716A}"/>
+              </a:ext>
+            </a:extLst>
+          </p:cNvPr>
+          <p:cNvSpPr/>
+          <p:nvPr/>
+        </p:nvSpPr>
+        <p:spPr>
+          <a:xfrm>
+            <a:off x="3440955" y="505391"/>
+            <a:ext cx="943473" cy="3060260"/>
+          </a:xfrm>
+          <a:prstGeom prst="cube">
+            <a:avLst/>
+          </a:prstGeom>
+          <a:solidFill>
+            <a:srgbClr val="E6B85C"/>
+          </a:solidFill>
+          <a:ln>
+            <a:noFill/>
+          </a:ln>
+        </p:spPr>
+        <p:style>
+          <a:lnRef idx="2">
+            <a:schemeClr val="accent1">
+              <a:shade val="50000"/>
+            </a:schemeClr>
+          </a:lnRef>
+          <a:fillRef idx="1">
+            <a:schemeClr val="accent1"/>
+          </a:fillRef>
+          <a:effectRef idx="0">
+            <a:schemeClr val="accent1"/>
+          </a:effectRef>
+          <a:fontRef idx="minor">
+            <a:schemeClr val="lt1"/>
+          </a:fontRef>
+        </p:style>
+        <p:txBody>
+          <a:bodyPr rtlCol="0" anchor="ctr"/>
+          <a:lstStyle/>
+          <a:p>
+            <a:pPr algn="ctr"/>
+            <a:endParaRPr lang="en-US" b="1" dirty="0">
+              <a:latin typeface="Arial" pitchFamily="34" charset="0"/>
+              <a:cs typeface="Arial" pitchFamily="34" charset="0"/>
+            </a:endParaRPr>
+          </a:p>
+        </p:txBody>
+      </p:sp>
+      <p:grpSp>
+        <p:nvGrpSpPr>
+          <p:cNvPr id="55" name="Group 54">
+            <a:extLst>
+              <a:ext uri="{FF2B5EF4-FFF2-40B4-BE49-F238E27FC236}">
+                <a16:creationId xmlns:a16="http://schemas.microsoft.com/office/drawing/2014/main" id="{64BBF9E0-B3C7-7D33-0967-4FD5149EC02E}"/>
+              </a:ext>
+            </a:extLst>
+          </p:cNvPr>
+          <p:cNvGrpSpPr/>
+          <p:nvPr/>
+        </p:nvGrpSpPr>
+        <p:grpSpPr>
+          <a:xfrm>
+            <a:off x="1487488" y="3198290"/>
+            <a:ext cx="2664296" cy="2188357"/>
+            <a:chOff x="2135560" y="1384659"/>
+            <a:chExt cx="2664296" cy="2188357"/>
+          </a:xfrm>
+        </p:grpSpPr>
+        <p:sp>
+          <p:nvSpPr>
+            <p:cNvPr id="56" name="Cube 55">
+              <a:extLst>
+                <a:ext uri="{FF2B5EF4-FFF2-40B4-BE49-F238E27FC236}">
+                  <a16:creationId xmlns:a16="http://schemas.microsoft.com/office/drawing/2014/main" id="{3C45541F-623C-E5BF-D2BE-2DEC63753F10}"/>
+                </a:ext>
+              </a:extLst>
+            </p:cNvPr>
+            <p:cNvSpPr/>
+            <p:nvPr/>
+          </p:nvSpPr>
+          <p:spPr>
+            <a:xfrm>
+              <a:off x="2135560" y="1556792"/>
+              <a:ext cx="2664296" cy="2016224"/>
+            </a:xfrm>
+            <a:prstGeom prst="cube">
+              <a:avLst>
+                <a:gd name="adj" fmla="val 93993"/>
+              </a:avLst>
+            </a:prstGeom>
+            <a:solidFill>
+              <a:srgbClr val="E6B85C"/>
+            </a:solidFill>
+            <a:ln>
+              <a:noFill/>
+            </a:ln>
+          </p:spPr>
+          <p:style>
+            <a:lnRef idx="2">
+              <a:schemeClr val="accent1">
+                <a:shade val="50000"/>
+              </a:schemeClr>
+            </a:lnRef>
+            <a:fillRef idx="1">
+              <a:schemeClr val="accent1"/>
+            </a:fillRef>
+            <a:effectRef idx="0">
+              <a:schemeClr val="accent1"/>
+            </a:effectRef>
+            <a:fontRef idx="minor">
+              <a:schemeClr val="lt1"/>
+            </a:fontRef>
+          </p:style>
+          <p:txBody>
+            <a:bodyPr rtlCol="0" anchor="ctr"/>
+            <a:lstStyle/>
+            <a:p>
+              <a:pPr algn="ctr"/>
+              <a:endParaRPr lang="en-US" b="1" dirty="0">
+                <a:latin typeface="Arial" pitchFamily="34" charset="0"/>
+                <a:cs typeface="Arial" pitchFamily="34" charset="0"/>
+              </a:endParaRPr>
+            </a:p>
+          </p:txBody>
+        </p:sp>
+        <p:sp>
+          <p:nvSpPr>
+            <p:cNvPr id="57" name="Rectangle 56">
+              <a:extLst>
+                <a:ext uri="{FF2B5EF4-FFF2-40B4-BE49-F238E27FC236}">
+                  <a16:creationId xmlns:a16="http://schemas.microsoft.com/office/drawing/2014/main" id="{1E6E7A06-43F9-F9F9-3636-059728AB2FA3}"/>
+                </a:ext>
+              </a:extLst>
+            </p:cNvPr>
+            <p:cNvSpPr/>
+            <p:nvPr/>
+          </p:nvSpPr>
+          <p:spPr>
+            <a:xfrm>
+              <a:off x="3986598" y="1384659"/>
+              <a:ext cx="769187" cy="216015"/>
+            </a:xfrm>
+            <a:prstGeom prst="rect">
+              <a:avLst/>
+            </a:prstGeom>
+            <a:ln w="6350">
+              <a:solidFill>
+                <a:schemeClr val="accent2"/>
+              </a:solidFill>
+            </a:ln>
+          </p:spPr>
+          <p:style>
+            <a:lnRef idx="2">
+              <a:schemeClr val="accent1">
+                <a:shade val="50000"/>
+              </a:schemeClr>
+            </a:lnRef>
+            <a:fillRef idx="1">
+              <a:schemeClr val="accent1"/>
+            </a:fillRef>
+            <a:effectRef idx="0">
+              <a:schemeClr val="accent1"/>
+            </a:effectRef>
+            <a:fontRef idx="minor">
+              <a:schemeClr val="lt1"/>
+            </a:fontRef>
+          </p:style>
+          <p:txBody>
+            <a:bodyPr rtlCol="0" anchor="ctr"/>
+            <a:lstStyle/>
+            <a:p>
+              <a:pPr algn="ctr"/>
+              <a:endParaRPr lang="en-US" b="1" dirty="0">
+                <a:latin typeface="Arial" pitchFamily="34" charset="0"/>
+                <a:cs typeface="Arial" pitchFamily="34" charset="0"/>
+              </a:endParaRPr>
+            </a:p>
+          </p:txBody>
+        </p:sp>
+        <p:sp>
+          <p:nvSpPr>
+            <p:cNvPr id="58" name="Rectangle 57">
+              <a:extLst>
+                <a:ext uri="{FF2B5EF4-FFF2-40B4-BE49-F238E27FC236}">
+                  <a16:creationId xmlns:a16="http://schemas.microsoft.com/office/drawing/2014/main" id="{67876EA1-1D64-2581-3AFA-C1E6B485EA1E}"/>
+                </a:ext>
+              </a:extLst>
+            </p:cNvPr>
+            <p:cNvSpPr/>
+            <p:nvPr/>
+          </p:nvSpPr>
+          <p:spPr>
+            <a:xfrm>
+              <a:off x="3791142" y="1581216"/>
+              <a:ext cx="769187" cy="216015"/>
+            </a:xfrm>
+            <a:prstGeom prst="rect">
+              <a:avLst/>
+            </a:prstGeom>
+            <a:ln w="6350">
+              <a:solidFill>
+                <a:schemeClr val="accent2"/>
+              </a:solidFill>
+            </a:ln>
+          </p:spPr>
+          <p:style>
+            <a:lnRef idx="2">
+              <a:schemeClr val="accent1">
+                <a:shade val="50000"/>
+              </a:schemeClr>
+            </a:lnRef>
+            <a:fillRef idx="1">
+              <a:schemeClr val="accent1"/>
+            </a:fillRef>
+            <a:effectRef idx="0">
+              <a:schemeClr val="accent1"/>
+            </a:effectRef>
+            <a:fontRef idx="minor">
+              <a:schemeClr val="lt1"/>
+            </a:fontRef>
+          </p:style>
+          <p:txBody>
+            <a:bodyPr rtlCol="0" anchor="ctr"/>
+            <a:lstStyle/>
+            <a:p>
+              <a:pPr algn="ctr"/>
+              <a:endParaRPr lang="en-US" b="1" dirty="0">
+                <a:latin typeface="Arial" pitchFamily="34" charset="0"/>
+                <a:cs typeface="Arial" pitchFamily="34" charset="0"/>
+              </a:endParaRPr>
+            </a:p>
+          </p:txBody>
+        </p:sp>
+        <p:sp>
+          <p:nvSpPr>
+            <p:cNvPr id="59" name="Rectangle 58">
+              <a:extLst>
+                <a:ext uri="{FF2B5EF4-FFF2-40B4-BE49-F238E27FC236}">
+                  <a16:creationId xmlns:a16="http://schemas.microsoft.com/office/drawing/2014/main" id="{84917A1C-384D-D2AF-AB50-F74B3AECED37}"/>
+                </a:ext>
+              </a:extLst>
+            </p:cNvPr>
+            <p:cNvSpPr/>
+            <p:nvPr/>
+          </p:nvSpPr>
+          <p:spPr>
+            <a:xfrm>
+              <a:off x="3595685" y="1777773"/>
+              <a:ext cx="769187" cy="216015"/>
+            </a:xfrm>
+            <a:prstGeom prst="rect">
+              <a:avLst/>
+            </a:prstGeom>
+            <a:ln w="6350">
+              <a:solidFill>
+                <a:schemeClr val="accent2"/>
+              </a:solidFill>
+            </a:ln>
+          </p:spPr>
+          <p:style>
+            <a:lnRef idx="2">
+              <a:schemeClr val="accent1">
+                <a:shade val="50000"/>
+              </a:schemeClr>
+            </a:lnRef>
+            <a:fillRef idx="1">
+              <a:schemeClr val="accent1"/>
+            </a:fillRef>
+            <a:effectRef idx="0">
+              <a:schemeClr val="accent1"/>
+            </a:effectRef>
+            <a:fontRef idx="minor">
+              <a:schemeClr val="lt1"/>
+            </a:fontRef>
+          </p:style>
+          <p:txBody>
+            <a:bodyPr rtlCol="0" anchor="ctr"/>
+            <a:lstStyle/>
+            <a:p>
+              <a:pPr algn="ctr"/>
+              <a:endParaRPr lang="en-US" b="1" dirty="0">
+                <a:latin typeface="Arial" pitchFamily="34" charset="0"/>
+                <a:cs typeface="Arial" pitchFamily="34" charset="0"/>
+              </a:endParaRPr>
+            </a:p>
+          </p:txBody>
+        </p:sp>
+        <p:sp>
+          <p:nvSpPr>
+            <p:cNvPr id="60" name="Rectangle 59">
+              <a:extLst>
+                <a:ext uri="{FF2B5EF4-FFF2-40B4-BE49-F238E27FC236}">
+                  <a16:creationId xmlns:a16="http://schemas.microsoft.com/office/drawing/2014/main" id="{38DC4FAE-F3D3-A4F9-E74A-981CEF5AD008}"/>
+                </a:ext>
+              </a:extLst>
+            </p:cNvPr>
+            <p:cNvSpPr/>
+            <p:nvPr/>
+          </p:nvSpPr>
+          <p:spPr>
+            <a:xfrm>
+              <a:off x="3400228" y="1974330"/>
+              <a:ext cx="769187" cy="216015"/>
+            </a:xfrm>
+            <a:prstGeom prst="rect">
+              <a:avLst/>
+            </a:prstGeom>
+            <a:ln w="6350">
+              <a:solidFill>
+                <a:schemeClr val="accent2"/>
+              </a:solidFill>
+            </a:ln>
+          </p:spPr>
+          <p:style>
+            <a:lnRef idx="2">
+              <a:schemeClr val="accent1">
+                <a:shade val="50000"/>
+              </a:schemeClr>
+            </a:lnRef>
+            <a:fillRef idx="1">
+              <a:schemeClr val="accent1"/>
+            </a:fillRef>
+            <a:effectRef idx="0">
+              <a:schemeClr val="accent1"/>
+            </a:effectRef>
+            <a:fontRef idx="minor">
+              <a:schemeClr val="lt1"/>
+            </a:fontRef>
+          </p:style>
+          <p:txBody>
+            <a:bodyPr rtlCol="0" anchor="ctr"/>
+            <a:lstStyle/>
+            <a:p>
+              <a:pPr algn="ctr"/>
+              <a:endParaRPr lang="en-US" b="1" dirty="0">
+                <a:latin typeface="Arial" pitchFamily="34" charset="0"/>
+                <a:cs typeface="Arial" pitchFamily="34" charset="0"/>
+              </a:endParaRPr>
+            </a:p>
+          </p:txBody>
+        </p:sp>
+        <p:sp>
+          <p:nvSpPr>
+            <p:cNvPr id="61" name="Rectangle 60">
+              <a:extLst>
+                <a:ext uri="{FF2B5EF4-FFF2-40B4-BE49-F238E27FC236}">
+                  <a16:creationId xmlns:a16="http://schemas.microsoft.com/office/drawing/2014/main" id="{EEA8D094-D675-BB3F-81E1-F85EF83AC947}"/>
+                </a:ext>
+              </a:extLst>
+            </p:cNvPr>
+            <p:cNvSpPr/>
+            <p:nvPr/>
+          </p:nvSpPr>
+          <p:spPr>
+            <a:xfrm>
+              <a:off x="3204771" y="2170887"/>
+              <a:ext cx="769187" cy="216015"/>
+            </a:xfrm>
+            <a:prstGeom prst="rect">
+              <a:avLst/>
+            </a:prstGeom>
+            <a:ln w="6350">
+              <a:solidFill>
+                <a:schemeClr val="accent2"/>
+              </a:solidFill>
+            </a:ln>
+          </p:spPr>
+          <p:style>
+            <a:lnRef idx="2">
+              <a:schemeClr val="accent1">
+                <a:shade val="50000"/>
+              </a:schemeClr>
+            </a:lnRef>
+            <a:fillRef idx="1">
+              <a:schemeClr val="accent1"/>
+            </a:fillRef>
+            <a:effectRef idx="0">
+              <a:schemeClr val="accent1"/>
+            </a:effectRef>
+            <a:fontRef idx="minor">
+              <a:schemeClr val="lt1"/>
+            </a:fontRef>
+          </p:style>
+          <p:txBody>
+            <a:bodyPr rtlCol="0" anchor="ctr"/>
+            <a:lstStyle/>
+            <a:p>
+              <a:pPr algn="ctr"/>
+              <a:endParaRPr lang="en-US" b="1" dirty="0">
+                <a:latin typeface="Arial" pitchFamily="34" charset="0"/>
+                <a:cs typeface="Arial" pitchFamily="34" charset="0"/>
+              </a:endParaRPr>
+            </a:p>
+          </p:txBody>
+        </p:sp>
+        <p:sp>
+          <p:nvSpPr>
+            <p:cNvPr id="62" name="Rectangle 61">
+              <a:extLst>
+                <a:ext uri="{FF2B5EF4-FFF2-40B4-BE49-F238E27FC236}">
+                  <a16:creationId xmlns:a16="http://schemas.microsoft.com/office/drawing/2014/main" id="{B7D9D933-644C-2F2F-9699-86A04049F060}"/>
+                </a:ext>
+              </a:extLst>
+            </p:cNvPr>
+            <p:cNvSpPr/>
+            <p:nvPr/>
+          </p:nvSpPr>
+          <p:spPr>
+            <a:xfrm>
+              <a:off x="3009314" y="2367444"/>
+              <a:ext cx="769187" cy="216015"/>
+            </a:xfrm>
+            <a:prstGeom prst="rect">
+              <a:avLst/>
+            </a:prstGeom>
+            <a:ln w="6350">
+              <a:solidFill>
+                <a:schemeClr val="accent2"/>
+              </a:solidFill>
+            </a:ln>
+          </p:spPr>
+          <p:style>
+            <a:lnRef idx="2">
+              <a:schemeClr val="accent1">
+                <a:shade val="50000"/>
+              </a:schemeClr>
+            </a:lnRef>
+            <a:fillRef idx="1">
+              <a:schemeClr val="accent1"/>
+            </a:fillRef>
+            <a:effectRef idx="0">
+              <a:schemeClr val="accent1"/>
+            </a:effectRef>
+            <a:fontRef idx="minor">
+              <a:schemeClr val="lt1"/>
+            </a:fontRef>
+          </p:style>
+          <p:txBody>
+            <a:bodyPr rtlCol="0" anchor="ctr"/>
+            <a:lstStyle/>
+            <a:p>
+              <a:pPr algn="ctr"/>
+              <a:endParaRPr lang="en-US" b="1" dirty="0">
+                <a:latin typeface="Arial" pitchFamily="34" charset="0"/>
+                <a:cs typeface="Arial" pitchFamily="34" charset="0"/>
+              </a:endParaRPr>
+            </a:p>
+          </p:txBody>
+        </p:sp>
+        <p:sp>
+          <p:nvSpPr>
+            <p:cNvPr id="63" name="Rectangle 62">
+              <a:extLst>
+                <a:ext uri="{FF2B5EF4-FFF2-40B4-BE49-F238E27FC236}">
+                  <a16:creationId xmlns:a16="http://schemas.microsoft.com/office/drawing/2014/main" id="{554AEFD2-F885-7E39-3720-2BAB10EB7CB6}"/>
+                </a:ext>
+              </a:extLst>
+            </p:cNvPr>
+            <p:cNvSpPr/>
+            <p:nvPr/>
+          </p:nvSpPr>
+          <p:spPr>
+            <a:xfrm>
+              <a:off x="2813857" y="2564001"/>
+              <a:ext cx="769187" cy="216015"/>
+            </a:xfrm>
+            <a:prstGeom prst="rect">
+              <a:avLst/>
+            </a:prstGeom>
+            <a:ln w="6350">
+              <a:solidFill>
+                <a:schemeClr val="accent2"/>
+              </a:solidFill>
+            </a:ln>
+          </p:spPr>
+          <p:style>
+            <a:lnRef idx="2">
+              <a:schemeClr val="accent1">
+                <a:shade val="50000"/>
+              </a:schemeClr>
+            </a:lnRef>
+            <a:fillRef idx="1">
+              <a:schemeClr val="accent1"/>
+            </a:fillRef>
+            <a:effectRef idx="0">
+              <a:schemeClr val="accent1"/>
+            </a:effectRef>
+            <a:fontRef idx="minor">
+              <a:schemeClr val="lt1"/>
+            </a:fontRef>
+          </p:style>
+          <p:txBody>
+            <a:bodyPr rtlCol="0" anchor="ctr"/>
+            <a:lstStyle/>
+            <a:p>
+              <a:pPr algn="ctr"/>
+              <a:endParaRPr lang="en-US" b="1" dirty="0">
+                <a:latin typeface="Arial" pitchFamily="34" charset="0"/>
+                <a:cs typeface="Arial" pitchFamily="34" charset="0"/>
+              </a:endParaRPr>
+            </a:p>
+          </p:txBody>
+        </p:sp>
+        <p:sp>
+          <p:nvSpPr>
+            <p:cNvPr id="64" name="Rectangle 63">
+              <a:extLst>
+                <a:ext uri="{FF2B5EF4-FFF2-40B4-BE49-F238E27FC236}">
+                  <a16:creationId xmlns:a16="http://schemas.microsoft.com/office/drawing/2014/main" id="{3D3BA4DC-45AE-9C16-F7F9-6BEE530EB60B}"/>
+                </a:ext>
+              </a:extLst>
+            </p:cNvPr>
+            <p:cNvSpPr/>
+            <p:nvPr/>
+          </p:nvSpPr>
+          <p:spPr>
+            <a:xfrm>
+              <a:off x="2618400" y="2760558"/>
+              <a:ext cx="769187" cy="216015"/>
+            </a:xfrm>
+            <a:prstGeom prst="rect">
+              <a:avLst/>
+            </a:prstGeom>
+            <a:ln w="6350">
+              <a:solidFill>
+                <a:schemeClr val="accent2"/>
+              </a:solidFill>
+            </a:ln>
+          </p:spPr>
+          <p:style>
+            <a:lnRef idx="2">
+              <a:schemeClr val="accent1">
+                <a:shade val="50000"/>
+              </a:schemeClr>
+            </a:lnRef>
+            <a:fillRef idx="1">
+              <a:schemeClr val="accent1"/>
+            </a:fillRef>
+            <a:effectRef idx="0">
+              <a:schemeClr val="accent1"/>
+            </a:effectRef>
+            <a:fontRef idx="minor">
+              <a:schemeClr val="lt1"/>
+            </a:fontRef>
+          </p:style>
+          <p:txBody>
+            <a:bodyPr rtlCol="0" anchor="ctr"/>
+            <a:lstStyle/>
+            <a:p>
+              <a:pPr algn="ctr"/>
+              <a:endParaRPr lang="en-US" b="1" dirty="0">
+                <a:latin typeface="Arial" pitchFamily="34" charset="0"/>
+                <a:cs typeface="Arial" pitchFamily="34" charset="0"/>
+              </a:endParaRPr>
+            </a:p>
+          </p:txBody>
+        </p:sp>
+        <p:sp>
+          <p:nvSpPr>
+            <p:cNvPr id="65" name="Rectangle 64">
+              <a:extLst>
+                <a:ext uri="{FF2B5EF4-FFF2-40B4-BE49-F238E27FC236}">
+                  <a16:creationId xmlns:a16="http://schemas.microsoft.com/office/drawing/2014/main" id="{A3CD0B6F-107A-B61A-781B-1B519766F598}"/>
+                </a:ext>
+              </a:extLst>
+            </p:cNvPr>
+            <p:cNvSpPr/>
+            <p:nvPr/>
+          </p:nvSpPr>
+          <p:spPr>
+            <a:xfrm>
+              <a:off x="2422943" y="2957115"/>
+              <a:ext cx="769187" cy="216015"/>
+            </a:xfrm>
+            <a:prstGeom prst="rect">
+              <a:avLst/>
+            </a:prstGeom>
+            <a:ln w="6350">
+              <a:solidFill>
+                <a:schemeClr val="accent2"/>
+              </a:solidFill>
+            </a:ln>
+          </p:spPr>
+          <p:style>
+            <a:lnRef idx="2">
+              <a:schemeClr val="accent1">
+                <a:shade val="50000"/>
+              </a:schemeClr>
+            </a:lnRef>
+            <a:fillRef idx="1">
+              <a:schemeClr val="accent1"/>
+            </a:fillRef>
+            <a:effectRef idx="0">
+              <a:schemeClr val="accent1"/>
+            </a:effectRef>
+            <a:fontRef idx="minor">
+              <a:schemeClr val="lt1"/>
+            </a:fontRef>
+          </p:style>
+          <p:txBody>
+            <a:bodyPr rtlCol="0" anchor="ctr"/>
+            <a:lstStyle/>
+            <a:p>
+              <a:pPr algn="ctr"/>
+              <a:endParaRPr lang="en-US" b="1" dirty="0">
+                <a:latin typeface="Arial" pitchFamily="34" charset="0"/>
+                <a:cs typeface="Arial" pitchFamily="34" charset="0"/>
+              </a:endParaRPr>
+            </a:p>
+          </p:txBody>
+        </p:sp>
+        <p:sp>
+          <p:nvSpPr>
+            <p:cNvPr id="66" name="Rectangle 65">
+              <a:extLst>
+                <a:ext uri="{FF2B5EF4-FFF2-40B4-BE49-F238E27FC236}">
+                  <a16:creationId xmlns:a16="http://schemas.microsoft.com/office/drawing/2014/main" id="{55051E8F-CB2B-99B3-85C4-48C22DD6ABCE}"/>
+                </a:ext>
+              </a:extLst>
+            </p:cNvPr>
+            <p:cNvSpPr/>
+            <p:nvPr/>
+          </p:nvSpPr>
+          <p:spPr>
+            <a:xfrm>
+              <a:off x="2227486" y="3153670"/>
+              <a:ext cx="769187" cy="216015"/>
+            </a:xfrm>
+            <a:prstGeom prst="rect">
+              <a:avLst/>
+            </a:prstGeom>
+            <a:ln w="6350">
+              <a:solidFill>
+                <a:schemeClr val="accent2"/>
+              </a:solidFill>
+            </a:ln>
+          </p:spPr>
+          <p:style>
+            <a:lnRef idx="2">
+              <a:schemeClr val="accent1">
+                <a:shade val="50000"/>
+              </a:schemeClr>
+            </a:lnRef>
+            <a:fillRef idx="1">
+              <a:schemeClr val="accent1"/>
+            </a:fillRef>
+            <a:effectRef idx="0">
+              <a:schemeClr val="accent1"/>
+            </a:effectRef>
+            <a:fontRef idx="minor">
+              <a:schemeClr val="lt1"/>
+            </a:fontRef>
+          </p:style>
+          <p:txBody>
+            <a:bodyPr rtlCol="0" anchor="ctr"/>
+            <a:lstStyle/>
+            <a:p>
+              <a:pPr algn="ctr"/>
+              <a:endParaRPr lang="en-US" b="1" dirty="0">
+                <a:latin typeface="Arial" pitchFamily="34" charset="0"/>
+                <a:cs typeface="Arial" pitchFamily="34" charset="0"/>
+              </a:endParaRPr>
+            </a:p>
+          </p:txBody>
+        </p:sp>
+      </p:grpSp>
+      <p:grpSp>
+        <p:nvGrpSpPr>
+          <p:cNvPr id="43" name="Group 42">
+            <a:extLst>
+              <a:ext uri="{FF2B5EF4-FFF2-40B4-BE49-F238E27FC236}">
+                <a16:creationId xmlns:a16="http://schemas.microsoft.com/office/drawing/2014/main" id="{1AACD977-F9D2-9D21-4800-7CE2802F9343}"/>
+              </a:ext>
+            </a:extLst>
+          </p:cNvPr>
+          <p:cNvGrpSpPr/>
+          <p:nvPr/>
+        </p:nvGrpSpPr>
+        <p:grpSpPr>
+          <a:xfrm>
+            <a:off x="1487488" y="2483106"/>
+            <a:ext cx="2664296" cy="2188357"/>
+            <a:chOff x="2135560" y="1384659"/>
+            <a:chExt cx="2664296" cy="2188357"/>
+          </a:xfrm>
+        </p:grpSpPr>
+        <p:sp>
+          <p:nvSpPr>
+            <p:cNvPr id="44" name="Cube 43">
+              <a:extLst>
+                <a:ext uri="{FF2B5EF4-FFF2-40B4-BE49-F238E27FC236}">
+                  <a16:creationId xmlns:a16="http://schemas.microsoft.com/office/drawing/2014/main" id="{768196EF-9400-A77B-22A2-F992F0D6FCF7}"/>
+                </a:ext>
+              </a:extLst>
+            </p:cNvPr>
+            <p:cNvSpPr/>
+            <p:nvPr/>
+          </p:nvSpPr>
+          <p:spPr>
+            <a:xfrm>
+              <a:off x="2135560" y="1556792"/>
+              <a:ext cx="2664296" cy="2016224"/>
+            </a:xfrm>
+            <a:prstGeom prst="cube">
+              <a:avLst>
+                <a:gd name="adj" fmla="val 93993"/>
+              </a:avLst>
+            </a:prstGeom>
+            <a:solidFill>
+              <a:srgbClr val="E6B85C"/>
+            </a:solidFill>
+            <a:ln>
+              <a:noFill/>
+            </a:ln>
+          </p:spPr>
+          <p:style>
+            <a:lnRef idx="2">
+              <a:schemeClr val="accent1">
+                <a:shade val="50000"/>
+              </a:schemeClr>
+            </a:lnRef>
+            <a:fillRef idx="1">
+              <a:schemeClr val="accent1"/>
+            </a:fillRef>
+            <a:effectRef idx="0">
+              <a:schemeClr val="accent1"/>
+            </a:effectRef>
+            <a:fontRef idx="minor">
+              <a:schemeClr val="lt1"/>
+            </a:fontRef>
+          </p:style>
+          <p:txBody>
+            <a:bodyPr rtlCol="0" anchor="ctr"/>
+            <a:lstStyle/>
+            <a:p>
+              <a:pPr algn="ctr"/>
+              <a:endParaRPr lang="en-US" b="1" dirty="0">
+                <a:latin typeface="Arial" pitchFamily="34" charset="0"/>
+                <a:cs typeface="Arial" pitchFamily="34" charset="0"/>
+              </a:endParaRPr>
+            </a:p>
+          </p:txBody>
+        </p:sp>
+        <p:sp>
+          <p:nvSpPr>
+            <p:cNvPr id="45" name="Rectangle 44">
+              <a:extLst>
+                <a:ext uri="{FF2B5EF4-FFF2-40B4-BE49-F238E27FC236}">
+                  <a16:creationId xmlns:a16="http://schemas.microsoft.com/office/drawing/2014/main" id="{B733BA86-6DC6-AC24-17E1-EE1D69901ABA}"/>
+                </a:ext>
+              </a:extLst>
+            </p:cNvPr>
+            <p:cNvSpPr/>
+            <p:nvPr/>
+          </p:nvSpPr>
+          <p:spPr>
+            <a:xfrm>
+              <a:off x="3986598" y="1384659"/>
+              <a:ext cx="769187" cy="216015"/>
+            </a:xfrm>
+            <a:prstGeom prst="rect">
+              <a:avLst/>
+            </a:prstGeom>
+            <a:ln w="6350">
+              <a:solidFill>
+                <a:schemeClr val="accent2"/>
+              </a:solidFill>
+            </a:ln>
+          </p:spPr>
+          <p:style>
+            <a:lnRef idx="2">
+              <a:schemeClr val="accent1">
+                <a:shade val="50000"/>
+              </a:schemeClr>
+            </a:lnRef>
+            <a:fillRef idx="1">
+              <a:schemeClr val="accent1"/>
+            </a:fillRef>
+            <a:effectRef idx="0">
+              <a:schemeClr val="accent1"/>
+            </a:effectRef>
+            <a:fontRef idx="minor">
+              <a:schemeClr val="lt1"/>
+            </a:fontRef>
+          </p:style>
+          <p:txBody>
+            <a:bodyPr rtlCol="0" anchor="ctr"/>
+            <a:lstStyle/>
+            <a:p>
+              <a:pPr algn="ctr"/>
+              <a:endParaRPr lang="en-US" b="1" dirty="0">
+                <a:latin typeface="Arial" pitchFamily="34" charset="0"/>
+                <a:cs typeface="Arial" pitchFamily="34" charset="0"/>
+              </a:endParaRPr>
+            </a:p>
+          </p:txBody>
+        </p:sp>
+        <p:sp>
+          <p:nvSpPr>
+            <p:cNvPr id="46" name="Rectangle 45">
+              <a:extLst>
+                <a:ext uri="{FF2B5EF4-FFF2-40B4-BE49-F238E27FC236}">
+                  <a16:creationId xmlns:a16="http://schemas.microsoft.com/office/drawing/2014/main" id="{55A22E2D-84B2-4E65-FB1A-B708C252244B}"/>
+                </a:ext>
+              </a:extLst>
+            </p:cNvPr>
+            <p:cNvSpPr/>
+            <p:nvPr/>
+          </p:nvSpPr>
+          <p:spPr>
+            <a:xfrm>
+              <a:off x="3791142" y="1581216"/>
+              <a:ext cx="769187" cy="216015"/>
+            </a:xfrm>
+            <a:prstGeom prst="rect">
+              <a:avLst/>
+            </a:prstGeom>
+            <a:ln w="6350">
+              <a:solidFill>
+                <a:schemeClr val="accent2"/>
+              </a:solidFill>
+            </a:ln>
+          </p:spPr>
+          <p:style>
+            <a:lnRef idx="2">
+              <a:schemeClr val="accent1">
+                <a:shade val="50000"/>
+              </a:schemeClr>
+            </a:lnRef>
+            <a:fillRef idx="1">
+              <a:schemeClr val="accent1"/>
+            </a:fillRef>
+            <a:effectRef idx="0">
+              <a:schemeClr val="accent1"/>
+            </a:effectRef>
+            <a:fontRef idx="minor">
+              <a:schemeClr val="lt1"/>
+            </a:fontRef>
+          </p:style>
+          <p:txBody>
+            <a:bodyPr rtlCol="0" anchor="ctr"/>
+            <a:lstStyle/>
+            <a:p>
+              <a:pPr algn="ctr"/>
+              <a:endParaRPr lang="en-US" b="1" dirty="0">
+                <a:latin typeface="Arial" pitchFamily="34" charset="0"/>
+                <a:cs typeface="Arial" pitchFamily="34" charset="0"/>
+              </a:endParaRPr>
+            </a:p>
+          </p:txBody>
+        </p:sp>
+        <p:sp>
+          <p:nvSpPr>
+            <p:cNvPr id="47" name="Rectangle 46">
+              <a:extLst>
+                <a:ext uri="{FF2B5EF4-FFF2-40B4-BE49-F238E27FC236}">
+                  <a16:creationId xmlns:a16="http://schemas.microsoft.com/office/drawing/2014/main" id="{515EDAC5-F515-689F-5F71-3D71849AD105}"/>
+                </a:ext>
+              </a:extLst>
+            </p:cNvPr>
+            <p:cNvSpPr/>
+            <p:nvPr/>
+          </p:nvSpPr>
+          <p:spPr>
+            <a:xfrm>
+              <a:off x="3595685" y="1777773"/>
+              <a:ext cx="769187" cy="216015"/>
+            </a:xfrm>
+            <a:prstGeom prst="rect">
+              <a:avLst/>
+            </a:prstGeom>
+            <a:ln w="6350">
+              <a:solidFill>
+                <a:schemeClr val="accent2"/>
+              </a:solidFill>
+            </a:ln>
+          </p:spPr>
+          <p:style>
+            <a:lnRef idx="2">
+              <a:schemeClr val="accent1">
+                <a:shade val="50000"/>
+              </a:schemeClr>
+            </a:lnRef>
+            <a:fillRef idx="1">
+              <a:schemeClr val="accent1"/>
+            </a:fillRef>
+            <a:effectRef idx="0">
+              <a:schemeClr val="accent1"/>
+            </a:effectRef>
+            <a:fontRef idx="minor">
+              <a:schemeClr val="lt1"/>
+            </a:fontRef>
+          </p:style>
+          <p:txBody>
+            <a:bodyPr rtlCol="0" anchor="ctr"/>
+            <a:lstStyle/>
+            <a:p>
+              <a:pPr algn="ctr"/>
+              <a:endParaRPr lang="en-US" b="1" dirty="0">
+                <a:latin typeface="Arial" pitchFamily="34" charset="0"/>
+                <a:cs typeface="Arial" pitchFamily="34" charset="0"/>
+              </a:endParaRPr>
+            </a:p>
+          </p:txBody>
+        </p:sp>
+        <p:sp>
+          <p:nvSpPr>
+            <p:cNvPr id="48" name="Rectangle 47">
+              <a:extLst>
+                <a:ext uri="{FF2B5EF4-FFF2-40B4-BE49-F238E27FC236}">
+                  <a16:creationId xmlns:a16="http://schemas.microsoft.com/office/drawing/2014/main" id="{9A12125A-2683-1BE9-86FE-723487ABF193}"/>
+                </a:ext>
+              </a:extLst>
+            </p:cNvPr>
+            <p:cNvSpPr/>
+            <p:nvPr/>
+          </p:nvSpPr>
+          <p:spPr>
+            <a:xfrm>
+              <a:off x="3400228" y="1974330"/>
+              <a:ext cx="769187" cy="216015"/>
+            </a:xfrm>
+            <a:prstGeom prst="rect">
+              <a:avLst/>
+            </a:prstGeom>
+            <a:ln w="6350">
+              <a:solidFill>
+                <a:schemeClr val="accent2"/>
+              </a:solidFill>
+            </a:ln>
+          </p:spPr>
+          <p:style>
+            <a:lnRef idx="2">
+              <a:schemeClr val="accent1">
+                <a:shade val="50000"/>
+              </a:schemeClr>
+            </a:lnRef>
+            <a:fillRef idx="1">
+              <a:schemeClr val="accent1"/>
+            </a:fillRef>
+            <a:effectRef idx="0">
+              <a:schemeClr val="accent1"/>
+            </a:effectRef>
+            <a:fontRef idx="minor">
+              <a:schemeClr val="lt1"/>
+            </a:fontRef>
+          </p:style>
+          <p:txBody>
+            <a:bodyPr rtlCol="0" anchor="ctr"/>
+            <a:lstStyle/>
+            <a:p>
+              <a:pPr algn="ctr"/>
+              <a:endParaRPr lang="en-US" b="1" dirty="0">
+                <a:latin typeface="Arial" pitchFamily="34" charset="0"/>
+                <a:cs typeface="Arial" pitchFamily="34" charset="0"/>
+              </a:endParaRPr>
+            </a:p>
+          </p:txBody>
+        </p:sp>
+        <p:sp>
+          <p:nvSpPr>
+            <p:cNvPr id="49" name="Rectangle 48">
+              <a:extLst>
+                <a:ext uri="{FF2B5EF4-FFF2-40B4-BE49-F238E27FC236}">
+                  <a16:creationId xmlns:a16="http://schemas.microsoft.com/office/drawing/2014/main" id="{E357EEB7-3C96-9B9E-7B57-153589C5E3B2}"/>
+                </a:ext>
+              </a:extLst>
+            </p:cNvPr>
+            <p:cNvSpPr/>
+            <p:nvPr/>
+          </p:nvSpPr>
+          <p:spPr>
+            <a:xfrm>
+              <a:off x="3204771" y="2170887"/>
+              <a:ext cx="769187" cy="216015"/>
+            </a:xfrm>
+            <a:prstGeom prst="rect">
+              <a:avLst/>
+            </a:prstGeom>
+            <a:ln w="6350">
+              <a:solidFill>
+                <a:schemeClr val="accent2"/>
+              </a:solidFill>
+            </a:ln>
+          </p:spPr>
+          <p:style>
+            <a:lnRef idx="2">
+              <a:schemeClr val="accent1">
+                <a:shade val="50000"/>
+              </a:schemeClr>
+            </a:lnRef>
+            <a:fillRef idx="1">
+              <a:schemeClr val="accent1"/>
+            </a:fillRef>
+            <a:effectRef idx="0">
+              <a:schemeClr val="accent1"/>
+            </a:effectRef>
+            <a:fontRef idx="minor">
+              <a:schemeClr val="lt1"/>
+            </a:fontRef>
+          </p:style>
+          <p:txBody>
+            <a:bodyPr rtlCol="0" anchor="ctr"/>
+            <a:lstStyle/>
+            <a:p>
+              <a:pPr algn="ctr"/>
+              <a:endParaRPr lang="en-US" b="1" dirty="0">
+                <a:latin typeface="Arial" pitchFamily="34" charset="0"/>
+                <a:cs typeface="Arial" pitchFamily="34" charset="0"/>
+              </a:endParaRPr>
+            </a:p>
+          </p:txBody>
+        </p:sp>
+        <p:sp>
+          <p:nvSpPr>
+            <p:cNvPr id="50" name="Rectangle 49">
+              <a:extLst>
+                <a:ext uri="{FF2B5EF4-FFF2-40B4-BE49-F238E27FC236}">
+                  <a16:creationId xmlns:a16="http://schemas.microsoft.com/office/drawing/2014/main" id="{B4F8375B-8F81-FD25-82F6-830661540749}"/>
+                </a:ext>
+              </a:extLst>
+            </p:cNvPr>
+            <p:cNvSpPr/>
+            <p:nvPr/>
+          </p:nvSpPr>
+          <p:spPr>
+            <a:xfrm>
+              <a:off x="3009314" y="2367444"/>
+              <a:ext cx="769187" cy="216015"/>
+            </a:xfrm>
+            <a:prstGeom prst="rect">
+              <a:avLst/>
+            </a:prstGeom>
+            <a:ln w="6350">
+              <a:solidFill>
+                <a:schemeClr val="accent2"/>
+              </a:solidFill>
+            </a:ln>
+          </p:spPr>
+          <p:style>
+            <a:lnRef idx="2">
+              <a:schemeClr val="accent1">
+                <a:shade val="50000"/>
+              </a:schemeClr>
+            </a:lnRef>
+            <a:fillRef idx="1">
+              <a:schemeClr val="accent1"/>
+            </a:fillRef>
+            <a:effectRef idx="0">
+              <a:schemeClr val="accent1"/>
+            </a:effectRef>
+            <a:fontRef idx="minor">
+              <a:schemeClr val="lt1"/>
+            </a:fontRef>
+          </p:style>
+          <p:txBody>
+            <a:bodyPr rtlCol="0" anchor="ctr"/>
+            <a:lstStyle/>
+            <a:p>
+              <a:pPr algn="ctr"/>
+              <a:endParaRPr lang="en-US" b="1" dirty="0">
+                <a:latin typeface="Arial" pitchFamily="34" charset="0"/>
+                <a:cs typeface="Arial" pitchFamily="34" charset="0"/>
+              </a:endParaRPr>
+            </a:p>
+          </p:txBody>
+        </p:sp>
+        <p:sp>
+          <p:nvSpPr>
+            <p:cNvPr id="51" name="Rectangle 50">
+              <a:extLst>
+                <a:ext uri="{FF2B5EF4-FFF2-40B4-BE49-F238E27FC236}">
+                  <a16:creationId xmlns:a16="http://schemas.microsoft.com/office/drawing/2014/main" id="{AFFCEF02-E812-D45B-0850-04E9A20CF187}"/>
+                </a:ext>
+              </a:extLst>
+            </p:cNvPr>
+            <p:cNvSpPr/>
+            <p:nvPr/>
+          </p:nvSpPr>
+          <p:spPr>
+            <a:xfrm>
+              <a:off x="2813857" y="2564001"/>
+              <a:ext cx="769187" cy="216015"/>
+            </a:xfrm>
+            <a:prstGeom prst="rect">
+              <a:avLst/>
+            </a:prstGeom>
+            <a:ln w="6350">
+              <a:solidFill>
+                <a:schemeClr val="accent2"/>
+              </a:solidFill>
+            </a:ln>
+          </p:spPr>
+          <p:style>
+            <a:lnRef idx="2">
+              <a:schemeClr val="accent1">
+                <a:shade val="50000"/>
+              </a:schemeClr>
+            </a:lnRef>
+            <a:fillRef idx="1">
+              <a:schemeClr val="accent1"/>
+            </a:fillRef>
+            <a:effectRef idx="0">
+              <a:schemeClr val="accent1"/>
+            </a:effectRef>
+            <a:fontRef idx="minor">
+              <a:schemeClr val="lt1"/>
+            </a:fontRef>
+          </p:style>
+          <p:txBody>
+            <a:bodyPr rtlCol="0" anchor="ctr"/>
+            <a:lstStyle/>
+            <a:p>
+              <a:pPr algn="ctr"/>
+              <a:endParaRPr lang="en-US" b="1" dirty="0">
+                <a:latin typeface="Arial" pitchFamily="34" charset="0"/>
+                <a:cs typeface="Arial" pitchFamily="34" charset="0"/>
+              </a:endParaRPr>
+            </a:p>
+          </p:txBody>
+        </p:sp>
+        <p:sp>
+          <p:nvSpPr>
+            <p:cNvPr id="52" name="Rectangle 51">
+              <a:extLst>
+                <a:ext uri="{FF2B5EF4-FFF2-40B4-BE49-F238E27FC236}">
+                  <a16:creationId xmlns:a16="http://schemas.microsoft.com/office/drawing/2014/main" id="{AD1B3961-287E-82BB-48D7-905E0ACE89A6}"/>
+                </a:ext>
+              </a:extLst>
+            </p:cNvPr>
+            <p:cNvSpPr/>
+            <p:nvPr/>
+          </p:nvSpPr>
+          <p:spPr>
+            <a:xfrm>
+              <a:off x="2618400" y="2760558"/>
+              <a:ext cx="769187" cy="216015"/>
+            </a:xfrm>
+            <a:prstGeom prst="rect">
+              <a:avLst/>
+            </a:prstGeom>
+            <a:ln w="6350">
+              <a:solidFill>
+                <a:schemeClr val="accent2"/>
+              </a:solidFill>
+            </a:ln>
+          </p:spPr>
+          <p:style>
+            <a:lnRef idx="2">
+              <a:schemeClr val="accent1">
+                <a:shade val="50000"/>
+              </a:schemeClr>
+            </a:lnRef>
+            <a:fillRef idx="1">
+              <a:schemeClr val="accent1"/>
+            </a:fillRef>
+            <a:effectRef idx="0">
+              <a:schemeClr val="accent1"/>
+            </a:effectRef>
+            <a:fontRef idx="minor">
+              <a:schemeClr val="lt1"/>
+            </a:fontRef>
+          </p:style>
+          <p:txBody>
+            <a:bodyPr rtlCol="0" anchor="ctr"/>
+            <a:lstStyle/>
+            <a:p>
+              <a:pPr algn="ctr"/>
+              <a:endParaRPr lang="en-US" b="1" dirty="0">
+                <a:latin typeface="Arial" pitchFamily="34" charset="0"/>
+                <a:cs typeface="Arial" pitchFamily="34" charset="0"/>
+              </a:endParaRPr>
+            </a:p>
+          </p:txBody>
+        </p:sp>
+        <p:sp>
+          <p:nvSpPr>
+            <p:cNvPr id="53" name="Rectangle 52">
+              <a:extLst>
+                <a:ext uri="{FF2B5EF4-FFF2-40B4-BE49-F238E27FC236}">
+                  <a16:creationId xmlns:a16="http://schemas.microsoft.com/office/drawing/2014/main" id="{0878C06B-EFBF-665A-0216-9D4BB1C596FC}"/>
+                </a:ext>
+              </a:extLst>
+            </p:cNvPr>
+            <p:cNvSpPr/>
+            <p:nvPr/>
+          </p:nvSpPr>
+          <p:spPr>
+            <a:xfrm>
+              <a:off x="2422943" y="2957115"/>
+              <a:ext cx="769187" cy="216015"/>
+            </a:xfrm>
+            <a:prstGeom prst="rect">
+              <a:avLst/>
+            </a:prstGeom>
+            <a:ln w="6350">
+              <a:solidFill>
+                <a:schemeClr val="accent2"/>
+              </a:solidFill>
+            </a:ln>
+          </p:spPr>
+          <p:style>
+            <a:lnRef idx="2">
+              <a:schemeClr val="accent1">
+                <a:shade val="50000"/>
+              </a:schemeClr>
+            </a:lnRef>
+            <a:fillRef idx="1">
+              <a:schemeClr val="accent1"/>
+            </a:fillRef>
+            <a:effectRef idx="0">
+              <a:schemeClr val="accent1"/>
+            </a:effectRef>
+            <a:fontRef idx="minor">
+              <a:schemeClr val="lt1"/>
+            </a:fontRef>
+          </p:style>
+          <p:txBody>
+            <a:bodyPr rtlCol="0" anchor="ctr"/>
+            <a:lstStyle/>
+            <a:p>
+              <a:pPr algn="ctr"/>
+              <a:endParaRPr lang="en-US" b="1" dirty="0">
+                <a:latin typeface="Arial" pitchFamily="34" charset="0"/>
+                <a:cs typeface="Arial" pitchFamily="34" charset="0"/>
+              </a:endParaRPr>
+            </a:p>
+          </p:txBody>
+        </p:sp>
+        <p:sp>
+          <p:nvSpPr>
+            <p:cNvPr id="54" name="Rectangle 53">
+              <a:extLst>
+                <a:ext uri="{FF2B5EF4-FFF2-40B4-BE49-F238E27FC236}">
+                  <a16:creationId xmlns:a16="http://schemas.microsoft.com/office/drawing/2014/main" id="{C30388EB-15D0-54A8-D608-5C7D52DBA6C0}"/>
+                </a:ext>
+              </a:extLst>
+            </p:cNvPr>
+            <p:cNvSpPr/>
+            <p:nvPr/>
+          </p:nvSpPr>
+          <p:spPr>
+            <a:xfrm>
+              <a:off x="2227486" y="3153670"/>
+              <a:ext cx="769187" cy="216015"/>
+            </a:xfrm>
+            <a:prstGeom prst="rect">
+              <a:avLst/>
+            </a:prstGeom>
+            <a:ln w="6350">
+              <a:solidFill>
+                <a:schemeClr val="accent2"/>
+              </a:solidFill>
+            </a:ln>
+          </p:spPr>
+          <p:style>
+            <a:lnRef idx="2">
+              <a:schemeClr val="accent1">
+                <a:shade val="50000"/>
+              </a:schemeClr>
+            </a:lnRef>
+            <a:fillRef idx="1">
+              <a:schemeClr val="accent1"/>
+            </a:fillRef>
+            <a:effectRef idx="0">
+              <a:schemeClr val="accent1"/>
+            </a:effectRef>
+            <a:fontRef idx="minor">
+              <a:schemeClr val="lt1"/>
+            </a:fontRef>
+          </p:style>
+          <p:txBody>
+            <a:bodyPr rtlCol="0" anchor="ctr"/>
+            <a:lstStyle/>
+            <a:p>
+              <a:pPr algn="ctr"/>
+              <a:endParaRPr lang="en-US" b="1" dirty="0">
+                <a:latin typeface="Arial" pitchFamily="34" charset="0"/>
+                <a:cs typeface="Arial" pitchFamily="34" charset="0"/>
+              </a:endParaRPr>
+            </a:p>
+          </p:txBody>
+        </p:sp>
+      </p:grpSp>
+      <p:grpSp>
+        <p:nvGrpSpPr>
+          <p:cNvPr id="31" name="Group 30">
+            <a:extLst>
+              <a:ext uri="{FF2B5EF4-FFF2-40B4-BE49-F238E27FC236}">
+                <a16:creationId xmlns:a16="http://schemas.microsoft.com/office/drawing/2014/main" id="{B1FE18FF-9647-2387-DF6C-26F4601305EC}"/>
+              </a:ext>
+            </a:extLst>
+          </p:cNvPr>
+          <p:cNvGrpSpPr/>
+          <p:nvPr/>
+        </p:nvGrpSpPr>
+        <p:grpSpPr>
+          <a:xfrm>
+            <a:off x="1487488" y="1767921"/>
+            <a:ext cx="2664296" cy="2188357"/>
+            <a:chOff x="2135560" y="1384659"/>
+            <a:chExt cx="2664296" cy="2188357"/>
+          </a:xfrm>
+        </p:grpSpPr>
+        <p:sp>
+          <p:nvSpPr>
+            <p:cNvPr id="32" name="Cube 31">
+              <a:extLst>
+                <a:ext uri="{FF2B5EF4-FFF2-40B4-BE49-F238E27FC236}">
+                  <a16:creationId xmlns:a16="http://schemas.microsoft.com/office/drawing/2014/main" id="{AF544D3B-4430-AAFD-7139-60B5586C0E6F}"/>
+                </a:ext>
+              </a:extLst>
+            </p:cNvPr>
+            <p:cNvSpPr/>
+            <p:nvPr/>
+          </p:nvSpPr>
+          <p:spPr>
+            <a:xfrm>
+              <a:off x="2135560" y="1556792"/>
+              <a:ext cx="2664296" cy="2016224"/>
+            </a:xfrm>
+            <a:prstGeom prst="cube">
+              <a:avLst>
+                <a:gd name="adj" fmla="val 93993"/>
+              </a:avLst>
+            </a:prstGeom>
+            <a:solidFill>
+              <a:srgbClr val="E6B85C"/>
+            </a:solidFill>
+            <a:ln>
+              <a:noFill/>
+            </a:ln>
+          </p:spPr>
+          <p:style>
+            <a:lnRef idx="2">
+              <a:schemeClr val="accent1">
+                <a:shade val="50000"/>
+              </a:schemeClr>
+            </a:lnRef>
+            <a:fillRef idx="1">
+              <a:schemeClr val="accent1"/>
+            </a:fillRef>
+            <a:effectRef idx="0">
+              <a:schemeClr val="accent1"/>
+            </a:effectRef>
+            <a:fontRef idx="minor">
+              <a:schemeClr val="lt1"/>
+            </a:fontRef>
+          </p:style>
+          <p:txBody>
+            <a:bodyPr rtlCol="0" anchor="ctr"/>
+            <a:lstStyle/>
+            <a:p>
+              <a:pPr algn="ctr"/>
+              <a:endParaRPr lang="en-US" b="1" dirty="0">
+                <a:latin typeface="Arial" pitchFamily="34" charset="0"/>
+                <a:cs typeface="Arial" pitchFamily="34" charset="0"/>
+              </a:endParaRPr>
+            </a:p>
+          </p:txBody>
+        </p:sp>
+        <p:sp>
+          <p:nvSpPr>
+            <p:cNvPr id="33" name="Rectangle 32">
+              <a:extLst>
+                <a:ext uri="{FF2B5EF4-FFF2-40B4-BE49-F238E27FC236}">
+                  <a16:creationId xmlns:a16="http://schemas.microsoft.com/office/drawing/2014/main" id="{38D51974-CCBD-9612-921A-9594AC917A79}"/>
+                </a:ext>
+              </a:extLst>
+            </p:cNvPr>
+            <p:cNvSpPr/>
+            <p:nvPr/>
+          </p:nvSpPr>
+          <p:spPr>
+            <a:xfrm>
+              <a:off x="3986598" y="1384659"/>
+              <a:ext cx="769187" cy="216015"/>
+            </a:xfrm>
+            <a:prstGeom prst="rect">
+              <a:avLst/>
+            </a:prstGeom>
+            <a:ln w="6350">
+              <a:solidFill>
+                <a:schemeClr val="accent2"/>
+              </a:solidFill>
+            </a:ln>
+          </p:spPr>
+          <p:style>
+            <a:lnRef idx="2">
+              <a:schemeClr val="accent1">
+                <a:shade val="50000"/>
+              </a:schemeClr>
+            </a:lnRef>
+            <a:fillRef idx="1">
+              <a:schemeClr val="accent1"/>
+            </a:fillRef>
+            <a:effectRef idx="0">
+              <a:schemeClr val="accent1"/>
+            </a:effectRef>
+            <a:fontRef idx="minor">
+              <a:schemeClr val="lt1"/>
+            </a:fontRef>
+          </p:style>
+          <p:txBody>
+            <a:bodyPr rtlCol="0" anchor="ctr"/>
+            <a:lstStyle/>
+            <a:p>
+              <a:pPr algn="ctr"/>
+              <a:endParaRPr lang="en-US" b="1" dirty="0">
+                <a:latin typeface="Arial" pitchFamily="34" charset="0"/>
+                <a:cs typeface="Arial" pitchFamily="34" charset="0"/>
+              </a:endParaRPr>
+            </a:p>
+          </p:txBody>
+        </p:sp>
+        <p:sp>
+          <p:nvSpPr>
+            <p:cNvPr id="34" name="Rectangle 33">
+              <a:extLst>
+                <a:ext uri="{FF2B5EF4-FFF2-40B4-BE49-F238E27FC236}">
+                  <a16:creationId xmlns:a16="http://schemas.microsoft.com/office/drawing/2014/main" id="{1C7D2046-9F1F-E890-CBE9-194085C040F7}"/>
+                </a:ext>
+              </a:extLst>
+            </p:cNvPr>
+            <p:cNvSpPr/>
+            <p:nvPr/>
+          </p:nvSpPr>
+          <p:spPr>
+            <a:xfrm>
+              <a:off x="3791142" y="1581216"/>
+              <a:ext cx="769187" cy="216015"/>
+            </a:xfrm>
+            <a:prstGeom prst="rect">
+              <a:avLst/>
+            </a:prstGeom>
+            <a:ln w="6350">
+              <a:solidFill>
+                <a:schemeClr val="accent2"/>
+              </a:solidFill>
+            </a:ln>
+          </p:spPr>
+          <p:style>
+            <a:lnRef idx="2">
+              <a:schemeClr val="accent1">
+                <a:shade val="50000"/>
+              </a:schemeClr>
+            </a:lnRef>
+            <a:fillRef idx="1">
+              <a:schemeClr val="accent1"/>
+            </a:fillRef>
+            <a:effectRef idx="0">
+              <a:schemeClr val="accent1"/>
+            </a:effectRef>
+            <a:fontRef idx="minor">
+              <a:schemeClr val="lt1"/>
+            </a:fontRef>
+          </p:style>
+          <p:txBody>
+            <a:bodyPr rtlCol="0" anchor="ctr"/>
+            <a:lstStyle/>
+            <a:p>
+              <a:pPr algn="ctr"/>
+              <a:endParaRPr lang="en-US" b="1" dirty="0">
+                <a:latin typeface="Arial" pitchFamily="34" charset="0"/>
+                <a:cs typeface="Arial" pitchFamily="34" charset="0"/>
+              </a:endParaRPr>
+            </a:p>
+          </p:txBody>
+        </p:sp>
+        <p:sp>
+          <p:nvSpPr>
+            <p:cNvPr id="35" name="Rectangle 34">
+              <a:extLst>
+                <a:ext uri="{FF2B5EF4-FFF2-40B4-BE49-F238E27FC236}">
+                  <a16:creationId xmlns:a16="http://schemas.microsoft.com/office/drawing/2014/main" id="{E14F6BA2-0AEC-3459-22F3-729B6765DEBE}"/>
+                </a:ext>
+              </a:extLst>
+            </p:cNvPr>
+            <p:cNvSpPr/>
+            <p:nvPr/>
+          </p:nvSpPr>
+          <p:spPr>
+            <a:xfrm>
+              <a:off x="3595685" y="1777773"/>
+              <a:ext cx="769187" cy="216015"/>
+            </a:xfrm>
+            <a:prstGeom prst="rect">
+              <a:avLst/>
+            </a:prstGeom>
+            <a:ln w="6350">
+              <a:solidFill>
+                <a:schemeClr val="accent2"/>
+              </a:solidFill>
+            </a:ln>
+          </p:spPr>
+          <p:style>
+            <a:lnRef idx="2">
+              <a:schemeClr val="accent1">
+                <a:shade val="50000"/>
+              </a:schemeClr>
+            </a:lnRef>
+            <a:fillRef idx="1">
+              <a:schemeClr val="accent1"/>
+            </a:fillRef>
+            <a:effectRef idx="0">
+              <a:schemeClr val="accent1"/>
+            </a:effectRef>
+            <a:fontRef idx="minor">
+              <a:schemeClr val="lt1"/>
+            </a:fontRef>
+          </p:style>
+          <p:txBody>
+            <a:bodyPr rtlCol="0" anchor="ctr"/>
+            <a:lstStyle/>
+            <a:p>
+              <a:pPr algn="ctr"/>
+              <a:endParaRPr lang="en-US" b="1" dirty="0">
+                <a:latin typeface="Arial" pitchFamily="34" charset="0"/>
+                <a:cs typeface="Arial" pitchFamily="34" charset="0"/>
+              </a:endParaRPr>
+            </a:p>
+          </p:txBody>
+        </p:sp>
+        <p:sp>
+          <p:nvSpPr>
+            <p:cNvPr id="36" name="Rectangle 35">
+              <a:extLst>
+                <a:ext uri="{FF2B5EF4-FFF2-40B4-BE49-F238E27FC236}">
+                  <a16:creationId xmlns:a16="http://schemas.microsoft.com/office/drawing/2014/main" id="{78A1E72F-4028-EE2F-770E-CFB4A9194FD4}"/>
+                </a:ext>
+              </a:extLst>
+            </p:cNvPr>
+            <p:cNvSpPr/>
+            <p:nvPr/>
+          </p:nvSpPr>
+          <p:spPr>
+            <a:xfrm>
+              <a:off x="3400228" y="1974330"/>
+              <a:ext cx="769187" cy="216015"/>
+            </a:xfrm>
+            <a:prstGeom prst="rect">
+              <a:avLst/>
+            </a:prstGeom>
+            <a:ln w="6350">
+              <a:solidFill>
+                <a:schemeClr val="accent2"/>
+              </a:solidFill>
+            </a:ln>
+          </p:spPr>
+          <p:style>
+            <a:lnRef idx="2">
+              <a:schemeClr val="accent1">
+                <a:shade val="50000"/>
+              </a:schemeClr>
+            </a:lnRef>
+            <a:fillRef idx="1">
+              <a:schemeClr val="accent1"/>
+            </a:fillRef>
+            <a:effectRef idx="0">
+              <a:schemeClr val="accent1"/>
+            </a:effectRef>
+            <a:fontRef idx="minor">
+              <a:schemeClr val="lt1"/>
+            </a:fontRef>
+          </p:style>
+          <p:txBody>
+            <a:bodyPr rtlCol="0" anchor="ctr"/>
+            <a:lstStyle/>
+            <a:p>
+              <a:pPr algn="ctr"/>
+              <a:endParaRPr lang="en-US" b="1" dirty="0">
+                <a:latin typeface="Arial" pitchFamily="34" charset="0"/>
+                <a:cs typeface="Arial" pitchFamily="34" charset="0"/>
+              </a:endParaRPr>
+            </a:p>
+          </p:txBody>
+        </p:sp>
+        <p:sp>
+          <p:nvSpPr>
+            <p:cNvPr id="37" name="Rectangle 36">
+              <a:extLst>
+                <a:ext uri="{FF2B5EF4-FFF2-40B4-BE49-F238E27FC236}">
+                  <a16:creationId xmlns:a16="http://schemas.microsoft.com/office/drawing/2014/main" id="{3DC5672E-DD55-FAD5-FE1D-A109621029E8}"/>
+                </a:ext>
+              </a:extLst>
+            </p:cNvPr>
+            <p:cNvSpPr/>
+            <p:nvPr/>
+          </p:nvSpPr>
+          <p:spPr>
+            <a:xfrm>
+              <a:off x="3204771" y="2170887"/>
+              <a:ext cx="769187" cy="216015"/>
+            </a:xfrm>
+            <a:prstGeom prst="rect">
+              <a:avLst/>
+            </a:prstGeom>
+            <a:ln w="6350">
+              <a:solidFill>
+                <a:schemeClr val="accent2"/>
+              </a:solidFill>
+            </a:ln>
+          </p:spPr>
+          <p:style>
+            <a:lnRef idx="2">
+              <a:schemeClr val="accent1">
+                <a:shade val="50000"/>
+              </a:schemeClr>
+            </a:lnRef>
+            <a:fillRef idx="1">
+              <a:schemeClr val="accent1"/>
+            </a:fillRef>
+            <a:effectRef idx="0">
+              <a:schemeClr val="accent1"/>
+            </a:effectRef>
+            <a:fontRef idx="minor">
+              <a:schemeClr val="lt1"/>
+            </a:fontRef>
+          </p:style>
+          <p:txBody>
+            <a:bodyPr rtlCol="0" anchor="ctr"/>
+            <a:lstStyle/>
+            <a:p>
+              <a:pPr algn="ctr"/>
+              <a:endParaRPr lang="en-US" b="1" dirty="0">
+                <a:latin typeface="Arial" pitchFamily="34" charset="0"/>
+                <a:cs typeface="Arial" pitchFamily="34" charset="0"/>
+              </a:endParaRPr>
+            </a:p>
+          </p:txBody>
+        </p:sp>
+        <p:sp>
+          <p:nvSpPr>
+            <p:cNvPr id="38" name="Rectangle 37">
+              <a:extLst>
+                <a:ext uri="{FF2B5EF4-FFF2-40B4-BE49-F238E27FC236}">
+                  <a16:creationId xmlns:a16="http://schemas.microsoft.com/office/drawing/2014/main" id="{52466FF7-C31E-78C5-024C-6782C2AD1105}"/>
+                </a:ext>
+              </a:extLst>
+            </p:cNvPr>
+            <p:cNvSpPr/>
+            <p:nvPr/>
+          </p:nvSpPr>
+          <p:spPr>
+            <a:xfrm>
+              <a:off x="3009314" y="2367444"/>
+              <a:ext cx="769187" cy="216015"/>
+            </a:xfrm>
+            <a:prstGeom prst="rect">
+              <a:avLst/>
+            </a:prstGeom>
+            <a:ln w="6350">
+              <a:solidFill>
+                <a:schemeClr val="accent2"/>
+              </a:solidFill>
+            </a:ln>
+          </p:spPr>
+          <p:style>
+            <a:lnRef idx="2">
+              <a:schemeClr val="accent1">
+                <a:shade val="50000"/>
+              </a:schemeClr>
+            </a:lnRef>
+            <a:fillRef idx="1">
+              <a:schemeClr val="accent1"/>
+            </a:fillRef>
+            <a:effectRef idx="0">
+              <a:schemeClr val="accent1"/>
+            </a:effectRef>
+            <a:fontRef idx="minor">
+              <a:schemeClr val="lt1"/>
+            </a:fontRef>
+          </p:style>
+          <p:txBody>
+            <a:bodyPr rtlCol="0" anchor="ctr"/>
+            <a:lstStyle/>
+            <a:p>
+              <a:pPr algn="ctr"/>
+              <a:endParaRPr lang="en-US" b="1" dirty="0">
+                <a:latin typeface="Arial" pitchFamily="34" charset="0"/>
+                <a:cs typeface="Arial" pitchFamily="34" charset="0"/>
+              </a:endParaRPr>
+            </a:p>
+          </p:txBody>
+        </p:sp>
+        <p:sp>
+          <p:nvSpPr>
+            <p:cNvPr id="39" name="Rectangle 38">
+              <a:extLst>
+                <a:ext uri="{FF2B5EF4-FFF2-40B4-BE49-F238E27FC236}">
+                  <a16:creationId xmlns:a16="http://schemas.microsoft.com/office/drawing/2014/main" id="{F15BE164-DF04-9C6D-A0A4-13E1303CCACC}"/>
+                </a:ext>
+              </a:extLst>
+            </p:cNvPr>
+            <p:cNvSpPr/>
+            <p:nvPr/>
+          </p:nvSpPr>
+          <p:spPr>
+            <a:xfrm>
+              <a:off x="2813857" y="2564001"/>
+              <a:ext cx="769187" cy="216015"/>
+            </a:xfrm>
+            <a:prstGeom prst="rect">
+              <a:avLst/>
+            </a:prstGeom>
+            <a:ln w="6350">
+              <a:solidFill>
+                <a:schemeClr val="accent2"/>
+              </a:solidFill>
+            </a:ln>
+          </p:spPr>
+          <p:style>
+            <a:lnRef idx="2">
+              <a:schemeClr val="accent1">
+                <a:shade val="50000"/>
+              </a:schemeClr>
+            </a:lnRef>
+            <a:fillRef idx="1">
+              <a:schemeClr val="accent1"/>
+            </a:fillRef>
+            <a:effectRef idx="0">
+              <a:schemeClr val="accent1"/>
+            </a:effectRef>
+            <a:fontRef idx="minor">
+              <a:schemeClr val="lt1"/>
+            </a:fontRef>
+          </p:style>
+          <p:txBody>
+            <a:bodyPr rtlCol="0" anchor="ctr"/>
+            <a:lstStyle/>
+            <a:p>
+              <a:pPr algn="ctr"/>
+              <a:endParaRPr lang="en-US" b="1" dirty="0">
+                <a:latin typeface="Arial" pitchFamily="34" charset="0"/>
+                <a:cs typeface="Arial" pitchFamily="34" charset="0"/>
+              </a:endParaRPr>
+            </a:p>
+          </p:txBody>
+        </p:sp>
+        <p:sp>
+          <p:nvSpPr>
+            <p:cNvPr id="40" name="Rectangle 39">
+              <a:extLst>
+                <a:ext uri="{FF2B5EF4-FFF2-40B4-BE49-F238E27FC236}">
+                  <a16:creationId xmlns:a16="http://schemas.microsoft.com/office/drawing/2014/main" id="{2F7D8D22-516D-38FE-D192-42AAC0726F1F}"/>
+                </a:ext>
+              </a:extLst>
+            </p:cNvPr>
+            <p:cNvSpPr/>
+            <p:nvPr/>
+          </p:nvSpPr>
+          <p:spPr>
+            <a:xfrm>
+              <a:off x="2618400" y="2760558"/>
+              <a:ext cx="769187" cy="216015"/>
+            </a:xfrm>
+            <a:prstGeom prst="rect">
+              <a:avLst/>
+            </a:prstGeom>
+            <a:ln w="6350">
+              <a:solidFill>
+                <a:schemeClr val="accent2"/>
+              </a:solidFill>
+            </a:ln>
+          </p:spPr>
+          <p:style>
+            <a:lnRef idx="2">
+              <a:schemeClr val="accent1">
+                <a:shade val="50000"/>
+              </a:schemeClr>
+            </a:lnRef>
+            <a:fillRef idx="1">
+              <a:schemeClr val="accent1"/>
+            </a:fillRef>
+            <a:effectRef idx="0">
+              <a:schemeClr val="accent1"/>
+            </a:effectRef>
+            <a:fontRef idx="minor">
+              <a:schemeClr val="lt1"/>
+            </a:fontRef>
+          </p:style>
+          <p:txBody>
+            <a:bodyPr rtlCol="0" anchor="ctr"/>
+            <a:lstStyle/>
+            <a:p>
+              <a:pPr algn="ctr"/>
+              <a:endParaRPr lang="en-US" b="1" dirty="0">
+                <a:latin typeface="Arial" pitchFamily="34" charset="0"/>
+                <a:cs typeface="Arial" pitchFamily="34" charset="0"/>
+              </a:endParaRPr>
+            </a:p>
+          </p:txBody>
+        </p:sp>
+        <p:sp>
+          <p:nvSpPr>
+            <p:cNvPr id="41" name="Rectangle 40">
+              <a:extLst>
+                <a:ext uri="{FF2B5EF4-FFF2-40B4-BE49-F238E27FC236}">
+                  <a16:creationId xmlns:a16="http://schemas.microsoft.com/office/drawing/2014/main" id="{687ED03C-BB1C-359A-BD9C-9D5497B765B8}"/>
+                </a:ext>
+              </a:extLst>
+            </p:cNvPr>
+            <p:cNvSpPr/>
+            <p:nvPr/>
+          </p:nvSpPr>
+          <p:spPr>
+            <a:xfrm>
+              <a:off x="2422943" y="2957115"/>
+              <a:ext cx="769187" cy="216015"/>
+            </a:xfrm>
+            <a:prstGeom prst="rect">
+              <a:avLst/>
+            </a:prstGeom>
+            <a:ln w="6350">
+              <a:solidFill>
+                <a:schemeClr val="accent2"/>
+              </a:solidFill>
+            </a:ln>
+          </p:spPr>
+          <p:style>
+            <a:lnRef idx="2">
+              <a:schemeClr val="accent1">
+                <a:shade val="50000"/>
+              </a:schemeClr>
+            </a:lnRef>
+            <a:fillRef idx="1">
+              <a:schemeClr val="accent1"/>
+            </a:fillRef>
+            <a:effectRef idx="0">
+              <a:schemeClr val="accent1"/>
+            </a:effectRef>
+            <a:fontRef idx="minor">
+              <a:schemeClr val="lt1"/>
+            </a:fontRef>
+          </p:style>
+          <p:txBody>
+            <a:bodyPr rtlCol="0" anchor="ctr"/>
+            <a:lstStyle/>
+            <a:p>
+              <a:pPr algn="ctr"/>
+              <a:endParaRPr lang="en-US" b="1" dirty="0">
+                <a:latin typeface="Arial" pitchFamily="34" charset="0"/>
+                <a:cs typeface="Arial" pitchFamily="34" charset="0"/>
+              </a:endParaRPr>
+            </a:p>
+          </p:txBody>
+        </p:sp>
+        <p:sp>
+          <p:nvSpPr>
+            <p:cNvPr id="42" name="Rectangle 41">
+              <a:extLst>
+                <a:ext uri="{FF2B5EF4-FFF2-40B4-BE49-F238E27FC236}">
+                  <a16:creationId xmlns:a16="http://schemas.microsoft.com/office/drawing/2014/main" id="{92CC47CB-1F89-3255-51E9-95261A7F8F10}"/>
+                </a:ext>
+              </a:extLst>
+            </p:cNvPr>
+            <p:cNvSpPr/>
+            <p:nvPr/>
+          </p:nvSpPr>
+          <p:spPr>
+            <a:xfrm>
+              <a:off x="2227486" y="3153670"/>
+              <a:ext cx="769187" cy="216015"/>
+            </a:xfrm>
+            <a:prstGeom prst="rect">
+              <a:avLst/>
+            </a:prstGeom>
+            <a:ln w="6350">
+              <a:solidFill>
+                <a:schemeClr val="accent2"/>
+              </a:solidFill>
+            </a:ln>
+          </p:spPr>
+          <p:style>
+            <a:lnRef idx="2">
+              <a:schemeClr val="accent1">
+                <a:shade val="50000"/>
+              </a:schemeClr>
+            </a:lnRef>
+            <a:fillRef idx="1">
+              <a:schemeClr val="accent1"/>
+            </a:fillRef>
+            <a:effectRef idx="0">
+              <a:schemeClr val="accent1"/>
+            </a:effectRef>
+            <a:fontRef idx="minor">
+              <a:schemeClr val="lt1"/>
+            </a:fontRef>
+          </p:style>
+          <p:txBody>
+            <a:bodyPr rtlCol="0" anchor="ctr"/>
+            <a:lstStyle/>
+            <a:p>
+              <a:pPr algn="ctr"/>
+              <a:endParaRPr lang="en-US" b="1" dirty="0">
+                <a:latin typeface="Arial" pitchFamily="34" charset="0"/>
+                <a:cs typeface="Arial" pitchFamily="34" charset="0"/>
+              </a:endParaRPr>
+            </a:p>
+          </p:txBody>
+        </p:sp>
+      </p:grpSp>
+      <p:grpSp>
+        <p:nvGrpSpPr>
+          <p:cNvPr id="30" name="Group 29">
+            <a:extLst>
+              <a:ext uri="{FF2B5EF4-FFF2-40B4-BE49-F238E27FC236}">
+                <a16:creationId xmlns:a16="http://schemas.microsoft.com/office/drawing/2014/main" id="{9255D450-BADF-993C-229F-66C8EB4682AC}"/>
+              </a:ext>
+            </a:extLst>
+          </p:cNvPr>
+          <p:cNvGrpSpPr/>
+          <p:nvPr/>
+        </p:nvGrpSpPr>
+        <p:grpSpPr>
+          <a:xfrm>
+            <a:off x="1487488" y="1052736"/>
+            <a:ext cx="2664296" cy="2188357"/>
+            <a:chOff x="2135560" y="1384659"/>
+            <a:chExt cx="2664296" cy="2188357"/>
+          </a:xfrm>
+        </p:grpSpPr>
+        <p:sp>
+          <p:nvSpPr>
+            <p:cNvPr id="6" name="Cube 5">
+              <a:extLst>
+                <a:ext uri="{FF2B5EF4-FFF2-40B4-BE49-F238E27FC236}">
+                  <a16:creationId xmlns:a16="http://schemas.microsoft.com/office/drawing/2014/main" id="{1A4C6DD8-4BFA-7385-63EE-352C8A9F7686}"/>
+                </a:ext>
+              </a:extLst>
+            </p:cNvPr>
+            <p:cNvSpPr/>
+            <p:nvPr/>
+          </p:nvSpPr>
+          <p:spPr>
+            <a:xfrm>
+              <a:off x="2135560" y="1556792"/>
+              <a:ext cx="2664296" cy="2016224"/>
+            </a:xfrm>
+            <a:prstGeom prst="cube">
+              <a:avLst>
+                <a:gd name="adj" fmla="val 93993"/>
+              </a:avLst>
+            </a:prstGeom>
+            <a:solidFill>
+              <a:srgbClr val="E6B85C"/>
+            </a:solidFill>
+            <a:ln>
+              <a:noFill/>
+            </a:ln>
+          </p:spPr>
+          <p:style>
+            <a:lnRef idx="2">
+              <a:schemeClr val="accent1">
+                <a:shade val="50000"/>
+              </a:schemeClr>
+            </a:lnRef>
+            <a:fillRef idx="1">
+              <a:schemeClr val="accent1"/>
+            </a:fillRef>
+            <a:effectRef idx="0">
+              <a:schemeClr val="accent1"/>
+            </a:effectRef>
+            <a:fontRef idx="minor">
+              <a:schemeClr val="lt1"/>
+            </a:fontRef>
+          </p:style>
+          <p:txBody>
+            <a:bodyPr rtlCol="0" anchor="ctr"/>
+            <a:lstStyle/>
+            <a:p>
+              <a:pPr algn="ctr"/>
+              <a:endParaRPr lang="en-US" b="1" dirty="0">
+                <a:latin typeface="Arial" pitchFamily="34" charset="0"/>
+                <a:cs typeface="Arial" pitchFamily="34" charset="0"/>
+              </a:endParaRPr>
+            </a:p>
+          </p:txBody>
+        </p:sp>
+        <p:sp>
+          <p:nvSpPr>
+            <p:cNvPr id="29" name="Rectangle 28">
+              <a:extLst>
+                <a:ext uri="{FF2B5EF4-FFF2-40B4-BE49-F238E27FC236}">
+                  <a16:creationId xmlns:a16="http://schemas.microsoft.com/office/drawing/2014/main" id="{98B24323-3FFD-EA9F-BD97-7CFE26CD6E2A}"/>
+                </a:ext>
+              </a:extLst>
+            </p:cNvPr>
+            <p:cNvSpPr/>
+            <p:nvPr/>
+          </p:nvSpPr>
+          <p:spPr>
+            <a:xfrm>
+              <a:off x="3986598" y="1384659"/>
+              <a:ext cx="769187" cy="216015"/>
+            </a:xfrm>
+            <a:prstGeom prst="rect">
+              <a:avLst/>
+            </a:prstGeom>
+            <a:ln w="6350">
+              <a:solidFill>
+                <a:schemeClr val="accent2"/>
+              </a:solidFill>
+            </a:ln>
+          </p:spPr>
+          <p:style>
+            <a:lnRef idx="2">
+              <a:schemeClr val="accent1">
+                <a:shade val="50000"/>
+              </a:schemeClr>
+            </a:lnRef>
+            <a:fillRef idx="1">
+              <a:schemeClr val="accent1"/>
+            </a:fillRef>
+            <a:effectRef idx="0">
+              <a:schemeClr val="accent1"/>
+            </a:effectRef>
+            <a:fontRef idx="minor">
+              <a:schemeClr val="lt1"/>
+            </a:fontRef>
+          </p:style>
+          <p:txBody>
+            <a:bodyPr rtlCol="0" anchor="ctr"/>
+            <a:lstStyle/>
+            <a:p>
+              <a:pPr algn="ctr"/>
+              <a:endParaRPr lang="en-US" b="1" dirty="0">
+                <a:latin typeface="Arial" pitchFamily="34" charset="0"/>
+                <a:cs typeface="Arial" pitchFamily="34" charset="0"/>
+              </a:endParaRPr>
+            </a:p>
+          </p:txBody>
+        </p:sp>
+        <p:sp>
+          <p:nvSpPr>
+            <p:cNvPr id="28" name="Rectangle 27">
+              <a:extLst>
+                <a:ext uri="{FF2B5EF4-FFF2-40B4-BE49-F238E27FC236}">
+                  <a16:creationId xmlns:a16="http://schemas.microsoft.com/office/drawing/2014/main" id="{2BD24309-84A5-F7A4-7504-05FCF0D9A81E}"/>
+                </a:ext>
+              </a:extLst>
+            </p:cNvPr>
+            <p:cNvSpPr/>
+            <p:nvPr/>
+          </p:nvSpPr>
+          <p:spPr>
+            <a:xfrm>
+              <a:off x="3791142" y="1581216"/>
+              <a:ext cx="769187" cy="216015"/>
+            </a:xfrm>
+            <a:prstGeom prst="rect">
+              <a:avLst/>
+            </a:prstGeom>
+            <a:ln w="6350">
+              <a:solidFill>
+                <a:schemeClr val="accent2"/>
+              </a:solidFill>
+            </a:ln>
+          </p:spPr>
+          <p:style>
+            <a:lnRef idx="2">
+              <a:schemeClr val="accent1">
+                <a:shade val="50000"/>
+              </a:schemeClr>
+            </a:lnRef>
+            <a:fillRef idx="1">
+              <a:schemeClr val="accent1"/>
+            </a:fillRef>
+            <a:effectRef idx="0">
+              <a:schemeClr val="accent1"/>
+            </a:effectRef>
+            <a:fontRef idx="minor">
+              <a:schemeClr val="lt1"/>
+            </a:fontRef>
+          </p:style>
+          <p:txBody>
+            <a:bodyPr rtlCol="0" anchor="ctr"/>
+            <a:lstStyle/>
+            <a:p>
+              <a:pPr algn="ctr"/>
+              <a:endParaRPr lang="en-US" b="1" dirty="0">
+                <a:latin typeface="Arial" pitchFamily="34" charset="0"/>
+                <a:cs typeface="Arial" pitchFamily="34" charset="0"/>
+              </a:endParaRPr>
+            </a:p>
+          </p:txBody>
+        </p:sp>
+        <p:sp>
+          <p:nvSpPr>
+            <p:cNvPr id="27" name="Rectangle 26">
+              <a:extLst>
+                <a:ext uri="{FF2B5EF4-FFF2-40B4-BE49-F238E27FC236}">
+                  <a16:creationId xmlns:a16="http://schemas.microsoft.com/office/drawing/2014/main" id="{A99A16C5-60F8-D14C-14F6-EB669A219D83}"/>
+                </a:ext>
+              </a:extLst>
+            </p:cNvPr>
+            <p:cNvSpPr/>
+            <p:nvPr/>
+          </p:nvSpPr>
+          <p:spPr>
+            <a:xfrm>
+              <a:off x="3595685" y="1777773"/>
+              <a:ext cx="769187" cy="216015"/>
+            </a:xfrm>
+            <a:prstGeom prst="rect">
+              <a:avLst/>
+            </a:prstGeom>
+            <a:ln w="6350">
+              <a:solidFill>
+                <a:schemeClr val="accent2"/>
+              </a:solidFill>
+            </a:ln>
+          </p:spPr>
+          <p:style>
+            <a:lnRef idx="2">
+              <a:schemeClr val="accent1">
+                <a:shade val="50000"/>
+              </a:schemeClr>
+            </a:lnRef>
+            <a:fillRef idx="1">
+              <a:schemeClr val="accent1"/>
+            </a:fillRef>
+            <a:effectRef idx="0">
+              <a:schemeClr val="accent1"/>
+            </a:effectRef>
+            <a:fontRef idx="minor">
+              <a:schemeClr val="lt1"/>
+            </a:fontRef>
+          </p:style>
+          <p:txBody>
+            <a:bodyPr rtlCol="0" anchor="ctr"/>
+            <a:lstStyle/>
+            <a:p>
+              <a:pPr algn="ctr"/>
+              <a:endParaRPr lang="en-US" b="1" dirty="0">
+                <a:latin typeface="Arial" pitchFamily="34" charset="0"/>
+                <a:cs typeface="Arial" pitchFamily="34" charset="0"/>
+              </a:endParaRPr>
+            </a:p>
+          </p:txBody>
+        </p:sp>
+        <p:sp>
+          <p:nvSpPr>
+            <p:cNvPr id="26" name="Rectangle 25">
+              <a:extLst>
+                <a:ext uri="{FF2B5EF4-FFF2-40B4-BE49-F238E27FC236}">
+                  <a16:creationId xmlns:a16="http://schemas.microsoft.com/office/drawing/2014/main" id="{98C3DB8B-A7CD-CA92-8F13-0645BE9E5E48}"/>
+                </a:ext>
+              </a:extLst>
+            </p:cNvPr>
+            <p:cNvSpPr/>
+            <p:nvPr/>
+          </p:nvSpPr>
+          <p:spPr>
+            <a:xfrm>
+              <a:off x="3400228" y="1974330"/>
+              <a:ext cx="769187" cy="216015"/>
+            </a:xfrm>
+            <a:prstGeom prst="rect">
+              <a:avLst/>
+            </a:prstGeom>
+            <a:ln w="6350">
+              <a:solidFill>
+                <a:schemeClr val="accent2"/>
+              </a:solidFill>
+            </a:ln>
+          </p:spPr>
+          <p:style>
+            <a:lnRef idx="2">
+              <a:schemeClr val="accent1">
+                <a:shade val="50000"/>
+              </a:schemeClr>
+            </a:lnRef>
+            <a:fillRef idx="1">
+              <a:schemeClr val="accent1"/>
+            </a:fillRef>
+            <a:effectRef idx="0">
+              <a:schemeClr val="accent1"/>
+            </a:effectRef>
+            <a:fontRef idx="minor">
+              <a:schemeClr val="lt1"/>
+            </a:fontRef>
+          </p:style>
+          <p:txBody>
+            <a:bodyPr rtlCol="0" anchor="ctr"/>
+            <a:lstStyle/>
+            <a:p>
+              <a:pPr algn="ctr"/>
+              <a:endParaRPr lang="en-US" b="1" dirty="0">
+                <a:latin typeface="Arial" pitchFamily="34" charset="0"/>
+                <a:cs typeface="Arial" pitchFamily="34" charset="0"/>
+              </a:endParaRPr>
+            </a:p>
+          </p:txBody>
+        </p:sp>
+        <p:sp>
+          <p:nvSpPr>
+            <p:cNvPr id="25" name="Rectangle 24">
+              <a:extLst>
+                <a:ext uri="{FF2B5EF4-FFF2-40B4-BE49-F238E27FC236}">
+                  <a16:creationId xmlns:a16="http://schemas.microsoft.com/office/drawing/2014/main" id="{930A1365-F84C-2408-F480-E6B35DCC41FE}"/>
+                </a:ext>
+              </a:extLst>
+            </p:cNvPr>
+            <p:cNvSpPr/>
+            <p:nvPr/>
+          </p:nvSpPr>
+          <p:spPr>
+            <a:xfrm>
+              <a:off x="3204771" y="2170887"/>
+              <a:ext cx="769187" cy="216015"/>
+            </a:xfrm>
+            <a:prstGeom prst="rect">
+              <a:avLst/>
+            </a:prstGeom>
+            <a:ln w="6350">
+              <a:solidFill>
+                <a:schemeClr val="accent2"/>
+              </a:solidFill>
+            </a:ln>
+          </p:spPr>
+          <p:style>
+            <a:lnRef idx="2">
+              <a:schemeClr val="accent1">
+                <a:shade val="50000"/>
+              </a:schemeClr>
+            </a:lnRef>
+            <a:fillRef idx="1">
+              <a:schemeClr val="accent1"/>
+            </a:fillRef>
+            <a:effectRef idx="0">
+              <a:schemeClr val="accent1"/>
+            </a:effectRef>
+            <a:fontRef idx="minor">
+              <a:schemeClr val="lt1"/>
+            </a:fontRef>
+          </p:style>
+          <p:txBody>
+            <a:bodyPr rtlCol="0" anchor="ctr"/>
+            <a:lstStyle/>
+            <a:p>
+              <a:pPr algn="ctr"/>
+              <a:endParaRPr lang="en-US" b="1" dirty="0">
+                <a:latin typeface="Arial" pitchFamily="34" charset="0"/>
+                <a:cs typeface="Arial" pitchFamily="34" charset="0"/>
+              </a:endParaRPr>
+            </a:p>
+          </p:txBody>
+        </p:sp>
+        <p:sp>
+          <p:nvSpPr>
+            <p:cNvPr id="24" name="Rectangle 23">
+              <a:extLst>
+                <a:ext uri="{FF2B5EF4-FFF2-40B4-BE49-F238E27FC236}">
+                  <a16:creationId xmlns:a16="http://schemas.microsoft.com/office/drawing/2014/main" id="{F7822F20-394C-7FC8-46EC-B8ECBB1C04B5}"/>
+                </a:ext>
+              </a:extLst>
+            </p:cNvPr>
+            <p:cNvSpPr/>
+            <p:nvPr/>
+          </p:nvSpPr>
+          <p:spPr>
+            <a:xfrm>
+              <a:off x="3009314" y="2367444"/>
+              <a:ext cx="769187" cy="216015"/>
+            </a:xfrm>
+            <a:prstGeom prst="rect">
+              <a:avLst/>
+            </a:prstGeom>
+            <a:ln w="6350">
+              <a:solidFill>
+                <a:schemeClr val="accent2"/>
+              </a:solidFill>
+            </a:ln>
+          </p:spPr>
+          <p:style>
+            <a:lnRef idx="2">
+              <a:schemeClr val="accent1">
+                <a:shade val="50000"/>
+              </a:schemeClr>
+            </a:lnRef>
+            <a:fillRef idx="1">
+              <a:schemeClr val="accent1"/>
+            </a:fillRef>
+            <a:effectRef idx="0">
+              <a:schemeClr val="accent1"/>
+            </a:effectRef>
+            <a:fontRef idx="minor">
+              <a:schemeClr val="lt1"/>
+            </a:fontRef>
+          </p:style>
+          <p:txBody>
+            <a:bodyPr rtlCol="0" anchor="ctr"/>
+            <a:lstStyle/>
+            <a:p>
+              <a:pPr algn="ctr"/>
+              <a:endParaRPr lang="en-US" b="1" dirty="0">
+                <a:latin typeface="Arial" pitchFamily="34" charset="0"/>
+                <a:cs typeface="Arial" pitchFamily="34" charset="0"/>
+              </a:endParaRPr>
+            </a:p>
+          </p:txBody>
+        </p:sp>
+        <p:sp>
+          <p:nvSpPr>
+            <p:cNvPr id="23" name="Rectangle 22">
+              <a:extLst>
+                <a:ext uri="{FF2B5EF4-FFF2-40B4-BE49-F238E27FC236}">
+                  <a16:creationId xmlns:a16="http://schemas.microsoft.com/office/drawing/2014/main" id="{9EA3DCBB-00D8-203D-45B0-155E9EFB7ED1}"/>
+                </a:ext>
+              </a:extLst>
+            </p:cNvPr>
+            <p:cNvSpPr/>
+            <p:nvPr/>
+          </p:nvSpPr>
+          <p:spPr>
+            <a:xfrm>
+              <a:off x="2813857" y="2564001"/>
+              <a:ext cx="769187" cy="216015"/>
+            </a:xfrm>
+            <a:prstGeom prst="rect">
+              <a:avLst/>
+            </a:prstGeom>
+            <a:ln w="6350">
+              <a:solidFill>
+                <a:schemeClr val="accent2"/>
+              </a:solidFill>
+            </a:ln>
+          </p:spPr>
+          <p:style>
+            <a:lnRef idx="2">
+              <a:schemeClr val="accent1">
+                <a:shade val="50000"/>
+              </a:schemeClr>
+            </a:lnRef>
+            <a:fillRef idx="1">
+              <a:schemeClr val="accent1"/>
+            </a:fillRef>
+            <a:effectRef idx="0">
+              <a:schemeClr val="accent1"/>
+            </a:effectRef>
+            <a:fontRef idx="minor">
+              <a:schemeClr val="lt1"/>
+            </a:fontRef>
+          </p:style>
+          <p:txBody>
+            <a:bodyPr rtlCol="0" anchor="ctr"/>
+            <a:lstStyle/>
+            <a:p>
+              <a:pPr algn="ctr"/>
+              <a:endParaRPr lang="en-US" b="1" dirty="0">
+                <a:latin typeface="Arial" pitchFamily="34" charset="0"/>
+                <a:cs typeface="Arial" pitchFamily="34" charset="0"/>
+              </a:endParaRPr>
+            </a:p>
+          </p:txBody>
+        </p:sp>
+        <p:sp>
+          <p:nvSpPr>
+            <p:cNvPr id="22" name="Rectangle 21">
+              <a:extLst>
+                <a:ext uri="{FF2B5EF4-FFF2-40B4-BE49-F238E27FC236}">
+                  <a16:creationId xmlns:a16="http://schemas.microsoft.com/office/drawing/2014/main" id="{8542CFE2-FCEE-3342-17CA-13077D64412E}"/>
+                </a:ext>
+              </a:extLst>
+            </p:cNvPr>
+            <p:cNvSpPr/>
+            <p:nvPr/>
+          </p:nvSpPr>
+          <p:spPr>
+            <a:xfrm>
+              <a:off x="2618400" y="2760558"/>
+              <a:ext cx="769187" cy="216015"/>
+            </a:xfrm>
+            <a:prstGeom prst="rect">
+              <a:avLst/>
+            </a:prstGeom>
+            <a:ln w="6350">
+              <a:solidFill>
+                <a:schemeClr val="accent2"/>
+              </a:solidFill>
+            </a:ln>
+          </p:spPr>
+          <p:style>
+            <a:lnRef idx="2">
+              <a:schemeClr val="accent1">
+                <a:shade val="50000"/>
+              </a:schemeClr>
+            </a:lnRef>
+            <a:fillRef idx="1">
+              <a:schemeClr val="accent1"/>
+            </a:fillRef>
+            <a:effectRef idx="0">
+              <a:schemeClr val="accent1"/>
+            </a:effectRef>
+            <a:fontRef idx="minor">
+              <a:schemeClr val="lt1"/>
+            </a:fontRef>
+          </p:style>
+          <p:txBody>
+            <a:bodyPr rtlCol="0" anchor="ctr"/>
+            <a:lstStyle/>
+            <a:p>
+              <a:pPr algn="ctr"/>
+              <a:endParaRPr lang="en-US" b="1" dirty="0">
+                <a:latin typeface="Arial" pitchFamily="34" charset="0"/>
+                <a:cs typeface="Arial" pitchFamily="34" charset="0"/>
+              </a:endParaRPr>
+            </a:p>
+          </p:txBody>
+        </p:sp>
+        <p:sp>
+          <p:nvSpPr>
+            <p:cNvPr id="21" name="Rectangle 20">
+              <a:extLst>
+                <a:ext uri="{FF2B5EF4-FFF2-40B4-BE49-F238E27FC236}">
+                  <a16:creationId xmlns:a16="http://schemas.microsoft.com/office/drawing/2014/main" id="{162C8545-4AB9-83B9-7E8E-681A14D0F8DA}"/>
+                </a:ext>
+              </a:extLst>
+            </p:cNvPr>
+            <p:cNvSpPr/>
+            <p:nvPr/>
+          </p:nvSpPr>
+          <p:spPr>
+            <a:xfrm>
+              <a:off x="2422943" y="2957115"/>
+              <a:ext cx="769187" cy="216015"/>
+            </a:xfrm>
+            <a:prstGeom prst="rect">
+              <a:avLst/>
+            </a:prstGeom>
+            <a:ln w="6350">
+              <a:solidFill>
+                <a:schemeClr val="accent2"/>
+              </a:solidFill>
+            </a:ln>
+          </p:spPr>
+          <p:style>
+            <a:lnRef idx="2">
+              <a:schemeClr val="accent1">
+                <a:shade val="50000"/>
+              </a:schemeClr>
+            </a:lnRef>
+            <a:fillRef idx="1">
+              <a:schemeClr val="accent1"/>
+            </a:fillRef>
+            <a:effectRef idx="0">
+              <a:schemeClr val="accent1"/>
+            </a:effectRef>
+            <a:fontRef idx="minor">
+              <a:schemeClr val="lt1"/>
+            </a:fontRef>
+          </p:style>
+          <p:txBody>
+            <a:bodyPr rtlCol="0" anchor="ctr"/>
+            <a:lstStyle/>
+            <a:p>
+              <a:pPr algn="ctr"/>
+              <a:endParaRPr lang="en-US" b="1" dirty="0">
+                <a:latin typeface="Arial" pitchFamily="34" charset="0"/>
+                <a:cs typeface="Arial" pitchFamily="34" charset="0"/>
+              </a:endParaRPr>
+            </a:p>
+          </p:txBody>
+        </p:sp>
+        <p:sp>
+          <p:nvSpPr>
+            <p:cNvPr id="20" name="Rectangle 19">
+              <a:extLst>
+                <a:ext uri="{FF2B5EF4-FFF2-40B4-BE49-F238E27FC236}">
+                  <a16:creationId xmlns:a16="http://schemas.microsoft.com/office/drawing/2014/main" id="{92BE0CAC-8906-BFD6-4958-CEEA977C063D}"/>
+                </a:ext>
+              </a:extLst>
+            </p:cNvPr>
+            <p:cNvSpPr/>
+            <p:nvPr/>
+          </p:nvSpPr>
+          <p:spPr>
+            <a:xfrm>
+              <a:off x="2227486" y="3153670"/>
+              <a:ext cx="769187" cy="216015"/>
+            </a:xfrm>
+            <a:prstGeom prst="rect">
+              <a:avLst/>
+            </a:prstGeom>
+            <a:ln w="6350">
+              <a:solidFill>
+                <a:schemeClr val="accent2"/>
+              </a:solidFill>
+            </a:ln>
+          </p:spPr>
+          <p:style>
+            <a:lnRef idx="2">
+              <a:schemeClr val="accent1">
+                <a:shade val="50000"/>
+              </a:schemeClr>
+            </a:lnRef>
+            <a:fillRef idx="1">
+              <a:schemeClr val="accent1"/>
+            </a:fillRef>
+            <a:effectRef idx="0">
+              <a:schemeClr val="accent1"/>
+            </a:effectRef>
+            <a:fontRef idx="minor">
+              <a:schemeClr val="lt1"/>
+            </a:fontRef>
+          </p:style>
+          <p:txBody>
+            <a:bodyPr rtlCol="0" anchor="ctr"/>
+            <a:lstStyle/>
+            <a:p>
+              <a:pPr algn="ctr"/>
+              <a:endParaRPr lang="en-US" b="1" dirty="0">
+                <a:latin typeface="Arial" pitchFamily="34" charset="0"/>
+                <a:cs typeface="Arial" pitchFamily="34" charset="0"/>
+              </a:endParaRPr>
+            </a:p>
+          </p:txBody>
+        </p:sp>
+      </p:grpSp>
+      <p:cxnSp>
+        <p:nvCxnSpPr>
+          <p:cNvPr id="71" name="Straight Arrow Connector 70">
+            <a:extLst>
+              <a:ext uri="{FF2B5EF4-FFF2-40B4-BE49-F238E27FC236}">
+                <a16:creationId xmlns:a16="http://schemas.microsoft.com/office/drawing/2014/main" id="{2E7241F4-6F47-2622-2F90-C762EB8128CF}"/>
+              </a:ext>
+            </a:extLst>
+          </p:cNvPr>
+          <p:cNvCxnSpPr>
+            <a:cxnSpLocks/>
+          </p:cNvCxnSpPr>
+          <p:nvPr/>
+        </p:nvCxnSpPr>
+        <p:spPr>
+          <a:xfrm flipH="1">
+            <a:off x="1487339" y="5445224"/>
+            <a:ext cx="769187" cy="0"/>
+          </a:xfrm>
+          <a:prstGeom prst="straightConnector1">
+            <a:avLst/>
+          </a:prstGeom>
+          <a:ln w="19050">
+            <a:solidFill>
+              <a:schemeClr val="tx1"/>
+            </a:solidFill>
+            <a:headEnd type="triangle"/>
+            <a:tailEnd type="triangle"/>
+          </a:ln>
+        </p:spPr>
+        <p:style>
+          <a:lnRef idx="1">
+            <a:schemeClr val="accent1"/>
+          </a:lnRef>
+          <a:fillRef idx="0">
+            <a:schemeClr val="accent1"/>
+          </a:fillRef>
+          <a:effectRef idx="0">
+            <a:schemeClr val="accent1"/>
+          </a:effectRef>
+          <a:fontRef idx="minor">
+            <a:schemeClr val="tx1"/>
+          </a:fontRef>
+        </p:style>
+      </p:cxnSp>
+      <p:cxnSp>
+        <p:nvCxnSpPr>
+          <p:cNvPr id="81" name="Straight Arrow Connector 80">
+            <a:extLst>
+              <a:ext uri="{FF2B5EF4-FFF2-40B4-BE49-F238E27FC236}">
+                <a16:creationId xmlns:a16="http://schemas.microsoft.com/office/drawing/2014/main" id="{E2868C6E-99B2-EA95-4C82-3859C15F5879}"/>
+              </a:ext>
+            </a:extLst>
+          </p:cNvPr>
+          <p:cNvCxnSpPr>
+            <a:cxnSpLocks/>
+          </p:cNvCxnSpPr>
+          <p:nvPr/>
+        </p:nvCxnSpPr>
+        <p:spPr>
+          <a:xfrm flipV="1">
+            <a:off x="1443038" y="3097721"/>
+            <a:ext cx="0" cy="172801"/>
+          </a:xfrm>
+          <a:prstGeom prst="straightConnector1">
+            <a:avLst/>
+          </a:prstGeom>
+          <a:ln w="19050">
+            <a:solidFill>
+              <a:schemeClr val="tx1"/>
+            </a:solidFill>
+            <a:headEnd type="triangle"/>
+            <a:tailEnd type="triangle"/>
+          </a:ln>
+        </p:spPr>
+        <p:style>
+          <a:lnRef idx="1">
+            <a:schemeClr val="accent1"/>
+          </a:lnRef>
+          <a:fillRef idx="0">
+            <a:schemeClr val="accent1"/>
+          </a:fillRef>
+          <a:effectRef idx="0">
+            <a:schemeClr val="accent1"/>
+          </a:effectRef>
+          <a:fontRef idx="minor">
+            <a:schemeClr val="tx1"/>
+          </a:fontRef>
+        </p:style>
+      </p:cxnSp>
+      <p:cxnSp>
+        <p:nvCxnSpPr>
+          <p:cNvPr id="84" name="Straight Arrow Connector 83">
+            <a:extLst>
+              <a:ext uri="{FF2B5EF4-FFF2-40B4-BE49-F238E27FC236}">
+                <a16:creationId xmlns:a16="http://schemas.microsoft.com/office/drawing/2014/main" id="{FDEEFC3B-FD49-F5C8-6291-FFADB7AC79B8}"/>
+              </a:ext>
+            </a:extLst>
+          </p:cNvPr>
+          <p:cNvCxnSpPr>
+            <a:cxnSpLocks/>
+          </p:cNvCxnSpPr>
+          <p:nvPr/>
+        </p:nvCxnSpPr>
+        <p:spPr>
+          <a:xfrm flipH="1">
+            <a:off x="2717974" y="3147318"/>
+            <a:ext cx="215931" cy="225617"/>
+          </a:xfrm>
+          <a:prstGeom prst="straightConnector1">
+            <a:avLst/>
+          </a:prstGeom>
+          <a:ln w="19050">
+            <a:solidFill>
+              <a:schemeClr val="tx1"/>
+            </a:solidFill>
+            <a:headEnd type="triangle"/>
+            <a:tailEnd type="triangle"/>
+          </a:ln>
+        </p:spPr>
+        <p:style>
+          <a:lnRef idx="1">
+            <a:schemeClr val="accent1"/>
+          </a:lnRef>
+          <a:fillRef idx="0">
+            <a:schemeClr val="accent1"/>
+          </a:fillRef>
+          <a:effectRef idx="0">
+            <a:schemeClr val="accent1"/>
+          </a:effectRef>
+          <a:fontRef idx="minor">
+            <a:schemeClr val="tx1"/>
+          </a:fontRef>
+        </p:style>
+      </p:cxnSp>
+      <p:sp>
+        <p:nvSpPr>
+          <p:cNvPr id="86" name="TextBox 85">
+            <a:extLst>
+              <a:ext uri="{FF2B5EF4-FFF2-40B4-BE49-F238E27FC236}">
+                <a16:creationId xmlns:a16="http://schemas.microsoft.com/office/drawing/2014/main" id="{F60881BD-93B3-B1C3-02E4-4B745994DD47}"/>
+              </a:ext>
+            </a:extLst>
+          </p:cNvPr>
+          <p:cNvSpPr txBox="1"/>
+          <p:nvPr/>
+        </p:nvSpPr>
+        <p:spPr>
+          <a:xfrm>
+            <a:off x="2808392" y="3140968"/>
+            <a:ext cx="1028172" cy="253916"/>
+          </a:xfrm>
+          <a:prstGeom prst="rect">
+            <a:avLst/>
+          </a:prstGeom>
+          <a:noFill/>
+        </p:spPr>
+        <p:txBody>
+          <a:bodyPr wrap="square" rtlCol="0">
+            <a:spAutoFit/>
+          </a:bodyPr>
+          <a:lstStyle/>
+          <a:p>
+            <a:r>
+              <a:rPr lang="en-US" sz="1050" b="1" dirty="0">
+                <a:latin typeface="Courier New" panose="02070309020205020404" pitchFamily="49" charset="0"/>
+                <a:cs typeface="Courier New" panose="02070309020205020404" pitchFamily="49" charset="0"/>
+              </a:rPr>
+              <a:t>finSpacing</a:t>
+            </a:r>
+          </a:p>
+        </p:txBody>
+      </p:sp>
+      <p:cxnSp>
+        <p:nvCxnSpPr>
+          <p:cNvPr id="87" name="Straight Arrow Connector 86">
+            <a:extLst>
+              <a:ext uri="{FF2B5EF4-FFF2-40B4-BE49-F238E27FC236}">
+                <a16:creationId xmlns:a16="http://schemas.microsoft.com/office/drawing/2014/main" id="{EBCB1C53-9287-588E-E6A6-E2FE776F032B}"/>
+              </a:ext>
+            </a:extLst>
+          </p:cNvPr>
+          <p:cNvCxnSpPr>
+            <a:cxnSpLocks/>
+          </p:cNvCxnSpPr>
+          <p:nvPr/>
+        </p:nvCxnSpPr>
+        <p:spPr>
+          <a:xfrm flipV="1">
+            <a:off x="1487488" y="3956278"/>
+            <a:ext cx="0" cy="594070"/>
+          </a:xfrm>
+          <a:prstGeom prst="straightConnector1">
+            <a:avLst/>
+          </a:prstGeom>
+          <a:ln w="19050">
+            <a:solidFill>
+              <a:schemeClr val="tx1"/>
+            </a:solidFill>
+            <a:headEnd type="triangle"/>
+            <a:tailEnd type="triangle"/>
+          </a:ln>
+        </p:spPr>
+        <p:style>
+          <a:lnRef idx="1">
+            <a:schemeClr val="accent1"/>
+          </a:lnRef>
+          <a:fillRef idx="0">
+            <a:schemeClr val="accent1"/>
+          </a:fillRef>
+          <a:effectRef idx="0">
+            <a:schemeClr val="accent1"/>
+          </a:effectRef>
+          <a:fontRef idx="minor">
+            <a:schemeClr val="tx1"/>
+          </a:fontRef>
+        </p:style>
+      </p:cxnSp>
+      <p:sp>
+        <p:nvSpPr>
+          <p:cNvPr id="93" name="TextBox 92">
+            <a:extLst>
+              <a:ext uri="{FF2B5EF4-FFF2-40B4-BE49-F238E27FC236}">
+                <a16:creationId xmlns:a16="http://schemas.microsoft.com/office/drawing/2014/main" id="{0AF9F5B7-564D-9FA1-BC06-1AA470E67E0A}"/>
+              </a:ext>
+            </a:extLst>
+          </p:cNvPr>
+          <p:cNvSpPr txBox="1"/>
+          <p:nvPr/>
+        </p:nvSpPr>
+        <p:spPr>
+          <a:xfrm>
+            <a:off x="623396" y="4123716"/>
+            <a:ext cx="933794" cy="253916"/>
+          </a:xfrm>
+          <a:prstGeom prst="rect">
+            <a:avLst/>
+          </a:prstGeom>
+          <a:noFill/>
+        </p:spPr>
+        <p:txBody>
+          <a:bodyPr wrap="square" rtlCol="0">
+            <a:spAutoFit/>
+          </a:bodyPr>
+          <a:lstStyle/>
+          <a:p>
+            <a:r>
+              <a:rPr lang="en-US" sz="1050" b="1" dirty="0">
+                <a:latin typeface="Courier New" panose="02070309020205020404" pitchFamily="49" charset="0"/>
+                <a:cs typeface="Courier New" panose="02070309020205020404" pitchFamily="49" charset="0"/>
+              </a:rPr>
+              <a:t>gapHTubes</a:t>
+            </a:r>
+          </a:p>
+        </p:txBody>
+      </p:sp>
+      <p:cxnSp>
+        <p:nvCxnSpPr>
+          <p:cNvPr id="94" name="Straight Arrow Connector 93">
+            <a:extLst>
+              <a:ext uri="{FF2B5EF4-FFF2-40B4-BE49-F238E27FC236}">
+                <a16:creationId xmlns:a16="http://schemas.microsoft.com/office/drawing/2014/main" id="{A4CD8774-8163-B10E-EEBE-AF3A10E46646}"/>
+              </a:ext>
+            </a:extLst>
+          </p:cNvPr>
+          <p:cNvCxnSpPr>
+            <a:cxnSpLocks/>
+          </p:cNvCxnSpPr>
+          <p:nvPr/>
+        </p:nvCxnSpPr>
+        <p:spPr>
+          <a:xfrm flipH="1">
+            <a:off x="2344506" y="3533117"/>
+            <a:ext cx="1829502" cy="1864118"/>
+          </a:xfrm>
+          <a:prstGeom prst="straightConnector1">
+            <a:avLst/>
+          </a:prstGeom>
+          <a:ln w="19050">
+            <a:solidFill>
+              <a:schemeClr val="tx1"/>
+            </a:solidFill>
+            <a:headEnd type="triangle"/>
+            <a:tailEnd type="triangle"/>
+          </a:ln>
+        </p:spPr>
+        <p:style>
+          <a:lnRef idx="1">
+            <a:schemeClr val="accent1"/>
+          </a:lnRef>
+          <a:fillRef idx="0">
+            <a:schemeClr val="accent1"/>
+          </a:fillRef>
+          <a:effectRef idx="0">
+            <a:schemeClr val="accent1"/>
+          </a:effectRef>
+          <a:fontRef idx="minor">
+            <a:schemeClr val="tx1"/>
+          </a:fontRef>
+        </p:style>
+      </p:cxnSp>
+      <p:sp>
+        <p:nvSpPr>
+          <p:cNvPr id="100" name="TextBox 99">
+            <a:extLst>
+              <a:ext uri="{FF2B5EF4-FFF2-40B4-BE49-F238E27FC236}">
+                <a16:creationId xmlns:a16="http://schemas.microsoft.com/office/drawing/2014/main" id="{C6A0D841-0065-498F-4272-9076E36F783D}"/>
+              </a:ext>
+            </a:extLst>
+          </p:cNvPr>
+          <p:cNvSpPr txBox="1"/>
+          <p:nvPr/>
+        </p:nvSpPr>
+        <p:spPr>
+          <a:xfrm rot="18836397">
+            <a:off x="2873694" y="4409686"/>
+            <a:ext cx="1028172" cy="253916"/>
+          </a:xfrm>
+          <a:prstGeom prst="rect">
+            <a:avLst/>
+          </a:prstGeom>
+          <a:noFill/>
+        </p:spPr>
+        <p:txBody>
+          <a:bodyPr wrap="square" rtlCol="0">
+            <a:spAutoFit/>
+          </a:bodyPr>
+          <a:lstStyle/>
+          <a:p>
+            <a:r>
+              <a:rPr lang="en-US" sz="1050" b="1" dirty="0">
+                <a:latin typeface="Courier New" panose="02070309020205020404" pitchFamily="49" charset="0"/>
+                <a:cs typeface="Courier New" panose="02070309020205020404" pitchFamily="49" charset="0"/>
+              </a:rPr>
+              <a:t>HEXTubeL</a:t>
+            </a:r>
+          </a:p>
+        </p:txBody>
+      </p:sp>
+      <p:cxnSp>
+        <p:nvCxnSpPr>
+          <p:cNvPr id="101" name="Straight Arrow Connector 100">
+            <a:extLst>
+              <a:ext uri="{FF2B5EF4-FFF2-40B4-BE49-F238E27FC236}">
+                <a16:creationId xmlns:a16="http://schemas.microsoft.com/office/drawing/2014/main" id="{B26739A0-7B1E-345D-A741-2C49D784C030}"/>
+              </a:ext>
+            </a:extLst>
+          </p:cNvPr>
+          <p:cNvCxnSpPr>
+            <a:cxnSpLocks/>
+          </p:cNvCxnSpPr>
+          <p:nvPr/>
+        </p:nvCxnSpPr>
+        <p:spPr>
+          <a:xfrm>
+            <a:off x="4266853" y="620688"/>
+            <a:ext cx="0" cy="2808312"/>
+          </a:xfrm>
+          <a:prstGeom prst="straightConnector1">
+            <a:avLst/>
+          </a:prstGeom>
+          <a:ln w="19050">
+            <a:solidFill>
+              <a:schemeClr val="tx1"/>
+            </a:solidFill>
+            <a:headEnd type="triangle"/>
+            <a:tailEnd type="triangle"/>
+          </a:ln>
+        </p:spPr>
+        <p:style>
+          <a:lnRef idx="1">
+            <a:schemeClr val="accent1"/>
+          </a:lnRef>
+          <a:fillRef idx="0">
+            <a:schemeClr val="accent1"/>
+          </a:fillRef>
+          <a:effectRef idx="0">
+            <a:schemeClr val="accent1"/>
+          </a:effectRef>
+          <a:fontRef idx="minor">
+            <a:schemeClr val="tx1"/>
+          </a:fontRef>
+        </p:style>
+      </p:cxnSp>
+      <p:sp>
+        <p:nvSpPr>
+          <p:cNvPr id="105" name="TextBox 104">
+            <a:extLst>
+              <a:ext uri="{FF2B5EF4-FFF2-40B4-BE49-F238E27FC236}">
+                <a16:creationId xmlns:a16="http://schemas.microsoft.com/office/drawing/2014/main" id="{B9EAA2B9-0FB4-173B-C3D0-A91F519F2658}"/>
+              </a:ext>
+            </a:extLst>
+          </p:cNvPr>
+          <p:cNvSpPr txBox="1"/>
+          <p:nvPr/>
+        </p:nvSpPr>
+        <p:spPr>
+          <a:xfrm>
+            <a:off x="4348775" y="1457765"/>
+            <a:ext cx="1028172" cy="253916"/>
+          </a:xfrm>
+          <a:prstGeom prst="rect">
+            <a:avLst/>
+          </a:prstGeom>
+          <a:noFill/>
+        </p:spPr>
+        <p:txBody>
+          <a:bodyPr wrap="square" rtlCol="0">
+            <a:spAutoFit/>
+          </a:bodyPr>
+          <a:lstStyle/>
+          <a:p>
+            <a:r>
+              <a:rPr lang="en-US" sz="1050" b="1" dirty="0">
+                <a:latin typeface="Courier New" panose="02070309020205020404" pitchFamily="49" charset="0"/>
+                <a:cs typeface="Courier New" panose="02070309020205020404" pitchFamily="49" charset="0"/>
+              </a:rPr>
+              <a:t>HEXCoreH</a:t>
+            </a:r>
+          </a:p>
+        </p:txBody>
+      </p:sp>
+      <p:cxnSp>
+        <p:nvCxnSpPr>
+          <p:cNvPr id="109" name="Straight Arrow Connector 108">
+            <a:extLst>
+              <a:ext uri="{FF2B5EF4-FFF2-40B4-BE49-F238E27FC236}">
+                <a16:creationId xmlns:a16="http://schemas.microsoft.com/office/drawing/2014/main" id="{80DD7DC5-C994-8DD5-5BFC-8C4D8B34FFDC}"/>
+              </a:ext>
+            </a:extLst>
+          </p:cNvPr>
+          <p:cNvCxnSpPr>
+            <a:cxnSpLocks/>
+          </p:cNvCxnSpPr>
+          <p:nvPr/>
+        </p:nvCxnSpPr>
+        <p:spPr>
+          <a:xfrm flipH="1">
+            <a:off x="4079776" y="2458297"/>
+            <a:ext cx="864096" cy="0"/>
+          </a:xfrm>
+          <a:prstGeom prst="straightConnector1">
+            <a:avLst/>
+          </a:prstGeom>
+          <a:ln w="57150">
+            <a:solidFill>
+              <a:srgbClr val="9064FF"/>
+            </a:solidFill>
+            <a:tailEnd type="triangle"/>
+          </a:ln>
+        </p:spPr>
+        <p:style>
+          <a:lnRef idx="1">
+            <a:schemeClr val="accent1"/>
+          </a:lnRef>
+          <a:fillRef idx="0">
+            <a:schemeClr val="accent1"/>
+          </a:fillRef>
+          <a:effectRef idx="0">
+            <a:schemeClr val="accent1"/>
+          </a:effectRef>
+          <a:fontRef idx="minor">
+            <a:schemeClr val="tx1"/>
+          </a:fontRef>
+        </p:style>
+      </p:cxnSp>
+      <p:sp>
+        <p:nvSpPr>
+          <p:cNvPr id="111" name="TextBox 110">
+            <a:extLst>
+              <a:ext uri="{FF2B5EF4-FFF2-40B4-BE49-F238E27FC236}">
+                <a16:creationId xmlns:a16="http://schemas.microsoft.com/office/drawing/2014/main" id="{3AF267D9-F779-4415-9EF1-181EBAF4A537}"/>
+              </a:ext>
+            </a:extLst>
+          </p:cNvPr>
+          <p:cNvSpPr txBox="1"/>
+          <p:nvPr/>
+        </p:nvSpPr>
+        <p:spPr>
+          <a:xfrm>
+            <a:off x="4498627" y="2458297"/>
+            <a:ext cx="1540320" cy="253916"/>
+          </a:xfrm>
+          <a:prstGeom prst="rect">
+            <a:avLst/>
+          </a:prstGeom>
+          <a:noFill/>
+        </p:spPr>
+        <p:txBody>
+          <a:bodyPr wrap="square" rtlCol="0">
+            <a:spAutoFit/>
+          </a:bodyPr>
+          <a:lstStyle/>
+          <a:p>
+            <a:r>
+              <a:rPr lang="en-US" sz="1050" b="1" dirty="0">
+                <a:latin typeface="+mj-lt"/>
+                <a:cs typeface="Courier New" panose="02070309020205020404" pitchFamily="49" charset="0"/>
+              </a:rPr>
+              <a:t>Moist Air flow</a:t>
+            </a:r>
+          </a:p>
+        </p:txBody>
+      </p:sp>
+      <p:cxnSp>
+        <p:nvCxnSpPr>
+          <p:cNvPr id="112" name="Straight Arrow Connector 111">
+            <a:extLst>
+              <a:ext uri="{FF2B5EF4-FFF2-40B4-BE49-F238E27FC236}">
+                <a16:creationId xmlns:a16="http://schemas.microsoft.com/office/drawing/2014/main" id="{F8469A01-6A76-8F94-F9E1-77B1117978D1}"/>
+              </a:ext>
+            </a:extLst>
+          </p:cNvPr>
+          <p:cNvCxnSpPr>
+            <a:cxnSpLocks/>
+          </p:cNvCxnSpPr>
+          <p:nvPr/>
+        </p:nvCxnSpPr>
+        <p:spPr>
+          <a:xfrm flipV="1">
+            <a:off x="1055440" y="4672550"/>
+            <a:ext cx="523974" cy="510766"/>
+          </a:xfrm>
+          <a:prstGeom prst="straightConnector1">
+            <a:avLst/>
+          </a:prstGeom>
+          <a:ln w="57150">
+            <a:solidFill>
+              <a:srgbClr val="EBC67C"/>
+            </a:solidFill>
+            <a:tailEnd type="triangle"/>
+          </a:ln>
+        </p:spPr>
+        <p:style>
+          <a:lnRef idx="1">
+            <a:schemeClr val="accent1"/>
+          </a:lnRef>
+          <a:fillRef idx="0">
+            <a:schemeClr val="accent1"/>
+          </a:fillRef>
+          <a:effectRef idx="0">
+            <a:schemeClr val="accent1"/>
+          </a:effectRef>
+          <a:fontRef idx="minor">
+            <a:schemeClr val="tx1"/>
+          </a:fontRef>
+        </p:style>
+      </p:cxnSp>
+      <p:sp>
+        <p:nvSpPr>
+          <p:cNvPr id="114" name="TextBox 113">
+            <a:extLst>
+              <a:ext uri="{FF2B5EF4-FFF2-40B4-BE49-F238E27FC236}">
+                <a16:creationId xmlns:a16="http://schemas.microsoft.com/office/drawing/2014/main" id="{ACC2D184-E093-2884-1D7A-BA2389497832}"/>
+              </a:ext>
+            </a:extLst>
+          </p:cNvPr>
+          <p:cNvSpPr txBox="1"/>
+          <p:nvPr/>
+        </p:nvSpPr>
+        <p:spPr>
+          <a:xfrm>
+            <a:off x="49233" y="5077884"/>
+            <a:ext cx="1540320" cy="253916"/>
+          </a:xfrm>
+          <a:prstGeom prst="rect">
+            <a:avLst/>
+          </a:prstGeom>
+          <a:noFill/>
+        </p:spPr>
+        <p:txBody>
+          <a:bodyPr wrap="square" rtlCol="0">
+            <a:spAutoFit/>
+          </a:bodyPr>
+          <a:lstStyle/>
+          <a:p>
+            <a:r>
+              <a:rPr lang="en-US" sz="1050" b="1" dirty="0">
+                <a:latin typeface="+mj-lt"/>
+                <a:cs typeface="Courier New" panose="02070309020205020404" pitchFamily="49" charset="0"/>
+              </a:rPr>
+              <a:t>Thermal Liquid flow</a:t>
+            </a:r>
+          </a:p>
+        </p:txBody>
+      </p:sp>
+    </p:spTree>
+    <p:extLst>
+      <p:ext uri="{BB962C8B-B14F-4D97-AF65-F5344CB8AC3E}">
+        <p14:creationId xmlns:p14="http://schemas.microsoft.com/office/powerpoint/2010/main" val="164937605"/>
+      </p:ext>
+    </p:extLst>
+  </p:cSld>
+  <p:clrMapOvr>
+    <a:masterClrMapping/>
+  </p:clrMapOvr>
+</p:sld>
+</file>
+
+<file path=ppt/slides/slide6.xml><?xml version="1.0" encoding="utf-8"?>
+<p:sld xmlns:a="http://schemas.openxmlformats.org/drawingml/2006/main" xmlns:r="http://schemas.openxmlformats.org/officeDocument/2006/relationships" xmlns:p="http://schemas.openxmlformats.org/presentationml/2006/main">
+  <p:cSld>
+    <p:spTree>
+      <p:nvGrpSpPr>
+        <p:cNvPr id="1" name=""/>
+        <p:cNvGrpSpPr/>
+        <p:nvPr/>
+      </p:nvGrpSpPr>
+      <p:grpSpPr>
+        <a:xfrm>
+          <a:off x="0" y="0"/>
+          <a:ext cx="0" cy="0"/>
+          <a:chOff x="0" y="0"/>
+          <a:chExt cx="0" cy="0"/>
+        </a:xfrm>
+      </p:grpSpPr>
+      <p:grpSp>
+        <p:nvGrpSpPr>
+          <p:cNvPr id="7" name="Group 6">
+            <a:extLst>
+              <a:ext uri="{FF2B5EF4-FFF2-40B4-BE49-F238E27FC236}">
+                <a16:creationId xmlns:a16="http://schemas.microsoft.com/office/drawing/2014/main" id="{025A109A-7452-01E9-6E4E-F07C717597CC}"/>
+              </a:ext>
+            </a:extLst>
+          </p:cNvPr>
+          <p:cNvGrpSpPr/>
+          <p:nvPr/>
+        </p:nvGrpSpPr>
+        <p:grpSpPr>
+          <a:xfrm>
+            <a:off x="4799856" y="620688"/>
+            <a:ext cx="6048672" cy="5256584"/>
+            <a:chOff x="4799856" y="620688"/>
+            <a:chExt cx="6048672" cy="5256584"/>
+          </a:xfrm>
+        </p:grpSpPr>
+        <p:sp>
+          <p:nvSpPr>
+            <p:cNvPr id="6" name="Rectangle 5">
+              <a:extLst>
+                <a:ext uri="{FF2B5EF4-FFF2-40B4-BE49-F238E27FC236}">
+                  <a16:creationId xmlns:a16="http://schemas.microsoft.com/office/drawing/2014/main" id="{D18C8C57-4190-554E-14FF-B58B4881C683}"/>
+                </a:ext>
+              </a:extLst>
+            </p:cNvPr>
+            <p:cNvSpPr/>
+            <p:nvPr/>
+          </p:nvSpPr>
+          <p:spPr>
+            <a:xfrm>
+              <a:off x="4799856" y="620688"/>
+              <a:ext cx="6048672" cy="5256584"/>
+            </a:xfrm>
+            <a:prstGeom prst="rect">
+              <a:avLst/>
+            </a:prstGeom>
+            <a:solidFill>
+              <a:schemeClr val="bg1"/>
+            </a:solidFill>
+            <a:ln>
+              <a:noFill/>
+            </a:ln>
+          </p:spPr>
+          <p:style>
+            <a:lnRef idx="2">
+              <a:schemeClr val="accent1">
+                <a:shade val="50000"/>
+              </a:schemeClr>
+            </a:lnRef>
+            <a:fillRef idx="1">
+              <a:schemeClr val="accent1"/>
+            </a:fillRef>
+            <a:effectRef idx="0">
+              <a:schemeClr val="accent1"/>
+            </a:effectRef>
+            <a:fontRef idx="minor">
+              <a:schemeClr val="lt1"/>
+            </a:fontRef>
+          </p:style>
+          <p:txBody>
+            <a:bodyPr rtlCol="0" anchor="ctr"/>
+            <a:lstStyle/>
+            <a:p>
+              <a:pPr algn="ctr"/>
+              <a:endParaRPr lang="en-US" b="1" dirty="0">
+                <a:latin typeface="Arial" pitchFamily="34" charset="0"/>
+                <a:cs typeface="Arial" pitchFamily="34" charset="0"/>
+              </a:endParaRPr>
+            </a:p>
+          </p:txBody>
+        </p:sp>
+        <p:grpSp>
+          <p:nvGrpSpPr>
+            <p:cNvPr id="246" name="Group 245">
+              <a:extLst>
+                <a:ext uri="{FF2B5EF4-FFF2-40B4-BE49-F238E27FC236}">
+                  <a16:creationId xmlns:a16="http://schemas.microsoft.com/office/drawing/2014/main" id="{968C4235-613A-E68B-C259-8C5C9BB2A797}"/>
+                </a:ext>
+              </a:extLst>
+            </p:cNvPr>
+            <p:cNvGrpSpPr/>
+            <p:nvPr/>
+          </p:nvGrpSpPr>
+          <p:grpSpPr>
+            <a:xfrm>
+              <a:off x="4799856" y="657791"/>
+              <a:ext cx="5989714" cy="5162207"/>
+              <a:chOff x="4799856" y="657791"/>
+              <a:chExt cx="5989714" cy="5162207"/>
+            </a:xfrm>
+          </p:grpSpPr>
+          <p:sp>
+            <p:nvSpPr>
+              <p:cNvPr id="181" name="TextBox 180">
+                <a:extLst>
+                  <a:ext uri="{FF2B5EF4-FFF2-40B4-BE49-F238E27FC236}">
+                    <a16:creationId xmlns:a16="http://schemas.microsoft.com/office/drawing/2014/main" id="{9587D3D2-6FC6-E9FA-5893-2256CCE8CF77}"/>
+                  </a:ext>
+                </a:extLst>
+              </p:cNvPr>
+              <p:cNvSpPr txBox="1"/>
+              <p:nvPr/>
+            </p:nvSpPr>
+            <p:spPr>
+              <a:xfrm>
+                <a:off x="5417341" y="3208660"/>
+                <a:ext cx="849891" cy="253916"/>
+              </a:xfrm>
+              <a:prstGeom prst="rect">
+                <a:avLst/>
+              </a:prstGeom>
+              <a:noFill/>
+            </p:spPr>
+            <p:txBody>
+              <a:bodyPr wrap="square" rtlCol="0">
+                <a:spAutoFit/>
+              </a:bodyPr>
+              <a:lstStyle/>
+              <a:p>
+                <a:r>
+                  <a:rPr lang="en-US" sz="1050" b="1" dirty="0">
+                    <a:latin typeface="Courier New" panose="02070309020205020404" pitchFamily="49" charset="0"/>
+                    <a:cs typeface="Courier New" panose="02070309020205020404" pitchFamily="49" charset="0"/>
+                  </a:rPr>
+                  <a:t>HEXTubeH</a:t>
+                </a:r>
+              </a:p>
+            </p:txBody>
+          </p:sp>
+          <p:sp>
+            <p:nvSpPr>
+              <p:cNvPr id="182" name="TextBox 181">
+                <a:extLst>
+                  <a:ext uri="{FF2B5EF4-FFF2-40B4-BE49-F238E27FC236}">
+                    <a16:creationId xmlns:a16="http://schemas.microsoft.com/office/drawing/2014/main" id="{83C7E7CD-D756-7C24-6B20-EDEE821ACF22}"/>
+                  </a:ext>
+                </a:extLst>
+              </p:cNvPr>
+              <p:cNvSpPr txBox="1"/>
+              <p:nvPr/>
+            </p:nvSpPr>
+            <p:spPr>
+              <a:xfrm>
+                <a:off x="6201028" y="5566082"/>
+                <a:ext cx="849891" cy="253916"/>
+              </a:xfrm>
+              <a:prstGeom prst="rect">
+                <a:avLst/>
+              </a:prstGeom>
+              <a:noFill/>
+            </p:spPr>
+            <p:txBody>
+              <a:bodyPr wrap="square" rtlCol="0">
+                <a:spAutoFit/>
+              </a:bodyPr>
+              <a:lstStyle/>
+              <a:p>
+                <a:r>
+                  <a:rPr lang="en-US" sz="1050" b="1" dirty="0">
+                    <a:latin typeface="Courier New" panose="02070309020205020404" pitchFamily="49" charset="0"/>
+                    <a:cs typeface="Courier New" panose="02070309020205020404" pitchFamily="49" charset="0"/>
+                  </a:rPr>
+                  <a:t>HEXTubeW</a:t>
+                </a:r>
+              </a:p>
+            </p:txBody>
+          </p:sp>
+          <p:sp>
+            <p:nvSpPr>
+              <p:cNvPr id="183" name="Cube 182">
+                <a:extLst>
+                  <a:ext uri="{FF2B5EF4-FFF2-40B4-BE49-F238E27FC236}">
+                    <a16:creationId xmlns:a16="http://schemas.microsoft.com/office/drawing/2014/main" id="{7183A5A1-1832-9E71-3232-7D80868C97CE}"/>
+                  </a:ext>
+                </a:extLst>
+              </p:cNvPr>
+              <p:cNvSpPr/>
+              <p:nvPr/>
+            </p:nvSpPr>
+            <p:spPr>
+              <a:xfrm>
+                <a:off x="8191578" y="657791"/>
+                <a:ext cx="943473" cy="3060260"/>
+              </a:xfrm>
+              <a:prstGeom prst="cube">
+                <a:avLst/>
+              </a:prstGeom>
+              <a:solidFill>
+                <a:srgbClr val="E6B85C"/>
+              </a:solidFill>
+              <a:ln>
+                <a:noFill/>
+              </a:ln>
+            </p:spPr>
+            <p:style>
+              <a:lnRef idx="2">
+                <a:schemeClr val="accent1">
+                  <a:shade val="50000"/>
+                </a:schemeClr>
+              </a:lnRef>
+              <a:fillRef idx="1">
+                <a:schemeClr val="accent1"/>
+              </a:fillRef>
+              <a:effectRef idx="0">
+                <a:schemeClr val="accent1"/>
+              </a:effectRef>
+              <a:fontRef idx="minor">
+                <a:schemeClr val="lt1"/>
+              </a:fontRef>
+            </p:style>
+            <p:txBody>
+              <a:bodyPr rtlCol="0" anchor="ctr"/>
+              <a:lstStyle/>
+              <a:p>
+                <a:pPr algn="ctr"/>
+                <a:endParaRPr lang="en-US" b="1" dirty="0">
+                  <a:latin typeface="Arial" pitchFamily="34" charset="0"/>
+                  <a:cs typeface="Arial" pitchFamily="34" charset="0"/>
+                </a:endParaRPr>
+              </a:p>
+            </p:txBody>
+          </p:sp>
+          <p:grpSp>
+            <p:nvGrpSpPr>
+              <p:cNvPr id="184" name="Group 183">
+                <a:extLst>
+                  <a:ext uri="{FF2B5EF4-FFF2-40B4-BE49-F238E27FC236}">
+                    <a16:creationId xmlns:a16="http://schemas.microsoft.com/office/drawing/2014/main" id="{06798D82-E050-550F-6697-45705C421D20}"/>
+                  </a:ext>
+                </a:extLst>
+              </p:cNvPr>
+              <p:cNvGrpSpPr/>
+              <p:nvPr/>
+            </p:nvGrpSpPr>
+            <p:grpSpPr>
+              <a:xfrm>
+                <a:off x="6238111" y="3350690"/>
+                <a:ext cx="2664296" cy="2188357"/>
+                <a:chOff x="2135560" y="1384659"/>
+                <a:chExt cx="2664296" cy="2188357"/>
+              </a:xfrm>
+            </p:grpSpPr>
+            <p:sp>
+              <p:nvSpPr>
+                <p:cNvPr id="185" name="Cube 184">
+                  <a:extLst>
+                    <a:ext uri="{FF2B5EF4-FFF2-40B4-BE49-F238E27FC236}">
+                      <a16:creationId xmlns:a16="http://schemas.microsoft.com/office/drawing/2014/main" id="{9FB9E910-7BE0-4C9C-0C02-020CB2864919}"/>
+                    </a:ext>
+                  </a:extLst>
+                </p:cNvPr>
+                <p:cNvSpPr/>
+                <p:nvPr/>
+              </p:nvSpPr>
+              <p:spPr>
+                <a:xfrm>
+                  <a:off x="2135560" y="1556792"/>
+                  <a:ext cx="2664296" cy="2016224"/>
+                </a:xfrm>
+                <a:prstGeom prst="cube">
+                  <a:avLst>
+                    <a:gd name="adj" fmla="val 93993"/>
+                  </a:avLst>
+                </a:prstGeom>
+                <a:solidFill>
+                  <a:srgbClr val="E6B85C"/>
+                </a:solidFill>
+                <a:ln>
+                  <a:noFill/>
+                </a:ln>
+              </p:spPr>
+              <p:style>
+                <a:lnRef idx="2">
+                  <a:schemeClr val="accent1">
+                    <a:shade val="50000"/>
+                  </a:schemeClr>
+                </a:lnRef>
+                <a:fillRef idx="1">
+                  <a:schemeClr val="accent1"/>
+                </a:fillRef>
+                <a:effectRef idx="0">
+                  <a:schemeClr val="accent1"/>
+                </a:effectRef>
+                <a:fontRef idx="minor">
+                  <a:schemeClr val="lt1"/>
+                </a:fontRef>
+              </p:style>
+              <p:txBody>
+                <a:bodyPr rtlCol="0" anchor="ctr"/>
+                <a:lstStyle/>
+                <a:p>
+                  <a:pPr algn="ctr"/>
+                  <a:endParaRPr lang="en-US" b="1" dirty="0">
+                    <a:latin typeface="Arial" pitchFamily="34" charset="0"/>
+                    <a:cs typeface="Arial" pitchFamily="34" charset="0"/>
+                  </a:endParaRPr>
+                </a:p>
+              </p:txBody>
+            </p:sp>
+            <p:sp>
+              <p:nvSpPr>
+                <p:cNvPr id="186" name="Rectangle 185">
+                  <a:extLst>
+                    <a:ext uri="{FF2B5EF4-FFF2-40B4-BE49-F238E27FC236}">
+                      <a16:creationId xmlns:a16="http://schemas.microsoft.com/office/drawing/2014/main" id="{75B69236-59A9-B5C3-E21D-8C3B0FFC5066}"/>
+                    </a:ext>
+                  </a:extLst>
+                </p:cNvPr>
+                <p:cNvSpPr/>
+                <p:nvPr/>
+              </p:nvSpPr>
+              <p:spPr>
+                <a:xfrm>
+                  <a:off x="3986598" y="1384659"/>
+                  <a:ext cx="769187" cy="216015"/>
+                </a:xfrm>
+                <a:prstGeom prst="rect">
+                  <a:avLst/>
+                </a:prstGeom>
+                <a:ln w="6350">
+                  <a:solidFill>
+                    <a:schemeClr val="accent2"/>
+                  </a:solidFill>
+                </a:ln>
+              </p:spPr>
+              <p:style>
+                <a:lnRef idx="2">
+                  <a:schemeClr val="accent1">
+                    <a:shade val="50000"/>
+                  </a:schemeClr>
+                </a:lnRef>
+                <a:fillRef idx="1">
+                  <a:schemeClr val="accent1"/>
+                </a:fillRef>
+                <a:effectRef idx="0">
+                  <a:schemeClr val="accent1"/>
+                </a:effectRef>
+                <a:fontRef idx="minor">
+                  <a:schemeClr val="lt1"/>
+                </a:fontRef>
+              </p:style>
+              <p:txBody>
+                <a:bodyPr rtlCol="0" anchor="ctr"/>
+                <a:lstStyle/>
+                <a:p>
+                  <a:pPr algn="ctr"/>
+                  <a:endParaRPr lang="en-US" b="1" dirty="0">
+                    <a:latin typeface="Arial" pitchFamily="34" charset="0"/>
+                    <a:cs typeface="Arial" pitchFamily="34" charset="0"/>
+                  </a:endParaRPr>
+                </a:p>
+              </p:txBody>
+            </p:sp>
+            <p:sp>
+              <p:nvSpPr>
+                <p:cNvPr id="187" name="Rectangle 186">
+                  <a:extLst>
+                    <a:ext uri="{FF2B5EF4-FFF2-40B4-BE49-F238E27FC236}">
+                      <a16:creationId xmlns:a16="http://schemas.microsoft.com/office/drawing/2014/main" id="{7FF93D68-DD31-8CF9-E7E5-88780587E47C}"/>
+                    </a:ext>
+                  </a:extLst>
+                </p:cNvPr>
+                <p:cNvSpPr/>
+                <p:nvPr/>
+              </p:nvSpPr>
+              <p:spPr>
+                <a:xfrm>
+                  <a:off x="3791142" y="1581216"/>
+                  <a:ext cx="769187" cy="216015"/>
+                </a:xfrm>
+                <a:prstGeom prst="rect">
+                  <a:avLst/>
+                </a:prstGeom>
+                <a:ln w="6350">
+                  <a:solidFill>
+                    <a:schemeClr val="accent2"/>
+                  </a:solidFill>
+                </a:ln>
+              </p:spPr>
+              <p:style>
+                <a:lnRef idx="2">
+                  <a:schemeClr val="accent1">
+                    <a:shade val="50000"/>
+                  </a:schemeClr>
+                </a:lnRef>
+                <a:fillRef idx="1">
+                  <a:schemeClr val="accent1"/>
+                </a:fillRef>
+                <a:effectRef idx="0">
+                  <a:schemeClr val="accent1"/>
+                </a:effectRef>
+                <a:fontRef idx="minor">
+                  <a:schemeClr val="lt1"/>
+                </a:fontRef>
+              </p:style>
+              <p:txBody>
+                <a:bodyPr rtlCol="0" anchor="ctr"/>
+                <a:lstStyle/>
+                <a:p>
+                  <a:pPr algn="ctr"/>
+                  <a:endParaRPr lang="en-US" b="1" dirty="0">
+                    <a:latin typeface="Arial" pitchFamily="34" charset="0"/>
+                    <a:cs typeface="Arial" pitchFamily="34" charset="0"/>
+                  </a:endParaRPr>
+                </a:p>
+              </p:txBody>
+            </p:sp>
+            <p:sp>
+              <p:nvSpPr>
+                <p:cNvPr id="188" name="Rectangle 187">
+                  <a:extLst>
+                    <a:ext uri="{FF2B5EF4-FFF2-40B4-BE49-F238E27FC236}">
+                      <a16:creationId xmlns:a16="http://schemas.microsoft.com/office/drawing/2014/main" id="{B7516BDD-44B6-C427-37FF-1CC1A9081A06}"/>
+                    </a:ext>
+                  </a:extLst>
+                </p:cNvPr>
+                <p:cNvSpPr/>
+                <p:nvPr/>
+              </p:nvSpPr>
+              <p:spPr>
+                <a:xfrm>
+                  <a:off x="3595685" y="1777773"/>
+                  <a:ext cx="769187" cy="216015"/>
+                </a:xfrm>
+                <a:prstGeom prst="rect">
+                  <a:avLst/>
+                </a:prstGeom>
+                <a:ln w="6350">
+                  <a:solidFill>
+                    <a:schemeClr val="accent2"/>
+                  </a:solidFill>
+                </a:ln>
+              </p:spPr>
+              <p:style>
+                <a:lnRef idx="2">
+                  <a:schemeClr val="accent1">
+                    <a:shade val="50000"/>
+                  </a:schemeClr>
+                </a:lnRef>
+                <a:fillRef idx="1">
+                  <a:schemeClr val="accent1"/>
+                </a:fillRef>
+                <a:effectRef idx="0">
+                  <a:schemeClr val="accent1"/>
+                </a:effectRef>
+                <a:fontRef idx="minor">
+                  <a:schemeClr val="lt1"/>
+                </a:fontRef>
+              </p:style>
+              <p:txBody>
+                <a:bodyPr rtlCol="0" anchor="ctr"/>
+                <a:lstStyle/>
+                <a:p>
+                  <a:pPr algn="ctr"/>
+                  <a:endParaRPr lang="en-US" b="1" dirty="0">
+                    <a:latin typeface="Arial" pitchFamily="34" charset="0"/>
+                    <a:cs typeface="Arial" pitchFamily="34" charset="0"/>
+                  </a:endParaRPr>
+                </a:p>
+              </p:txBody>
+            </p:sp>
+            <p:sp>
+              <p:nvSpPr>
+                <p:cNvPr id="189" name="Rectangle 188">
+                  <a:extLst>
+                    <a:ext uri="{FF2B5EF4-FFF2-40B4-BE49-F238E27FC236}">
+                      <a16:creationId xmlns:a16="http://schemas.microsoft.com/office/drawing/2014/main" id="{B030D6F4-DBB0-B8D5-891B-0F00442765E8}"/>
+                    </a:ext>
+                  </a:extLst>
+                </p:cNvPr>
+                <p:cNvSpPr/>
+                <p:nvPr/>
+              </p:nvSpPr>
+              <p:spPr>
+                <a:xfrm>
+                  <a:off x="3400228" y="1974330"/>
+                  <a:ext cx="769187" cy="216015"/>
+                </a:xfrm>
+                <a:prstGeom prst="rect">
+                  <a:avLst/>
+                </a:prstGeom>
+                <a:ln w="6350">
+                  <a:solidFill>
+                    <a:schemeClr val="accent2"/>
+                  </a:solidFill>
+                </a:ln>
+              </p:spPr>
+              <p:style>
+                <a:lnRef idx="2">
+                  <a:schemeClr val="accent1">
+                    <a:shade val="50000"/>
+                  </a:schemeClr>
+                </a:lnRef>
+                <a:fillRef idx="1">
+                  <a:schemeClr val="accent1"/>
+                </a:fillRef>
+                <a:effectRef idx="0">
+                  <a:schemeClr val="accent1"/>
+                </a:effectRef>
+                <a:fontRef idx="minor">
+                  <a:schemeClr val="lt1"/>
+                </a:fontRef>
+              </p:style>
+              <p:txBody>
+                <a:bodyPr rtlCol="0" anchor="ctr"/>
+                <a:lstStyle/>
+                <a:p>
+                  <a:pPr algn="ctr"/>
+                  <a:endParaRPr lang="en-US" b="1" dirty="0">
+                    <a:latin typeface="Arial" pitchFamily="34" charset="0"/>
+                    <a:cs typeface="Arial" pitchFamily="34" charset="0"/>
+                  </a:endParaRPr>
+                </a:p>
+              </p:txBody>
+            </p:sp>
+            <p:sp>
+              <p:nvSpPr>
+                <p:cNvPr id="190" name="Rectangle 189">
+                  <a:extLst>
+                    <a:ext uri="{FF2B5EF4-FFF2-40B4-BE49-F238E27FC236}">
+                      <a16:creationId xmlns:a16="http://schemas.microsoft.com/office/drawing/2014/main" id="{90B5826B-6A6B-3111-89E6-048EA758B2BE}"/>
+                    </a:ext>
+                  </a:extLst>
+                </p:cNvPr>
+                <p:cNvSpPr/>
+                <p:nvPr/>
+              </p:nvSpPr>
+              <p:spPr>
+                <a:xfrm>
+                  <a:off x="3204771" y="2170887"/>
+                  <a:ext cx="769187" cy="216015"/>
+                </a:xfrm>
+                <a:prstGeom prst="rect">
+                  <a:avLst/>
+                </a:prstGeom>
+                <a:ln w="6350">
+                  <a:solidFill>
+                    <a:schemeClr val="accent2"/>
+                  </a:solidFill>
+                </a:ln>
+              </p:spPr>
+              <p:style>
+                <a:lnRef idx="2">
+                  <a:schemeClr val="accent1">
+                    <a:shade val="50000"/>
+                  </a:schemeClr>
+                </a:lnRef>
+                <a:fillRef idx="1">
+                  <a:schemeClr val="accent1"/>
+                </a:fillRef>
+                <a:effectRef idx="0">
+                  <a:schemeClr val="accent1"/>
+                </a:effectRef>
+                <a:fontRef idx="minor">
+                  <a:schemeClr val="lt1"/>
+                </a:fontRef>
+              </p:style>
+              <p:txBody>
+                <a:bodyPr rtlCol="0" anchor="ctr"/>
+                <a:lstStyle/>
+                <a:p>
+                  <a:pPr algn="ctr"/>
+                  <a:endParaRPr lang="en-US" b="1" dirty="0">
+                    <a:latin typeface="Arial" pitchFamily="34" charset="0"/>
+                    <a:cs typeface="Arial" pitchFamily="34" charset="0"/>
+                  </a:endParaRPr>
+                </a:p>
+              </p:txBody>
+            </p:sp>
+            <p:sp>
+              <p:nvSpPr>
+                <p:cNvPr id="191" name="Rectangle 190">
+                  <a:extLst>
+                    <a:ext uri="{FF2B5EF4-FFF2-40B4-BE49-F238E27FC236}">
+                      <a16:creationId xmlns:a16="http://schemas.microsoft.com/office/drawing/2014/main" id="{604CA365-B6E4-BAA3-A06A-C13058A9FFA1}"/>
+                    </a:ext>
+                  </a:extLst>
+                </p:cNvPr>
+                <p:cNvSpPr/>
+                <p:nvPr/>
+              </p:nvSpPr>
+              <p:spPr>
+                <a:xfrm>
+                  <a:off x="3009314" y="2367444"/>
+                  <a:ext cx="769187" cy="216015"/>
+                </a:xfrm>
+                <a:prstGeom prst="rect">
+                  <a:avLst/>
+                </a:prstGeom>
+                <a:ln w="6350">
+                  <a:solidFill>
+                    <a:schemeClr val="accent2"/>
+                  </a:solidFill>
+                </a:ln>
+              </p:spPr>
+              <p:style>
+                <a:lnRef idx="2">
+                  <a:schemeClr val="accent1">
+                    <a:shade val="50000"/>
+                  </a:schemeClr>
+                </a:lnRef>
+                <a:fillRef idx="1">
+                  <a:schemeClr val="accent1"/>
+                </a:fillRef>
+                <a:effectRef idx="0">
+                  <a:schemeClr val="accent1"/>
+                </a:effectRef>
+                <a:fontRef idx="minor">
+                  <a:schemeClr val="lt1"/>
+                </a:fontRef>
+              </p:style>
+              <p:txBody>
+                <a:bodyPr rtlCol="0" anchor="ctr"/>
+                <a:lstStyle/>
+                <a:p>
+                  <a:pPr algn="ctr"/>
+                  <a:endParaRPr lang="en-US" b="1" dirty="0">
+                    <a:latin typeface="Arial" pitchFamily="34" charset="0"/>
+                    <a:cs typeface="Arial" pitchFamily="34" charset="0"/>
+                  </a:endParaRPr>
+                </a:p>
+              </p:txBody>
+            </p:sp>
+            <p:sp>
+              <p:nvSpPr>
+                <p:cNvPr id="192" name="Rectangle 191">
+                  <a:extLst>
+                    <a:ext uri="{FF2B5EF4-FFF2-40B4-BE49-F238E27FC236}">
+                      <a16:creationId xmlns:a16="http://schemas.microsoft.com/office/drawing/2014/main" id="{C5F003C1-A0EB-86C3-7235-A552AD330DFB}"/>
+                    </a:ext>
+                  </a:extLst>
+                </p:cNvPr>
+                <p:cNvSpPr/>
+                <p:nvPr/>
+              </p:nvSpPr>
+              <p:spPr>
+                <a:xfrm>
+                  <a:off x="2813857" y="2564001"/>
+                  <a:ext cx="769187" cy="216015"/>
+                </a:xfrm>
+                <a:prstGeom prst="rect">
+                  <a:avLst/>
+                </a:prstGeom>
+                <a:ln w="6350">
+                  <a:solidFill>
+                    <a:schemeClr val="accent2"/>
+                  </a:solidFill>
+                </a:ln>
+              </p:spPr>
+              <p:style>
+                <a:lnRef idx="2">
+                  <a:schemeClr val="accent1">
+                    <a:shade val="50000"/>
+                  </a:schemeClr>
+                </a:lnRef>
+                <a:fillRef idx="1">
+                  <a:schemeClr val="accent1"/>
+                </a:fillRef>
+                <a:effectRef idx="0">
+                  <a:schemeClr val="accent1"/>
+                </a:effectRef>
+                <a:fontRef idx="minor">
+                  <a:schemeClr val="lt1"/>
+                </a:fontRef>
+              </p:style>
+              <p:txBody>
+                <a:bodyPr rtlCol="0" anchor="ctr"/>
+                <a:lstStyle/>
+                <a:p>
+                  <a:pPr algn="ctr"/>
+                  <a:endParaRPr lang="en-US" b="1" dirty="0">
+                    <a:latin typeface="Arial" pitchFamily="34" charset="0"/>
+                    <a:cs typeface="Arial" pitchFamily="34" charset="0"/>
+                  </a:endParaRPr>
+                </a:p>
+              </p:txBody>
+            </p:sp>
+            <p:sp>
+              <p:nvSpPr>
+                <p:cNvPr id="193" name="Rectangle 192">
+                  <a:extLst>
+                    <a:ext uri="{FF2B5EF4-FFF2-40B4-BE49-F238E27FC236}">
+                      <a16:creationId xmlns:a16="http://schemas.microsoft.com/office/drawing/2014/main" id="{6C7E0313-FD6B-6672-2304-E743827F6D9B}"/>
+                    </a:ext>
+                  </a:extLst>
+                </p:cNvPr>
+                <p:cNvSpPr/>
+                <p:nvPr/>
+              </p:nvSpPr>
+              <p:spPr>
+                <a:xfrm>
+                  <a:off x="2618400" y="2760558"/>
+                  <a:ext cx="769187" cy="216015"/>
+                </a:xfrm>
+                <a:prstGeom prst="rect">
+                  <a:avLst/>
+                </a:prstGeom>
+                <a:ln w="6350">
+                  <a:solidFill>
+                    <a:schemeClr val="accent2"/>
+                  </a:solidFill>
+                </a:ln>
+              </p:spPr>
+              <p:style>
+                <a:lnRef idx="2">
+                  <a:schemeClr val="accent1">
+                    <a:shade val="50000"/>
+                  </a:schemeClr>
+                </a:lnRef>
+                <a:fillRef idx="1">
+                  <a:schemeClr val="accent1"/>
+                </a:fillRef>
+                <a:effectRef idx="0">
+                  <a:schemeClr val="accent1"/>
+                </a:effectRef>
+                <a:fontRef idx="minor">
+                  <a:schemeClr val="lt1"/>
+                </a:fontRef>
+              </p:style>
+              <p:txBody>
+                <a:bodyPr rtlCol="0" anchor="ctr"/>
+                <a:lstStyle/>
+                <a:p>
+                  <a:pPr algn="ctr"/>
+                  <a:endParaRPr lang="en-US" b="1" dirty="0">
+                    <a:latin typeface="Arial" pitchFamily="34" charset="0"/>
+                    <a:cs typeface="Arial" pitchFamily="34" charset="0"/>
+                  </a:endParaRPr>
+                </a:p>
+              </p:txBody>
+            </p:sp>
+            <p:sp>
+              <p:nvSpPr>
+                <p:cNvPr id="194" name="Rectangle 193">
+                  <a:extLst>
+                    <a:ext uri="{FF2B5EF4-FFF2-40B4-BE49-F238E27FC236}">
+                      <a16:creationId xmlns:a16="http://schemas.microsoft.com/office/drawing/2014/main" id="{0BF649BC-5999-7020-A8E4-E8E2A878F609}"/>
+                    </a:ext>
+                  </a:extLst>
+                </p:cNvPr>
+                <p:cNvSpPr/>
+                <p:nvPr/>
+              </p:nvSpPr>
+              <p:spPr>
+                <a:xfrm>
+                  <a:off x="2422943" y="2957115"/>
+                  <a:ext cx="769187" cy="216015"/>
+                </a:xfrm>
+                <a:prstGeom prst="rect">
+                  <a:avLst/>
+                </a:prstGeom>
+                <a:ln w="6350">
+                  <a:solidFill>
+                    <a:schemeClr val="accent2"/>
+                  </a:solidFill>
+                </a:ln>
+              </p:spPr>
+              <p:style>
+                <a:lnRef idx="2">
+                  <a:schemeClr val="accent1">
+                    <a:shade val="50000"/>
+                  </a:schemeClr>
+                </a:lnRef>
+                <a:fillRef idx="1">
+                  <a:schemeClr val="accent1"/>
+                </a:fillRef>
+                <a:effectRef idx="0">
+                  <a:schemeClr val="accent1"/>
+                </a:effectRef>
+                <a:fontRef idx="minor">
+                  <a:schemeClr val="lt1"/>
+                </a:fontRef>
+              </p:style>
+              <p:txBody>
+                <a:bodyPr rtlCol="0" anchor="ctr"/>
+                <a:lstStyle/>
+                <a:p>
+                  <a:pPr algn="ctr"/>
+                  <a:endParaRPr lang="en-US" b="1" dirty="0">
+                    <a:latin typeface="Arial" pitchFamily="34" charset="0"/>
+                    <a:cs typeface="Arial" pitchFamily="34" charset="0"/>
+                  </a:endParaRPr>
+                </a:p>
+              </p:txBody>
+            </p:sp>
+            <p:sp>
+              <p:nvSpPr>
+                <p:cNvPr id="195" name="Rectangle 194">
+                  <a:extLst>
+                    <a:ext uri="{FF2B5EF4-FFF2-40B4-BE49-F238E27FC236}">
+                      <a16:creationId xmlns:a16="http://schemas.microsoft.com/office/drawing/2014/main" id="{D86595B9-9FC8-D7EB-1480-2EE0F47C860A}"/>
+                    </a:ext>
+                  </a:extLst>
+                </p:cNvPr>
+                <p:cNvSpPr/>
+                <p:nvPr/>
+              </p:nvSpPr>
+              <p:spPr>
+                <a:xfrm>
+                  <a:off x="2227486" y="3153670"/>
+                  <a:ext cx="769187" cy="216015"/>
+                </a:xfrm>
+                <a:prstGeom prst="rect">
+                  <a:avLst/>
+                </a:prstGeom>
+                <a:ln w="6350">
+                  <a:solidFill>
+                    <a:schemeClr val="accent2"/>
+                  </a:solidFill>
+                </a:ln>
+              </p:spPr>
+              <p:style>
+                <a:lnRef idx="2">
+                  <a:schemeClr val="accent1">
+                    <a:shade val="50000"/>
+                  </a:schemeClr>
+                </a:lnRef>
+                <a:fillRef idx="1">
+                  <a:schemeClr val="accent1"/>
+                </a:fillRef>
+                <a:effectRef idx="0">
+                  <a:schemeClr val="accent1"/>
+                </a:effectRef>
+                <a:fontRef idx="minor">
+                  <a:schemeClr val="lt1"/>
+                </a:fontRef>
+              </p:style>
+              <p:txBody>
+                <a:bodyPr rtlCol="0" anchor="ctr"/>
+                <a:lstStyle/>
+                <a:p>
+                  <a:pPr algn="ctr"/>
+                  <a:endParaRPr lang="en-US" b="1" dirty="0">
+                    <a:latin typeface="Arial" pitchFamily="34" charset="0"/>
+                    <a:cs typeface="Arial" pitchFamily="34" charset="0"/>
+                  </a:endParaRPr>
+                </a:p>
+              </p:txBody>
+            </p:sp>
+          </p:grpSp>
+          <p:grpSp>
+            <p:nvGrpSpPr>
+              <p:cNvPr id="196" name="Group 195">
+                <a:extLst>
+                  <a:ext uri="{FF2B5EF4-FFF2-40B4-BE49-F238E27FC236}">
+                    <a16:creationId xmlns:a16="http://schemas.microsoft.com/office/drawing/2014/main" id="{F5F99BA2-CA01-B162-787E-EEB3A0E32126}"/>
+                  </a:ext>
+                </a:extLst>
+              </p:cNvPr>
+              <p:cNvGrpSpPr/>
+              <p:nvPr/>
+            </p:nvGrpSpPr>
+            <p:grpSpPr>
+              <a:xfrm>
+                <a:off x="6238111" y="2635506"/>
+                <a:ext cx="2664296" cy="2188357"/>
+                <a:chOff x="2135560" y="1384659"/>
+                <a:chExt cx="2664296" cy="2188357"/>
+              </a:xfrm>
+            </p:grpSpPr>
+            <p:sp>
+              <p:nvSpPr>
+                <p:cNvPr id="197" name="Cube 196">
+                  <a:extLst>
+                    <a:ext uri="{FF2B5EF4-FFF2-40B4-BE49-F238E27FC236}">
+                      <a16:creationId xmlns:a16="http://schemas.microsoft.com/office/drawing/2014/main" id="{D5256100-42A6-8CEB-D629-C3B27C1CAE9D}"/>
+                    </a:ext>
+                  </a:extLst>
+                </p:cNvPr>
+                <p:cNvSpPr/>
+                <p:nvPr/>
+              </p:nvSpPr>
+              <p:spPr>
+                <a:xfrm>
+                  <a:off x="2135560" y="1556792"/>
+                  <a:ext cx="2664296" cy="2016224"/>
+                </a:xfrm>
+                <a:prstGeom prst="cube">
+                  <a:avLst>
+                    <a:gd name="adj" fmla="val 93993"/>
+                  </a:avLst>
+                </a:prstGeom>
+                <a:solidFill>
+                  <a:srgbClr val="E6B85C"/>
+                </a:solidFill>
+                <a:ln>
+                  <a:noFill/>
+                </a:ln>
+              </p:spPr>
+              <p:style>
+                <a:lnRef idx="2">
+                  <a:schemeClr val="accent1">
+                    <a:shade val="50000"/>
+                  </a:schemeClr>
+                </a:lnRef>
+                <a:fillRef idx="1">
+                  <a:schemeClr val="accent1"/>
+                </a:fillRef>
+                <a:effectRef idx="0">
+                  <a:schemeClr val="accent1"/>
+                </a:effectRef>
+                <a:fontRef idx="minor">
+                  <a:schemeClr val="lt1"/>
+                </a:fontRef>
+              </p:style>
+              <p:txBody>
+                <a:bodyPr rtlCol="0" anchor="ctr"/>
+                <a:lstStyle/>
+                <a:p>
+                  <a:pPr algn="ctr"/>
+                  <a:endParaRPr lang="en-US" b="1" dirty="0">
+                    <a:latin typeface="Arial" pitchFamily="34" charset="0"/>
+                    <a:cs typeface="Arial" pitchFamily="34" charset="0"/>
+                  </a:endParaRPr>
+                </a:p>
+              </p:txBody>
+            </p:sp>
+            <p:sp>
+              <p:nvSpPr>
+                <p:cNvPr id="198" name="Rectangle 197">
+                  <a:extLst>
+                    <a:ext uri="{FF2B5EF4-FFF2-40B4-BE49-F238E27FC236}">
+                      <a16:creationId xmlns:a16="http://schemas.microsoft.com/office/drawing/2014/main" id="{27BB3DF1-C95F-F625-5523-E914B0D3F82E}"/>
+                    </a:ext>
+                  </a:extLst>
+                </p:cNvPr>
+                <p:cNvSpPr/>
+                <p:nvPr/>
+              </p:nvSpPr>
+              <p:spPr>
+                <a:xfrm>
+                  <a:off x="3986598" y="1384659"/>
+                  <a:ext cx="769187" cy="216015"/>
+                </a:xfrm>
+                <a:prstGeom prst="rect">
+                  <a:avLst/>
+                </a:prstGeom>
+                <a:ln w="6350">
+                  <a:solidFill>
+                    <a:schemeClr val="accent2"/>
+                  </a:solidFill>
+                </a:ln>
+              </p:spPr>
+              <p:style>
+                <a:lnRef idx="2">
+                  <a:schemeClr val="accent1">
+                    <a:shade val="50000"/>
+                  </a:schemeClr>
+                </a:lnRef>
+                <a:fillRef idx="1">
+                  <a:schemeClr val="accent1"/>
+                </a:fillRef>
+                <a:effectRef idx="0">
+                  <a:schemeClr val="accent1"/>
+                </a:effectRef>
+                <a:fontRef idx="minor">
+                  <a:schemeClr val="lt1"/>
+                </a:fontRef>
+              </p:style>
+              <p:txBody>
+                <a:bodyPr rtlCol="0" anchor="ctr"/>
+                <a:lstStyle/>
+                <a:p>
+                  <a:pPr algn="ctr"/>
+                  <a:endParaRPr lang="en-US" b="1" dirty="0">
+                    <a:latin typeface="Arial" pitchFamily="34" charset="0"/>
+                    <a:cs typeface="Arial" pitchFamily="34" charset="0"/>
+                  </a:endParaRPr>
+                </a:p>
+              </p:txBody>
+            </p:sp>
+            <p:sp>
+              <p:nvSpPr>
+                <p:cNvPr id="199" name="Rectangle 198">
+                  <a:extLst>
+                    <a:ext uri="{FF2B5EF4-FFF2-40B4-BE49-F238E27FC236}">
+                      <a16:creationId xmlns:a16="http://schemas.microsoft.com/office/drawing/2014/main" id="{47959E66-FF9C-C1D5-51EC-77582623D6CA}"/>
+                    </a:ext>
+                  </a:extLst>
+                </p:cNvPr>
+                <p:cNvSpPr/>
+                <p:nvPr/>
+              </p:nvSpPr>
+              <p:spPr>
+                <a:xfrm>
+                  <a:off x="3791142" y="1581216"/>
+                  <a:ext cx="769187" cy="216015"/>
+                </a:xfrm>
+                <a:prstGeom prst="rect">
+                  <a:avLst/>
+                </a:prstGeom>
+                <a:ln w="6350">
+                  <a:solidFill>
+                    <a:schemeClr val="accent2"/>
+                  </a:solidFill>
+                </a:ln>
+              </p:spPr>
+              <p:style>
+                <a:lnRef idx="2">
+                  <a:schemeClr val="accent1">
+                    <a:shade val="50000"/>
+                  </a:schemeClr>
+                </a:lnRef>
+                <a:fillRef idx="1">
+                  <a:schemeClr val="accent1"/>
+                </a:fillRef>
+                <a:effectRef idx="0">
+                  <a:schemeClr val="accent1"/>
+                </a:effectRef>
+                <a:fontRef idx="minor">
+                  <a:schemeClr val="lt1"/>
+                </a:fontRef>
+              </p:style>
+              <p:txBody>
+                <a:bodyPr rtlCol="0" anchor="ctr"/>
+                <a:lstStyle/>
+                <a:p>
+                  <a:pPr algn="ctr"/>
+                  <a:endParaRPr lang="en-US" b="1" dirty="0">
+                    <a:latin typeface="Arial" pitchFamily="34" charset="0"/>
+                    <a:cs typeface="Arial" pitchFamily="34" charset="0"/>
+                  </a:endParaRPr>
+                </a:p>
+              </p:txBody>
+            </p:sp>
+            <p:sp>
+              <p:nvSpPr>
+                <p:cNvPr id="200" name="Rectangle 199">
+                  <a:extLst>
+                    <a:ext uri="{FF2B5EF4-FFF2-40B4-BE49-F238E27FC236}">
+                      <a16:creationId xmlns:a16="http://schemas.microsoft.com/office/drawing/2014/main" id="{1AC9D7CF-E4C0-E0B1-0682-03E1566A6559}"/>
+                    </a:ext>
+                  </a:extLst>
+                </p:cNvPr>
+                <p:cNvSpPr/>
+                <p:nvPr/>
+              </p:nvSpPr>
+              <p:spPr>
+                <a:xfrm>
+                  <a:off x="3595685" y="1777773"/>
+                  <a:ext cx="769187" cy="216015"/>
+                </a:xfrm>
+                <a:prstGeom prst="rect">
+                  <a:avLst/>
+                </a:prstGeom>
+                <a:ln w="6350">
+                  <a:solidFill>
+                    <a:schemeClr val="accent2"/>
+                  </a:solidFill>
+                </a:ln>
+              </p:spPr>
+              <p:style>
+                <a:lnRef idx="2">
+                  <a:schemeClr val="accent1">
+                    <a:shade val="50000"/>
+                  </a:schemeClr>
+                </a:lnRef>
+                <a:fillRef idx="1">
+                  <a:schemeClr val="accent1"/>
+                </a:fillRef>
+                <a:effectRef idx="0">
+                  <a:schemeClr val="accent1"/>
+                </a:effectRef>
+                <a:fontRef idx="minor">
+                  <a:schemeClr val="lt1"/>
+                </a:fontRef>
+              </p:style>
+              <p:txBody>
+                <a:bodyPr rtlCol="0" anchor="ctr"/>
+                <a:lstStyle/>
+                <a:p>
+                  <a:pPr algn="ctr"/>
+                  <a:endParaRPr lang="en-US" b="1" dirty="0">
+                    <a:latin typeface="Arial" pitchFamily="34" charset="0"/>
+                    <a:cs typeface="Arial" pitchFamily="34" charset="0"/>
+                  </a:endParaRPr>
+                </a:p>
+              </p:txBody>
+            </p:sp>
+            <p:sp>
+              <p:nvSpPr>
+                <p:cNvPr id="201" name="Rectangle 200">
+                  <a:extLst>
+                    <a:ext uri="{FF2B5EF4-FFF2-40B4-BE49-F238E27FC236}">
+                      <a16:creationId xmlns:a16="http://schemas.microsoft.com/office/drawing/2014/main" id="{F35E57B4-C001-5A1F-07F1-C958C0E34377}"/>
+                    </a:ext>
+                  </a:extLst>
+                </p:cNvPr>
+                <p:cNvSpPr/>
+                <p:nvPr/>
+              </p:nvSpPr>
+              <p:spPr>
+                <a:xfrm>
+                  <a:off x="3400228" y="1974330"/>
+                  <a:ext cx="769187" cy="216015"/>
+                </a:xfrm>
+                <a:prstGeom prst="rect">
+                  <a:avLst/>
+                </a:prstGeom>
+                <a:ln w="6350">
+                  <a:solidFill>
+                    <a:schemeClr val="accent2"/>
+                  </a:solidFill>
+                </a:ln>
+              </p:spPr>
+              <p:style>
+                <a:lnRef idx="2">
+                  <a:schemeClr val="accent1">
+                    <a:shade val="50000"/>
+                  </a:schemeClr>
+                </a:lnRef>
+                <a:fillRef idx="1">
+                  <a:schemeClr val="accent1"/>
+                </a:fillRef>
+                <a:effectRef idx="0">
+                  <a:schemeClr val="accent1"/>
+                </a:effectRef>
+                <a:fontRef idx="minor">
+                  <a:schemeClr val="lt1"/>
+                </a:fontRef>
+              </p:style>
+              <p:txBody>
+                <a:bodyPr rtlCol="0" anchor="ctr"/>
+                <a:lstStyle/>
+                <a:p>
+                  <a:pPr algn="ctr"/>
+                  <a:endParaRPr lang="en-US" b="1" dirty="0">
+                    <a:latin typeface="Arial" pitchFamily="34" charset="0"/>
+                    <a:cs typeface="Arial" pitchFamily="34" charset="0"/>
+                  </a:endParaRPr>
+                </a:p>
+              </p:txBody>
+            </p:sp>
+            <p:sp>
+              <p:nvSpPr>
+                <p:cNvPr id="202" name="Rectangle 201">
+                  <a:extLst>
+                    <a:ext uri="{FF2B5EF4-FFF2-40B4-BE49-F238E27FC236}">
+                      <a16:creationId xmlns:a16="http://schemas.microsoft.com/office/drawing/2014/main" id="{F16643CC-B3D6-A945-BEB0-C3B3D6BA4ED6}"/>
+                    </a:ext>
+                  </a:extLst>
+                </p:cNvPr>
+                <p:cNvSpPr/>
+                <p:nvPr/>
+              </p:nvSpPr>
+              <p:spPr>
+                <a:xfrm>
+                  <a:off x="3204771" y="2170887"/>
+                  <a:ext cx="769187" cy="216015"/>
+                </a:xfrm>
+                <a:prstGeom prst="rect">
+                  <a:avLst/>
+                </a:prstGeom>
+                <a:ln w="6350">
+                  <a:solidFill>
+                    <a:schemeClr val="accent2"/>
+                  </a:solidFill>
+                </a:ln>
+              </p:spPr>
+              <p:style>
+                <a:lnRef idx="2">
+                  <a:schemeClr val="accent1">
+                    <a:shade val="50000"/>
+                  </a:schemeClr>
+                </a:lnRef>
+                <a:fillRef idx="1">
+                  <a:schemeClr val="accent1"/>
+                </a:fillRef>
+                <a:effectRef idx="0">
+                  <a:schemeClr val="accent1"/>
+                </a:effectRef>
+                <a:fontRef idx="minor">
+                  <a:schemeClr val="lt1"/>
+                </a:fontRef>
+              </p:style>
+              <p:txBody>
+                <a:bodyPr rtlCol="0" anchor="ctr"/>
+                <a:lstStyle/>
+                <a:p>
+                  <a:pPr algn="ctr"/>
+                  <a:endParaRPr lang="en-US" b="1" dirty="0">
+                    <a:latin typeface="Arial" pitchFamily="34" charset="0"/>
+                    <a:cs typeface="Arial" pitchFamily="34" charset="0"/>
+                  </a:endParaRPr>
+                </a:p>
+              </p:txBody>
+            </p:sp>
+            <p:sp>
+              <p:nvSpPr>
+                <p:cNvPr id="203" name="Rectangle 202">
+                  <a:extLst>
+                    <a:ext uri="{FF2B5EF4-FFF2-40B4-BE49-F238E27FC236}">
+                      <a16:creationId xmlns:a16="http://schemas.microsoft.com/office/drawing/2014/main" id="{FFDF1983-C91A-8065-2953-94135E979C73}"/>
+                    </a:ext>
+                  </a:extLst>
+                </p:cNvPr>
+                <p:cNvSpPr/>
+                <p:nvPr/>
+              </p:nvSpPr>
+              <p:spPr>
+                <a:xfrm>
+                  <a:off x="3009314" y="2367444"/>
+                  <a:ext cx="769187" cy="216015"/>
+                </a:xfrm>
+                <a:prstGeom prst="rect">
+                  <a:avLst/>
+                </a:prstGeom>
+                <a:ln w="6350">
+                  <a:solidFill>
+                    <a:schemeClr val="accent2"/>
+                  </a:solidFill>
+                </a:ln>
+              </p:spPr>
+              <p:style>
+                <a:lnRef idx="2">
+                  <a:schemeClr val="accent1">
+                    <a:shade val="50000"/>
+                  </a:schemeClr>
+                </a:lnRef>
+                <a:fillRef idx="1">
+                  <a:schemeClr val="accent1"/>
+                </a:fillRef>
+                <a:effectRef idx="0">
+                  <a:schemeClr val="accent1"/>
+                </a:effectRef>
+                <a:fontRef idx="minor">
+                  <a:schemeClr val="lt1"/>
+                </a:fontRef>
+              </p:style>
+              <p:txBody>
+                <a:bodyPr rtlCol="0" anchor="ctr"/>
+                <a:lstStyle/>
+                <a:p>
+                  <a:pPr algn="ctr"/>
+                  <a:endParaRPr lang="en-US" b="1" dirty="0">
+                    <a:latin typeface="Arial" pitchFamily="34" charset="0"/>
+                    <a:cs typeface="Arial" pitchFamily="34" charset="0"/>
+                  </a:endParaRPr>
+                </a:p>
+              </p:txBody>
+            </p:sp>
+            <p:sp>
+              <p:nvSpPr>
+                <p:cNvPr id="204" name="Rectangle 203">
+                  <a:extLst>
+                    <a:ext uri="{FF2B5EF4-FFF2-40B4-BE49-F238E27FC236}">
+                      <a16:creationId xmlns:a16="http://schemas.microsoft.com/office/drawing/2014/main" id="{10C5B3D9-DE18-6D72-9759-BBABA775581E}"/>
+                    </a:ext>
+                  </a:extLst>
+                </p:cNvPr>
+                <p:cNvSpPr/>
+                <p:nvPr/>
+              </p:nvSpPr>
+              <p:spPr>
+                <a:xfrm>
+                  <a:off x="2813857" y="2564001"/>
+                  <a:ext cx="769187" cy="216015"/>
+                </a:xfrm>
+                <a:prstGeom prst="rect">
+                  <a:avLst/>
+                </a:prstGeom>
+                <a:ln w="6350">
+                  <a:solidFill>
+                    <a:schemeClr val="accent2"/>
+                  </a:solidFill>
+                </a:ln>
+              </p:spPr>
+              <p:style>
+                <a:lnRef idx="2">
+                  <a:schemeClr val="accent1">
+                    <a:shade val="50000"/>
+                  </a:schemeClr>
+                </a:lnRef>
+                <a:fillRef idx="1">
+                  <a:schemeClr val="accent1"/>
+                </a:fillRef>
+                <a:effectRef idx="0">
+                  <a:schemeClr val="accent1"/>
+                </a:effectRef>
+                <a:fontRef idx="minor">
+                  <a:schemeClr val="lt1"/>
+                </a:fontRef>
+              </p:style>
+              <p:txBody>
+                <a:bodyPr rtlCol="0" anchor="ctr"/>
+                <a:lstStyle/>
+                <a:p>
+                  <a:pPr algn="ctr"/>
+                  <a:endParaRPr lang="en-US" b="1" dirty="0">
+                    <a:latin typeface="Arial" pitchFamily="34" charset="0"/>
+                    <a:cs typeface="Arial" pitchFamily="34" charset="0"/>
+                  </a:endParaRPr>
+                </a:p>
+              </p:txBody>
+            </p:sp>
+            <p:sp>
+              <p:nvSpPr>
+                <p:cNvPr id="205" name="Rectangle 204">
+                  <a:extLst>
+                    <a:ext uri="{FF2B5EF4-FFF2-40B4-BE49-F238E27FC236}">
+                      <a16:creationId xmlns:a16="http://schemas.microsoft.com/office/drawing/2014/main" id="{BF9CB9C2-548E-D491-3696-8A17C1851463}"/>
+                    </a:ext>
+                  </a:extLst>
+                </p:cNvPr>
+                <p:cNvSpPr/>
+                <p:nvPr/>
+              </p:nvSpPr>
+              <p:spPr>
+                <a:xfrm>
+                  <a:off x="2618400" y="2760558"/>
+                  <a:ext cx="769187" cy="216015"/>
+                </a:xfrm>
+                <a:prstGeom prst="rect">
+                  <a:avLst/>
+                </a:prstGeom>
+                <a:ln w="6350">
+                  <a:solidFill>
+                    <a:schemeClr val="accent2"/>
+                  </a:solidFill>
+                </a:ln>
+              </p:spPr>
+              <p:style>
+                <a:lnRef idx="2">
+                  <a:schemeClr val="accent1">
+                    <a:shade val="50000"/>
+                  </a:schemeClr>
+                </a:lnRef>
+                <a:fillRef idx="1">
+                  <a:schemeClr val="accent1"/>
+                </a:fillRef>
+                <a:effectRef idx="0">
+                  <a:schemeClr val="accent1"/>
+                </a:effectRef>
+                <a:fontRef idx="minor">
+                  <a:schemeClr val="lt1"/>
+                </a:fontRef>
+              </p:style>
+              <p:txBody>
+                <a:bodyPr rtlCol="0" anchor="ctr"/>
+                <a:lstStyle/>
+                <a:p>
+                  <a:pPr algn="ctr"/>
+                  <a:endParaRPr lang="en-US" b="1" dirty="0">
+                    <a:latin typeface="Arial" pitchFamily="34" charset="0"/>
+                    <a:cs typeface="Arial" pitchFamily="34" charset="0"/>
+                  </a:endParaRPr>
+                </a:p>
+              </p:txBody>
+            </p:sp>
+            <p:sp>
+              <p:nvSpPr>
+                <p:cNvPr id="206" name="Rectangle 205">
+                  <a:extLst>
+                    <a:ext uri="{FF2B5EF4-FFF2-40B4-BE49-F238E27FC236}">
+                      <a16:creationId xmlns:a16="http://schemas.microsoft.com/office/drawing/2014/main" id="{670C7933-6B43-A991-8EFE-8E3CE8F07F35}"/>
+                    </a:ext>
+                  </a:extLst>
+                </p:cNvPr>
+                <p:cNvSpPr/>
+                <p:nvPr/>
+              </p:nvSpPr>
+              <p:spPr>
+                <a:xfrm>
+                  <a:off x="2422943" y="2957115"/>
+                  <a:ext cx="769187" cy="216015"/>
+                </a:xfrm>
+                <a:prstGeom prst="rect">
+                  <a:avLst/>
+                </a:prstGeom>
+                <a:ln w="6350">
+                  <a:solidFill>
+                    <a:schemeClr val="accent2"/>
+                  </a:solidFill>
+                </a:ln>
+              </p:spPr>
+              <p:style>
+                <a:lnRef idx="2">
+                  <a:schemeClr val="accent1">
+                    <a:shade val="50000"/>
+                  </a:schemeClr>
+                </a:lnRef>
+                <a:fillRef idx="1">
+                  <a:schemeClr val="accent1"/>
+                </a:fillRef>
+                <a:effectRef idx="0">
+                  <a:schemeClr val="accent1"/>
+                </a:effectRef>
+                <a:fontRef idx="minor">
+                  <a:schemeClr val="lt1"/>
+                </a:fontRef>
+              </p:style>
+              <p:txBody>
+                <a:bodyPr rtlCol="0" anchor="ctr"/>
+                <a:lstStyle/>
+                <a:p>
+                  <a:pPr algn="ctr"/>
+                  <a:endParaRPr lang="en-US" b="1" dirty="0">
+                    <a:latin typeface="Arial" pitchFamily="34" charset="0"/>
+                    <a:cs typeface="Arial" pitchFamily="34" charset="0"/>
+                  </a:endParaRPr>
+                </a:p>
+              </p:txBody>
+            </p:sp>
+            <p:sp>
+              <p:nvSpPr>
+                <p:cNvPr id="207" name="Rectangle 206">
+                  <a:extLst>
+                    <a:ext uri="{FF2B5EF4-FFF2-40B4-BE49-F238E27FC236}">
+                      <a16:creationId xmlns:a16="http://schemas.microsoft.com/office/drawing/2014/main" id="{D3A34472-7F4D-2ADC-25B0-2E25DA356770}"/>
+                    </a:ext>
+                  </a:extLst>
+                </p:cNvPr>
+                <p:cNvSpPr/>
+                <p:nvPr/>
+              </p:nvSpPr>
+              <p:spPr>
+                <a:xfrm>
+                  <a:off x="2227486" y="3153670"/>
+                  <a:ext cx="769187" cy="216015"/>
+                </a:xfrm>
+                <a:prstGeom prst="rect">
+                  <a:avLst/>
+                </a:prstGeom>
+                <a:ln w="6350">
+                  <a:solidFill>
+                    <a:schemeClr val="accent2"/>
+                  </a:solidFill>
+                </a:ln>
+              </p:spPr>
+              <p:style>
+                <a:lnRef idx="2">
+                  <a:schemeClr val="accent1">
+                    <a:shade val="50000"/>
+                  </a:schemeClr>
+                </a:lnRef>
+                <a:fillRef idx="1">
+                  <a:schemeClr val="accent1"/>
+                </a:fillRef>
+                <a:effectRef idx="0">
+                  <a:schemeClr val="accent1"/>
+                </a:effectRef>
+                <a:fontRef idx="minor">
+                  <a:schemeClr val="lt1"/>
+                </a:fontRef>
+              </p:style>
+              <p:txBody>
+                <a:bodyPr rtlCol="0" anchor="ctr"/>
+                <a:lstStyle/>
+                <a:p>
+                  <a:pPr algn="ctr"/>
+                  <a:endParaRPr lang="en-US" b="1" dirty="0">
+                    <a:latin typeface="Arial" pitchFamily="34" charset="0"/>
+                    <a:cs typeface="Arial" pitchFamily="34" charset="0"/>
+                  </a:endParaRPr>
+                </a:p>
+              </p:txBody>
+            </p:sp>
+          </p:grpSp>
+          <p:grpSp>
+            <p:nvGrpSpPr>
+              <p:cNvPr id="208" name="Group 207">
+                <a:extLst>
+                  <a:ext uri="{FF2B5EF4-FFF2-40B4-BE49-F238E27FC236}">
+                    <a16:creationId xmlns:a16="http://schemas.microsoft.com/office/drawing/2014/main" id="{2874D0AB-766E-57B5-88AB-11323644E2A0}"/>
+                  </a:ext>
+                </a:extLst>
+              </p:cNvPr>
+              <p:cNvGrpSpPr/>
+              <p:nvPr/>
+            </p:nvGrpSpPr>
+            <p:grpSpPr>
+              <a:xfrm>
+                <a:off x="6238111" y="1920321"/>
+                <a:ext cx="2664296" cy="2188357"/>
+                <a:chOff x="2135560" y="1384659"/>
+                <a:chExt cx="2664296" cy="2188357"/>
+              </a:xfrm>
+            </p:grpSpPr>
+            <p:sp>
+              <p:nvSpPr>
+                <p:cNvPr id="209" name="Cube 208">
+                  <a:extLst>
+                    <a:ext uri="{FF2B5EF4-FFF2-40B4-BE49-F238E27FC236}">
+                      <a16:creationId xmlns:a16="http://schemas.microsoft.com/office/drawing/2014/main" id="{52216B52-9FD1-C2AF-5BAC-3F468C9296CB}"/>
+                    </a:ext>
+                  </a:extLst>
+                </p:cNvPr>
+                <p:cNvSpPr/>
+                <p:nvPr/>
+              </p:nvSpPr>
+              <p:spPr>
+                <a:xfrm>
+                  <a:off x="2135560" y="1556792"/>
+                  <a:ext cx="2664296" cy="2016224"/>
+                </a:xfrm>
+                <a:prstGeom prst="cube">
+                  <a:avLst>
+                    <a:gd name="adj" fmla="val 93993"/>
+                  </a:avLst>
+                </a:prstGeom>
+                <a:solidFill>
+                  <a:srgbClr val="E6B85C"/>
+                </a:solidFill>
+                <a:ln>
+                  <a:noFill/>
+                </a:ln>
+              </p:spPr>
+              <p:style>
+                <a:lnRef idx="2">
+                  <a:schemeClr val="accent1">
+                    <a:shade val="50000"/>
+                  </a:schemeClr>
+                </a:lnRef>
+                <a:fillRef idx="1">
+                  <a:schemeClr val="accent1"/>
+                </a:fillRef>
+                <a:effectRef idx="0">
+                  <a:schemeClr val="accent1"/>
+                </a:effectRef>
+                <a:fontRef idx="minor">
+                  <a:schemeClr val="lt1"/>
+                </a:fontRef>
+              </p:style>
+              <p:txBody>
+                <a:bodyPr rtlCol="0" anchor="ctr"/>
+                <a:lstStyle/>
+                <a:p>
+                  <a:pPr algn="ctr"/>
+                  <a:endParaRPr lang="en-US" b="1" dirty="0">
+                    <a:latin typeface="Arial" pitchFamily="34" charset="0"/>
+                    <a:cs typeface="Arial" pitchFamily="34" charset="0"/>
+                  </a:endParaRPr>
+                </a:p>
+              </p:txBody>
+            </p:sp>
+            <p:sp>
+              <p:nvSpPr>
+                <p:cNvPr id="210" name="Rectangle 209">
+                  <a:extLst>
+                    <a:ext uri="{FF2B5EF4-FFF2-40B4-BE49-F238E27FC236}">
+                      <a16:creationId xmlns:a16="http://schemas.microsoft.com/office/drawing/2014/main" id="{0551AB9E-2E11-A6BE-4CC4-E52EB04F6E09}"/>
+                    </a:ext>
+                  </a:extLst>
+                </p:cNvPr>
+                <p:cNvSpPr/>
+                <p:nvPr/>
+              </p:nvSpPr>
+              <p:spPr>
+                <a:xfrm>
+                  <a:off x="3986598" y="1384659"/>
+                  <a:ext cx="769187" cy="216015"/>
+                </a:xfrm>
+                <a:prstGeom prst="rect">
+                  <a:avLst/>
+                </a:prstGeom>
+                <a:ln w="6350">
+                  <a:solidFill>
+                    <a:schemeClr val="accent2"/>
+                  </a:solidFill>
+                </a:ln>
+              </p:spPr>
+              <p:style>
+                <a:lnRef idx="2">
+                  <a:schemeClr val="accent1">
+                    <a:shade val="50000"/>
+                  </a:schemeClr>
+                </a:lnRef>
+                <a:fillRef idx="1">
+                  <a:schemeClr val="accent1"/>
+                </a:fillRef>
+                <a:effectRef idx="0">
+                  <a:schemeClr val="accent1"/>
+                </a:effectRef>
+                <a:fontRef idx="minor">
+                  <a:schemeClr val="lt1"/>
+                </a:fontRef>
+              </p:style>
+              <p:txBody>
+                <a:bodyPr rtlCol="0" anchor="ctr"/>
+                <a:lstStyle/>
+                <a:p>
+                  <a:pPr algn="ctr"/>
+                  <a:endParaRPr lang="en-US" b="1" dirty="0">
+                    <a:latin typeface="Arial" pitchFamily="34" charset="0"/>
+                    <a:cs typeface="Arial" pitchFamily="34" charset="0"/>
+                  </a:endParaRPr>
+                </a:p>
+              </p:txBody>
+            </p:sp>
+            <p:sp>
+              <p:nvSpPr>
+                <p:cNvPr id="211" name="Rectangle 210">
+                  <a:extLst>
+                    <a:ext uri="{FF2B5EF4-FFF2-40B4-BE49-F238E27FC236}">
+                      <a16:creationId xmlns:a16="http://schemas.microsoft.com/office/drawing/2014/main" id="{DBF88F23-59D4-2A4F-33B3-884AEB1552F5}"/>
+                    </a:ext>
+                  </a:extLst>
+                </p:cNvPr>
+                <p:cNvSpPr/>
+                <p:nvPr/>
+              </p:nvSpPr>
+              <p:spPr>
+                <a:xfrm>
+                  <a:off x="3791142" y="1581216"/>
+                  <a:ext cx="769187" cy="216015"/>
+                </a:xfrm>
+                <a:prstGeom prst="rect">
+                  <a:avLst/>
+                </a:prstGeom>
+                <a:ln w="6350">
+                  <a:solidFill>
+                    <a:schemeClr val="accent2"/>
+                  </a:solidFill>
+                </a:ln>
+              </p:spPr>
+              <p:style>
+                <a:lnRef idx="2">
+                  <a:schemeClr val="accent1">
+                    <a:shade val="50000"/>
+                  </a:schemeClr>
+                </a:lnRef>
+                <a:fillRef idx="1">
+                  <a:schemeClr val="accent1"/>
+                </a:fillRef>
+                <a:effectRef idx="0">
+                  <a:schemeClr val="accent1"/>
+                </a:effectRef>
+                <a:fontRef idx="minor">
+                  <a:schemeClr val="lt1"/>
+                </a:fontRef>
+              </p:style>
+              <p:txBody>
+                <a:bodyPr rtlCol="0" anchor="ctr"/>
+                <a:lstStyle/>
+                <a:p>
+                  <a:pPr algn="ctr"/>
+                  <a:endParaRPr lang="en-US" b="1" dirty="0">
+                    <a:latin typeface="Arial" pitchFamily="34" charset="0"/>
+                    <a:cs typeface="Arial" pitchFamily="34" charset="0"/>
+                  </a:endParaRPr>
+                </a:p>
+              </p:txBody>
+            </p:sp>
+            <p:sp>
+              <p:nvSpPr>
+                <p:cNvPr id="212" name="Rectangle 211">
+                  <a:extLst>
+                    <a:ext uri="{FF2B5EF4-FFF2-40B4-BE49-F238E27FC236}">
+                      <a16:creationId xmlns:a16="http://schemas.microsoft.com/office/drawing/2014/main" id="{5334C8AD-8918-A531-FFD9-F6B4649CE150}"/>
+                    </a:ext>
+                  </a:extLst>
+                </p:cNvPr>
+                <p:cNvSpPr/>
+                <p:nvPr/>
+              </p:nvSpPr>
+              <p:spPr>
+                <a:xfrm>
+                  <a:off x="3595685" y="1777773"/>
+                  <a:ext cx="769187" cy="216015"/>
+                </a:xfrm>
+                <a:prstGeom prst="rect">
+                  <a:avLst/>
+                </a:prstGeom>
+                <a:ln w="6350">
+                  <a:solidFill>
+                    <a:schemeClr val="accent2"/>
+                  </a:solidFill>
+                </a:ln>
+              </p:spPr>
+              <p:style>
+                <a:lnRef idx="2">
+                  <a:schemeClr val="accent1">
+                    <a:shade val="50000"/>
+                  </a:schemeClr>
+                </a:lnRef>
+                <a:fillRef idx="1">
+                  <a:schemeClr val="accent1"/>
+                </a:fillRef>
+                <a:effectRef idx="0">
+                  <a:schemeClr val="accent1"/>
+                </a:effectRef>
+                <a:fontRef idx="minor">
+                  <a:schemeClr val="lt1"/>
+                </a:fontRef>
+              </p:style>
+              <p:txBody>
+                <a:bodyPr rtlCol="0" anchor="ctr"/>
+                <a:lstStyle/>
+                <a:p>
+                  <a:pPr algn="ctr"/>
+                  <a:endParaRPr lang="en-US" b="1" dirty="0">
+                    <a:latin typeface="Arial" pitchFamily="34" charset="0"/>
+                    <a:cs typeface="Arial" pitchFamily="34" charset="0"/>
+                  </a:endParaRPr>
+                </a:p>
+              </p:txBody>
+            </p:sp>
+            <p:sp>
+              <p:nvSpPr>
+                <p:cNvPr id="213" name="Rectangle 212">
+                  <a:extLst>
+                    <a:ext uri="{FF2B5EF4-FFF2-40B4-BE49-F238E27FC236}">
+                      <a16:creationId xmlns:a16="http://schemas.microsoft.com/office/drawing/2014/main" id="{070AC7FA-3706-A20E-E519-E94F9D95B3C7}"/>
+                    </a:ext>
+                  </a:extLst>
+                </p:cNvPr>
+                <p:cNvSpPr/>
+                <p:nvPr/>
+              </p:nvSpPr>
+              <p:spPr>
+                <a:xfrm>
+                  <a:off x="3400228" y="1974330"/>
+                  <a:ext cx="769187" cy="216015"/>
+                </a:xfrm>
+                <a:prstGeom prst="rect">
+                  <a:avLst/>
+                </a:prstGeom>
+                <a:ln w="6350">
+                  <a:solidFill>
+                    <a:schemeClr val="accent2"/>
+                  </a:solidFill>
+                </a:ln>
+              </p:spPr>
+              <p:style>
+                <a:lnRef idx="2">
+                  <a:schemeClr val="accent1">
+                    <a:shade val="50000"/>
+                  </a:schemeClr>
+                </a:lnRef>
+                <a:fillRef idx="1">
+                  <a:schemeClr val="accent1"/>
+                </a:fillRef>
+                <a:effectRef idx="0">
+                  <a:schemeClr val="accent1"/>
+                </a:effectRef>
+                <a:fontRef idx="minor">
+                  <a:schemeClr val="lt1"/>
+                </a:fontRef>
+              </p:style>
+              <p:txBody>
+                <a:bodyPr rtlCol="0" anchor="ctr"/>
+                <a:lstStyle/>
+                <a:p>
+                  <a:pPr algn="ctr"/>
+                  <a:endParaRPr lang="en-US" b="1" dirty="0">
+                    <a:latin typeface="Arial" pitchFamily="34" charset="0"/>
+                    <a:cs typeface="Arial" pitchFamily="34" charset="0"/>
+                  </a:endParaRPr>
+                </a:p>
+              </p:txBody>
+            </p:sp>
+            <p:sp>
+              <p:nvSpPr>
+                <p:cNvPr id="214" name="Rectangle 213">
+                  <a:extLst>
+                    <a:ext uri="{FF2B5EF4-FFF2-40B4-BE49-F238E27FC236}">
+                      <a16:creationId xmlns:a16="http://schemas.microsoft.com/office/drawing/2014/main" id="{8735190C-F834-C787-4F62-9FDFD00A050A}"/>
+                    </a:ext>
+                  </a:extLst>
+                </p:cNvPr>
+                <p:cNvSpPr/>
+                <p:nvPr/>
+              </p:nvSpPr>
+              <p:spPr>
+                <a:xfrm>
+                  <a:off x="3204771" y="2170887"/>
+                  <a:ext cx="769187" cy="216015"/>
+                </a:xfrm>
+                <a:prstGeom prst="rect">
+                  <a:avLst/>
+                </a:prstGeom>
+                <a:ln w="6350">
+                  <a:solidFill>
+                    <a:schemeClr val="accent2"/>
+                  </a:solidFill>
+                </a:ln>
+              </p:spPr>
+              <p:style>
+                <a:lnRef idx="2">
+                  <a:schemeClr val="accent1">
+                    <a:shade val="50000"/>
+                  </a:schemeClr>
+                </a:lnRef>
+                <a:fillRef idx="1">
+                  <a:schemeClr val="accent1"/>
+                </a:fillRef>
+                <a:effectRef idx="0">
+                  <a:schemeClr val="accent1"/>
+                </a:effectRef>
+                <a:fontRef idx="minor">
+                  <a:schemeClr val="lt1"/>
+                </a:fontRef>
+              </p:style>
+              <p:txBody>
+                <a:bodyPr rtlCol="0" anchor="ctr"/>
+                <a:lstStyle/>
+                <a:p>
+                  <a:pPr algn="ctr"/>
+                  <a:endParaRPr lang="en-US" b="1" dirty="0">
+                    <a:latin typeface="Arial" pitchFamily="34" charset="0"/>
+                    <a:cs typeface="Arial" pitchFamily="34" charset="0"/>
+                  </a:endParaRPr>
+                </a:p>
+              </p:txBody>
+            </p:sp>
+            <p:sp>
+              <p:nvSpPr>
+                <p:cNvPr id="215" name="Rectangle 214">
+                  <a:extLst>
+                    <a:ext uri="{FF2B5EF4-FFF2-40B4-BE49-F238E27FC236}">
+                      <a16:creationId xmlns:a16="http://schemas.microsoft.com/office/drawing/2014/main" id="{B71FF68E-6816-DCBA-734E-D4E8C7FB42D0}"/>
+                    </a:ext>
+                  </a:extLst>
+                </p:cNvPr>
+                <p:cNvSpPr/>
+                <p:nvPr/>
+              </p:nvSpPr>
+              <p:spPr>
+                <a:xfrm>
+                  <a:off x="3009314" y="2367444"/>
+                  <a:ext cx="769187" cy="216015"/>
+                </a:xfrm>
+                <a:prstGeom prst="rect">
+                  <a:avLst/>
+                </a:prstGeom>
+                <a:ln w="6350">
+                  <a:solidFill>
+                    <a:schemeClr val="accent2"/>
+                  </a:solidFill>
+                </a:ln>
+              </p:spPr>
+              <p:style>
+                <a:lnRef idx="2">
+                  <a:schemeClr val="accent1">
+                    <a:shade val="50000"/>
+                  </a:schemeClr>
+                </a:lnRef>
+                <a:fillRef idx="1">
+                  <a:schemeClr val="accent1"/>
+                </a:fillRef>
+                <a:effectRef idx="0">
+                  <a:schemeClr val="accent1"/>
+                </a:effectRef>
+                <a:fontRef idx="minor">
+                  <a:schemeClr val="lt1"/>
+                </a:fontRef>
+              </p:style>
+              <p:txBody>
+                <a:bodyPr rtlCol="0" anchor="ctr"/>
+                <a:lstStyle/>
+                <a:p>
+                  <a:pPr algn="ctr"/>
+                  <a:endParaRPr lang="en-US" b="1" dirty="0">
+                    <a:latin typeface="Arial" pitchFamily="34" charset="0"/>
+                    <a:cs typeface="Arial" pitchFamily="34" charset="0"/>
+                  </a:endParaRPr>
+                </a:p>
+              </p:txBody>
+            </p:sp>
+            <p:sp>
+              <p:nvSpPr>
+                <p:cNvPr id="216" name="Rectangle 215">
+                  <a:extLst>
+                    <a:ext uri="{FF2B5EF4-FFF2-40B4-BE49-F238E27FC236}">
+                      <a16:creationId xmlns:a16="http://schemas.microsoft.com/office/drawing/2014/main" id="{CF302AE1-3883-2AD6-53A6-0B070E9BC392}"/>
+                    </a:ext>
+                  </a:extLst>
+                </p:cNvPr>
+                <p:cNvSpPr/>
+                <p:nvPr/>
+              </p:nvSpPr>
+              <p:spPr>
+                <a:xfrm>
+                  <a:off x="2813857" y="2564001"/>
+                  <a:ext cx="769187" cy="216015"/>
+                </a:xfrm>
+                <a:prstGeom prst="rect">
+                  <a:avLst/>
+                </a:prstGeom>
+                <a:ln w="6350">
+                  <a:solidFill>
+                    <a:schemeClr val="accent2"/>
+                  </a:solidFill>
+                </a:ln>
+              </p:spPr>
+              <p:style>
+                <a:lnRef idx="2">
+                  <a:schemeClr val="accent1">
+                    <a:shade val="50000"/>
+                  </a:schemeClr>
+                </a:lnRef>
+                <a:fillRef idx="1">
+                  <a:schemeClr val="accent1"/>
+                </a:fillRef>
+                <a:effectRef idx="0">
+                  <a:schemeClr val="accent1"/>
+                </a:effectRef>
+                <a:fontRef idx="minor">
+                  <a:schemeClr val="lt1"/>
+                </a:fontRef>
+              </p:style>
+              <p:txBody>
+                <a:bodyPr rtlCol="0" anchor="ctr"/>
+                <a:lstStyle/>
+                <a:p>
+                  <a:pPr algn="ctr"/>
+                  <a:endParaRPr lang="en-US" b="1" dirty="0">
+                    <a:latin typeface="Arial" pitchFamily="34" charset="0"/>
+                    <a:cs typeface="Arial" pitchFamily="34" charset="0"/>
+                  </a:endParaRPr>
+                </a:p>
+              </p:txBody>
+            </p:sp>
+            <p:sp>
+              <p:nvSpPr>
+                <p:cNvPr id="217" name="Rectangle 216">
+                  <a:extLst>
+                    <a:ext uri="{FF2B5EF4-FFF2-40B4-BE49-F238E27FC236}">
+                      <a16:creationId xmlns:a16="http://schemas.microsoft.com/office/drawing/2014/main" id="{F1376E01-C631-1779-BB47-0C792C72CCDD}"/>
+                    </a:ext>
+                  </a:extLst>
+                </p:cNvPr>
+                <p:cNvSpPr/>
+                <p:nvPr/>
+              </p:nvSpPr>
+              <p:spPr>
+                <a:xfrm>
+                  <a:off x="2618400" y="2760558"/>
+                  <a:ext cx="769187" cy="216015"/>
+                </a:xfrm>
+                <a:prstGeom prst="rect">
+                  <a:avLst/>
+                </a:prstGeom>
+                <a:ln w="6350">
+                  <a:solidFill>
+                    <a:schemeClr val="accent2"/>
+                  </a:solidFill>
+                </a:ln>
+              </p:spPr>
+              <p:style>
+                <a:lnRef idx="2">
+                  <a:schemeClr val="accent1">
+                    <a:shade val="50000"/>
+                  </a:schemeClr>
+                </a:lnRef>
+                <a:fillRef idx="1">
+                  <a:schemeClr val="accent1"/>
+                </a:fillRef>
+                <a:effectRef idx="0">
+                  <a:schemeClr val="accent1"/>
+                </a:effectRef>
+                <a:fontRef idx="minor">
+                  <a:schemeClr val="lt1"/>
+                </a:fontRef>
+              </p:style>
+              <p:txBody>
+                <a:bodyPr rtlCol="0" anchor="ctr"/>
+                <a:lstStyle/>
+                <a:p>
+                  <a:pPr algn="ctr"/>
+                  <a:endParaRPr lang="en-US" b="1" dirty="0">
+                    <a:latin typeface="Arial" pitchFamily="34" charset="0"/>
+                    <a:cs typeface="Arial" pitchFamily="34" charset="0"/>
+                  </a:endParaRPr>
+                </a:p>
+              </p:txBody>
+            </p:sp>
+            <p:sp>
+              <p:nvSpPr>
+                <p:cNvPr id="218" name="Rectangle 217">
+                  <a:extLst>
+                    <a:ext uri="{FF2B5EF4-FFF2-40B4-BE49-F238E27FC236}">
+                      <a16:creationId xmlns:a16="http://schemas.microsoft.com/office/drawing/2014/main" id="{5DEFDE6F-7E43-E133-24A6-D9CED3FCD8D2}"/>
+                    </a:ext>
+                  </a:extLst>
+                </p:cNvPr>
+                <p:cNvSpPr/>
+                <p:nvPr/>
+              </p:nvSpPr>
+              <p:spPr>
+                <a:xfrm>
+                  <a:off x="2422943" y="2957115"/>
+                  <a:ext cx="769187" cy="216015"/>
+                </a:xfrm>
+                <a:prstGeom prst="rect">
+                  <a:avLst/>
+                </a:prstGeom>
+                <a:ln w="6350">
+                  <a:solidFill>
+                    <a:schemeClr val="accent2"/>
+                  </a:solidFill>
+                </a:ln>
+              </p:spPr>
+              <p:style>
+                <a:lnRef idx="2">
+                  <a:schemeClr val="accent1">
+                    <a:shade val="50000"/>
+                  </a:schemeClr>
+                </a:lnRef>
+                <a:fillRef idx="1">
+                  <a:schemeClr val="accent1"/>
+                </a:fillRef>
+                <a:effectRef idx="0">
+                  <a:schemeClr val="accent1"/>
+                </a:effectRef>
+                <a:fontRef idx="minor">
+                  <a:schemeClr val="lt1"/>
+                </a:fontRef>
+              </p:style>
+              <p:txBody>
+                <a:bodyPr rtlCol="0" anchor="ctr"/>
+                <a:lstStyle/>
+                <a:p>
+                  <a:pPr algn="ctr"/>
+                  <a:endParaRPr lang="en-US" b="1" dirty="0">
+                    <a:latin typeface="Arial" pitchFamily="34" charset="0"/>
+                    <a:cs typeface="Arial" pitchFamily="34" charset="0"/>
+                  </a:endParaRPr>
+                </a:p>
+              </p:txBody>
+            </p:sp>
+            <p:sp>
+              <p:nvSpPr>
+                <p:cNvPr id="219" name="Rectangle 218">
+                  <a:extLst>
+                    <a:ext uri="{FF2B5EF4-FFF2-40B4-BE49-F238E27FC236}">
+                      <a16:creationId xmlns:a16="http://schemas.microsoft.com/office/drawing/2014/main" id="{03435BEF-8E23-2CA3-20E7-FA703FED0AC9}"/>
+                    </a:ext>
+                  </a:extLst>
+                </p:cNvPr>
+                <p:cNvSpPr/>
+                <p:nvPr/>
+              </p:nvSpPr>
+              <p:spPr>
+                <a:xfrm>
+                  <a:off x="2227486" y="3153670"/>
+                  <a:ext cx="769187" cy="216015"/>
+                </a:xfrm>
+                <a:prstGeom prst="rect">
+                  <a:avLst/>
+                </a:prstGeom>
+                <a:ln w="6350">
+                  <a:solidFill>
+                    <a:schemeClr val="accent2"/>
+                  </a:solidFill>
+                </a:ln>
+              </p:spPr>
+              <p:style>
+                <a:lnRef idx="2">
+                  <a:schemeClr val="accent1">
+                    <a:shade val="50000"/>
+                  </a:schemeClr>
+                </a:lnRef>
+                <a:fillRef idx="1">
+                  <a:schemeClr val="accent1"/>
+                </a:fillRef>
+                <a:effectRef idx="0">
+                  <a:schemeClr val="accent1"/>
+                </a:effectRef>
+                <a:fontRef idx="minor">
+                  <a:schemeClr val="lt1"/>
+                </a:fontRef>
+              </p:style>
+              <p:txBody>
+                <a:bodyPr rtlCol="0" anchor="ctr"/>
+                <a:lstStyle/>
+                <a:p>
+                  <a:pPr algn="ctr"/>
+                  <a:endParaRPr lang="en-US" b="1" dirty="0">
+                    <a:latin typeface="Arial" pitchFamily="34" charset="0"/>
+                    <a:cs typeface="Arial" pitchFamily="34" charset="0"/>
+                  </a:endParaRPr>
+                </a:p>
+              </p:txBody>
+            </p:sp>
+          </p:grpSp>
+          <p:grpSp>
+            <p:nvGrpSpPr>
+              <p:cNvPr id="220" name="Group 219">
+                <a:extLst>
+                  <a:ext uri="{FF2B5EF4-FFF2-40B4-BE49-F238E27FC236}">
+                    <a16:creationId xmlns:a16="http://schemas.microsoft.com/office/drawing/2014/main" id="{B4F4F6DD-DC61-001F-3994-6337A0E72BDD}"/>
+                  </a:ext>
+                </a:extLst>
+              </p:cNvPr>
+              <p:cNvGrpSpPr/>
+              <p:nvPr/>
+            </p:nvGrpSpPr>
+            <p:grpSpPr>
+              <a:xfrm>
+                <a:off x="6238111" y="1205136"/>
+                <a:ext cx="2664296" cy="2188357"/>
+                <a:chOff x="2135560" y="1384659"/>
+                <a:chExt cx="2664296" cy="2188357"/>
+              </a:xfrm>
+            </p:grpSpPr>
+            <p:sp>
+              <p:nvSpPr>
+                <p:cNvPr id="221" name="Cube 220">
+                  <a:extLst>
+                    <a:ext uri="{FF2B5EF4-FFF2-40B4-BE49-F238E27FC236}">
+                      <a16:creationId xmlns:a16="http://schemas.microsoft.com/office/drawing/2014/main" id="{B88CD2FA-8551-2AD8-E508-D1CD63CFC99B}"/>
+                    </a:ext>
+                  </a:extLst>
+                </p:cNvPr>
+                <p:cNvSpPr/>
+                <p:nvPr/>
+              </p:nvSpPr>
+              <p:spPr>
+                <a:xfrm>
+                  <a:off x="2135560" y="1556792"/>
+                  <a:ext cx="2664296" cy="2016224"/>
+                </a:xfrm>
+                <a:prstGeom prst="cube">
+                  <a:avLst>
+                    <a:gd name="adj" fmla="val 93993"/>
+                  </a:avLst>
+                </a:prstGeom>
+                <a:solidFill>
+                  <a:srgbClr val="E6B85C"/>
+                </a:solidFill>
+                <a:ln>
+                  <a:noFill/>
+                </a:ln>
+              </p:spPr>
+              <p:style>
+                <a:lnRef idx="2">
+                  <a:schemeClr val="accent1">
+                    <a:shade val="50000"/>
+                  </a:schemeClr>
+                </a:lnRef>
+                <a:fillRef idx="1">
+                  <a:schemeClr val="accent1"/>
+                </a:fillRef>
+                <a:effectRef idx="0">
+                  <a:schemeClr val="accent1"/>
+                </a:effectRef>
+                <a:fontRef idx="minor">
+                  <a:schemeClr val="lt1"/>
+                </a:fontRef>
+              </p:style>
+              <p:txBody>
+                <a:bodyPr rtlCol="0" anchor="ctr"/>
+                <a:lstStyle/>
+                <a:p>
+                  <a:pPr algn="ctr"/>
+                  <a:endParaRPr lang="en-US" b="1" dirty="0">
+                    <a:latin typeface="Arial" pitchFamily="34" charset="0"/>
+                    <a:cs typeface="Arial" pitchFamily="34" charset="0"/>
+                  </a:endParaRPr>
+                </a:p>
+              </p:txBody>
+            </p:sp>
+            <p:sp>
+              <p:nvSpPr>
+                <p:cNvPr id="222" name="Rectangle 221">
+                  <a:extLst>
+                    <a:ext uri="{FF2B5EF4-FFF2-40B4-BE49-F238E27FC236}">
+                      <a16:creationId xmlns:a16="http://schemas.microsoft.com/office/drawing/2014/main" id="{EB86C70E-14E5-1BE3-4C9E-99DF2279CBBE}"/>
+                    </a:ext>
+                  </a:extLst>
+                </p:cNvPr>
+                <p:cNvSpPr/>
+                <p:nvPr/>
+              </p:nvSpPr>
+              <p:spPr>
+                <a:xfrm>
+                  <a:off x="3986598" y="1384659"/>
+                  <a:ext cx="769187" cy="216015"/>
+                </a:xfrm>
+                <a:prstGeom prst="rect">
+                  <a:avLst/>
+                </a:prstGeom>
+                <a:ln w="6350">
+                  <a:solidFill>
+                    <a:schemeClr val="accent2"/>
+                  </a:solidFill>
+                </a:ln>
+              </p:spPr>
+              <p:style>
+                <a:lnRef idx="2">
+                  <a:schemeClr val="accent1">
+                    <a:shade val="50000"/>
+                  </a:schemeClr>
+                </a:lnRef>
+                <a:fillRef idx="1">
+                  <a:schemeClr val="accent1"/>
+                </a:fillRef>
+                <a:effectRef idx="0">
+                  <a:schemeClr val="accent1"/>
+                </a:effectRef>
+                <a:fontRef idx="minor">
+                  <a:schemeClr val="lt1"/>
+                </a:fontRef>
+              </p:style>
+              <p:txBody>
+                <a:bodyPr rtlCol="0" anchor="ctr"/>
+                <a:lstStyle/>
+                <a:p>
+                  <a:pPr algn="ctr"/>
+                  <a:endParaRPr lang="en-US" b="1" dirty="0">
+                    <a:latin typeface="Arial" pitchFamily="34" charset="0"/>
+                    <a:cs typeface="Arial" pitchFamily="34" charset="0"/>
+                  </a:endParaRPr>
+                </a:p>
+              </p:txBody>
+            </p:sp>
+            <p:sp>
+              <p:nvSpPr>
+                <p:cNvPr id="223" name="Rectangle 222">
+                  <a:extLst>
+                    <a:ext uri="{FF2B5EF4-FFF2-40B4-BE49-F238E27FC236}">
+                      <a16:creationId xmlns:a16="http://schemas.microsoft.com/office/drawing/2014/main" id="{C0CEEFDE-5CFE-0EA4-C434-25307FE9063E}"/>
+                    </a:ext>
+                  </a:extLst>
+                </p:cNvPr>
+                <p:cNvSpPr/>
+                <p:nvPr/>
+              </p:nvSpPr>
+              <p:spPr>
+                <a:xfrm>
+                  <a:off x="3791142" y="1581216"/>
+                  <a:ext cx="769187" cy="216015"/>
+                </a:xfrm>
+                <a:prstGeom prst="rect">
+                  <a:avLst/>
+                </a:prstGeom>
+                <a:ln w="6350">
+                  <a:solidFill>
+                    <a:schemeClr val="accent2"/>
+                  </a:solidFill>
+                </a:ln>
+              </p:spPr>
+              <p:style>
+                <a:lnRef idx="2">
+                  <a:schemeClr val="accent1">
+                    <a:shade val="50000"/>
+                  </a:schemeClr>
+                </a:lnRef>
+                <a:fillRef idx="1">
+                  <a:schemeClr val="accent1"/>
+                </a:fillRef>
+                <a:effectRef idx="0">
+                  <a:schemeClr val="accent1"/>
+                </a:effectRef>
+                <a:fontRef idx="minor">
+                  <a:schemeClr val="lt1"/>
+                </a:fontRef>
+              </p:style>
+              <p:txBody>
+                <a:bodyPr rtlCol="0" anchor="ctr"/>
+                <a:lstStyle/>
+                <a:p>
+                  <a:pPr algn="ctr"/>
+                  <a:endParaRPr lang="en-US" b="1" dirty="0">
+                    <a:latin typeface="Arial" pitchFamily="34" charset="0"/>
+                    <a:cs typeface="Arial" pitchFamily="34" charset="0"/>
+                  </a:endParaRPr>
+                </a:p>
+              </p:txBody>
+            </p:sp>
+            <p:sp>
+              <p:nvSpPr>
+                <p:cNvPr id="224" name="Rectangle 223">
+                  <a:extLst>
+                    <a:ext uri="{FF2B5EF4-FFF2-40B4-BE49-F238E27FC236}">
+                      <a16:creationId xmlns:a16="http://schemas.microsoft.com/office/drawing/2014/main" id="{ACE22C86-45DA-5D0B-A70E-8B42571DEE83}"/>
+                    </a:ext>
+                  </a:extLst>
+                </p:cNvPr>
+                <p:cNvSpPr/>
+                <p:nvPr/>
+              </p:nvSpPr>
+              <p:spPr>
+                <a:xfrm>
+                  <a:off x="3595685" y="1777773"/>
+                  <a:ext cx="769187" cy="216015"/>
+                </a:xfrm>
+                <a:prstGeom prst="rect">
+                  <a:avLst/>
+                </a:prstGeom>
+                <a:ln w="6350">
+                  <a:solidFill>
+                    <a:schemeClr val="accent2"/>
+                  </a:solidFill>
+                </a:ln>
+              </p:spPr>
+              <p:style>
+                <a:lnRef idx="2">
+                  <a:schemeClr val="accent1">
+                    <a:shade val="50000"/>
+                  </a:schemeClr>
+                </a:lnRef>
+                <a:fillRef idx="1">
+                  <a:schemeClr val="accent1"/>
+                </a:fillRef>
+                <a:effectRef idx="0">
+                  <a:schemeClr val="accent1"/>
+                </a:effectRef>
+                <a:fontRef idx="minor">
+                  <a:schemeClr val="lt1"/>
+                </a:fontRef>
+              </p:style>
+              <p:txBody>
+                <a:bodyPr rtlCol="0" anchor="ctr"/>
+                <a:lstStyle/>
+                <a:p>
+                  <a:pPr algn="ctr"/>
+                  <a:endParaRPr lang="en-US" b="1" dirty="0">
+                    <a:latin typeface="Arial" pitchFamily="34" charset="0"/>
+                    <a:cs typeface="Arial" pitchFamily="34" charset="0"/>
+                  </a:endParaRPr>
+                </a:p>
+              </p:txBody>
+            </p:sp>
+            <p:sp>
+              <p:nvSpPr>
+                <p:cNvPr id="225" name="Rectangle 224">
+                  <a:extLst>
+                    <a:ext uri="{FF2B5EF4-FFF2-40B4-BE49-F238E27FC236}">
+                      <a16:creationId xmlns:a16="http://schemas.microsoft.com/office/drawing/2014/main" id="{41934F4A-9CFD-4BF9-242B-824BF22F368F}"/>
+                    </a:ext>
+                  </a:extLst>
+                </p:cNvPr>
+                <p:cNvSpPr/>
+                <p:nvPr/>
+              </p:nvSpPr>
+              <p:spPr>
+                <a:xfrm>
+                  <a:off x="3400228" y="1974330"/>
+                  <a:ext cx="769187" cy="216015"/>
+                </a:xfrm>
+                <a:prstGeom prst="rect">
+                  <a:avLst/>
+                </a:prstGeom>
+                <a:ln w="6350">
+                  <a:solidFill>
+                    <a:schemeClr val="accent2"/>
+                  </a:solidFill>
+                </a:ln>
+              </p:spPr>
+              <p:style>
+                <a:lnRef idx="2">
+                  <a:schemeClr val="accent1">
+                    <a:shade val="50000"/>
+                  </a:schemeClr>
+                </a:lnRef>
+                <a:fillRef idx="1">
+                  <a:schemeClr val="accent1"/>
+                </a:fillRef>
+                <a:effectRef idx="0">
+                  <a:schemeClr val="accent1"/>
+                </a:effectRef>
+                <a:fontRef idx="minor">
+                  <a:schemeClr val="lt1"/>
+                </a:fontRef>
+              </p:style>
+              <p:txBody>
+                <a:bodyPr rtlCol="0" anchor="ctr"/>
+                <a:lstStyle/>
+                <a:p>
+                  <a:pPr algn="ctr"/>
+                  <a:endParaRPr lang="en-US" b="1" dirty="0">
+                    <a:latin typeface="Arial" pitchFamily="34" charset="0"/>
+                    <a:cs typeface="Arial" pitchFamily="34" charset="0"/>
+                  </a:endParaRPr>
+                </a:p>
+              </p:txBody>
+            </p:sp>
+            <p:sp>
+              <p:nvSpPr>
+                <p:cNvPr id="226" name="Rectangle 225">
+                  <a:extLst>
+                    <a:ext uri="{FF2B5EF4-FFF2-40B4-BE49-F238E27FC236}">
+                      <a16:creationId xmlns:a16="http://schemas.microsoft.com/office/drawing/2014/main" id="{68942143-F51D-2D44-C689-E6DF85515784}"/>
+                    </a:ext>
+                  </a:extLst>
+                </p:cNvPr>
+                <p:cNvSpPr/>
+                <p:nvPr/>
+              </p:nvSpPr>
+              <p:spPr>
+                <a:xfrm>
+                  <a:off x="3204771" y="2170887"/>
+                  <a:ext cx="769187" cy="216015"/>
+                </a:xfrm>
+                <a:prstGeom prst="rect">
+                  <a:avLst/>
+                </a:prstGeom>
+                <a:ln w="6350">
+                  <a:solidFill>
+                    <a:schemeClr val="accent2"/>
+                  </a:solidFill>
+                </a:ln>
+              </p:spPr>
+              <p:style>
+                <a:lnRef idx="2">
+                  <a:schemeClr val="accent1">
+                    <a:shade val="50000"/>
+                  </a:schemeClr>
+                </a:lnRef>
+                <a:fillRef idx="1">
+                  <a:schemeClr val="accent1"/>
+                </a:fillRef>
+                <a:effectRef idx="0">
+                  <a:schemeClr val="accent1"/>
+                </a:effectRef>
+                <a:fontRef idx="minor">
+                  <a:schemeClr val="lt1"/>
+                </a:fontRef>
+              </p:style>
+              <p:txBody>
+                <a:bodyPr rtlCol="0" anchor="ctr"/>
+                <a:lstStyle/>
+                <a:p>
+                  <a:pPr algn="ctr"/>
+                  <a:endParaRPr lang="en-US" b="1" dirty="0">
+                    <a:latin typeface="Arial" pitchFamily="34" charset="0"/>
+                    <a:cs typeface="Arial" pitchFamily="34" charset="0"/>
+                  </a:endParaRPr>
+                </a:p>
+              </p:txBody>
+            </p:sp>
+            <p:sp>
+              <p:nvSpPr>
+                <p:cNvPr id="227" name="Rectangle 226">
+                  <a:extLst>
+                    <a:ext uri="{FF2B5EF4-FFF2-40B4-BE49-F238E27FC236}">
+                      <a16:creationId xmlns:a16="http://schemas.microsoft.com/office/drawing/2014/main" id="{4D353A46-EEE1-A6E3-5089-75979A20659A}"/>
+                    </a:ext>
+                  </a:extLst>
+                </p:cNvPr>
+                <p:cNvSpPr/>
+                <p:nvPr/>
+              </p:nvSpPr>
+              <p:spPr>
+                <a:xfrm>
+                  <a:off x="3009314" y="2367444"/>
+                  <a:ext cx="769187" cy="216015"/>
+                </a:xfrm>
+                <a:prstGeom prst="rect">
+                  <a:avLst/>
+                </a:prstGeom>
+                <a:ln w="6350">
+                  <a:solidFill>
+                    <a:schemeClr val="accent2"/>
+                  </a:solidFill>
+                </a:ln>
+              </p:spPr>
+              <p:style>
+                <a:lnRef idx="2">
+                  <a:schemeClr val="accent1">
+                    <a:shade val="50000"/>
+                  </a:schemeClr>
+                </a:lnRef>
+                <a:fillRef idx="1">
+                  <a:schemeClr val="accent1"/>
+                </a:fillRef>
+                <a:effectRef idx="0">
+                  <a:schemeClr val="accent1"/>
+                </a:effectRef>
+                <a:fontRef idx="minor">
+                  <a:schemeClr val="lt1"/>
+                </a:fontRef>
+              </p:style>
+              <p:txBody>
+                <a:bodyPr rtlCol="0" anchor="ctr"/>
+                <a:lstStyle/>
+                <a:p>
+                  <a:pPr algn="ctr"/>
+                  <a:endParaRPr lang="en-US" b="1" dirty="0">
+                    <a:latin typeface="Arial" pitchFamily="34" charset="0"/>
+                    <a:cs typeface="Arial" pitchFamily="34" charset="0"/>
+                  </a:endParaRPr>
+                </a:p>
+              </p:txBody>
+            </p:sp>
+            <p:sp>
+              <p:nvSpPr>
+                <p:cNvPr id="228" name="Rectangle 227">
+                  <a:extLst>
+                    <a:ext uri="{FF2B5EF4-FFF2-40B4-BE49-F238E27FC236}">
+                      <a16:creationId xmlns:a16="http://schemas.microsoft.com/office/drawing/2014/main" id="{AC59E3D0-4A4A-4CE3-1D6C-0CEA6224C9A4}"/>
+                    </a:ext>
+                  </a:extLst>
+                </p:cNvPr>
+                <p:cNvSpPr/>
+                <p:nvPr/>
+              </p:nvSpPr>
+              <p:spPr>
+                <a:xfrm>
+                  <a:off x="2813857" y="2564001"/>
+                  <a:ext cx="769187" cy="216015"/>
+                </a:xfrm>
+                <a:prstGeom prst="rect">
+                  <a:avLst/>
+                </a:prstGeom>
+                <a:ln w="6350">
+                  <a:solidFill>
+                    <a:schemeClr val="accent2"/>
+                  </a:solidFill>
+                </a:ln>
+              </p:spPr>
+              <p:style>
+                <a:lnRef idx="2">
+                  <a:schemeClr val="accent1">
+                    <a:shade val="50000"/>
+                  </a:schemeClr>
+                </a:lnRef>
+                <a:fillRef idx="1">
+                  <a:schemeClr val="accent1"/>
+                </a:fillRef>
+                <a:effectRef idx="0">
+                  <a:schemeClr val="accent1"/>
+                </a:effectRef>
+                <a:fontRef idx="minor">
+                  <a:schemeClr val="lt1"/>
+                </a:fontRef>
+              </p:style>
+              <p:txBody>
+                <a:bodyPr rtlCol="0" anchor="ctr"/>
+                <a:lstStyle/>
+                <a:p>
+                  <a:pPr algn="ctr"/>
+                  <a:endParaRPr lang="en-US" b="1" dirty="0">
+                    <a:latin typeface="Arial" pitchFamily="34" charset="0"/>
+                    <a:cs typeface="Arial" pitchFamily="34" charset="0"/>
+                  </a:endParaRPr>
+                </a:p>
+              </p:txBody>
+            </p:sp>
+            <p:sp>
+              <p:nvSpPr>
+                <p:cNvPr id="229" name="Rectangle 228">
+                  <a:extLst>
+                    <a:ext uri="{FF2B5EF4-FFF2-40B4-BE49-F238E27FC236}">
+                      <a16:creationId xmlns:a16="http://schemas.microsoft.com/office/drawing/2014/main" id="{28FE3C95-40B0-8B46-FA36-4AEB70F565FF}"/>
+                    </a:ext>
+                  </a:extLst>
+                </p:cNvPr>
+                <p:cNvSpPr/>
+                <p:nvPr/>
+              </p:nvSpPr>
+              <p:spPr>
+                <a:xfrm>
+                  <a:off x="2618400" y="2760558"/>
+                  <a:ext cx="769187" cy="216015"/>
+                </a:xfrm>
+                <a:prstGeom prst="rect">
+                  <a:avLst/>
+                </a:prstGeom>
+                <a:ln w="6350">
+                  <a:solidFill>
+                    <a:schemeClr val="accent2"/>
+                  </a:solidFill>
+                </a:ln>
+              </p:spPr>
+              <p:style>
+                <a:lnRef idx="2">
+                  <a:schemeClr val="accent1">
+                    <a:shade val="50000"/>
+                  </a:schemeClr>
+                </a:lnRef>
+                <a:fillRef idx="1">
+                  <a:schemeClr val="accent1"/>
+                </a:fillRef>
+                <a:effectRef idx="0">
+                  <a:schemeClr val="accent1"/>
+                </a:effectRef>
+                <a:fontRef idx="minor">
+                  <a:schemeClr val="lt1"/>
+                </a:fontRef>
+              </p:style>
+              <p:txBody>
+                <a:bodyPr rtlCol="0" anchor="ctr"/>
+                <a:lstStyle/>
+                <a:p>
+                  <a:pPr algn="ctr"/>
+                  <a:endParaRPr lang="en-US" b="1" dirty="0">
+                    <a:latin typeface="Arial" pitchFamily="34" charset="0"/>
+                    <a:cs typeface="Arial" pitchFamily="34" charset="0"/>
+                  </a:endParaRPr>
+                </a:p>
+              </p:txBody>
+            </p:sp>
+            <p:sp>
+              <p:nvSpPr>
+                <p:cNvPr id="230" name="Rectangle 229">
+                  <a:extLst>
+                    <a:ext uri="{FF2B5EF4-FFF2-40B4-BE49-F238E27FC236}">
+                      <a16:creationId xmlns:a16="http://schemas.microsoft.com/office/drawing/2014/main" id="{ED7DB9BA-F7B5-4CE4-733D-6DC04AB82392}"/>
+                    </a:ext>
+                  </a:extLst>
+                </p:cNvPr>
+                <p:cNvSpPr/>
+                <p:nvPr/>
+              </p:nvSpPr>
+              <p:spPr>
+                <a:xfrm>
+                  <a:off x="2422943" y="2957115"/>
+                  <a:ext cx="769187" cy="216015"/>
+                </a:xfrm>
+                <a:prstGeom prst="rect">
+                  <a:avLst/>
+                </a:prstGeom>
+                <a:ln w="6350">
+                  <a:solidFill>
+                    <a:schemeClr val="accent2"/>
+                  </a:solidFill>
+                </a:ln>
+              </p:spPr>
+              <p:style>
+                <a:lnRef idx="2">
+                  <a:schemeClr val="accent1">
+                    <a:shade val="50000"/>
+                  </a:schemeClr>
+                </a:lnRef>
+                <a:fillRef idx="1">
+                  <a:schemeClr val="accent1"/>
+                </a:fillRef>
+                <a:effectRef idx="0">
+                  <a:schemeClr val="accent1"/>
+                </a:effectRef>
+                <a:fontRef idx="minor">
+                  <a:schemeClr val="lt1"/>
+                </a:fontRef>
+              </p:style>
+              <p:txBody>
+                <a:bodyPr rtlCol="0" anchor="ctr"/>
+                <a:lstStyle/>
+                <a:p>
+                  <a:pPr algn="ctr"/>
+                  <a:endParaRPr lang="en-US" b="1" dirty="0">
+                    <a:latin typeface="Arial" pitchFamily="34" charset="0"/>
+                    <a:cs typeface="Arial" pitchFamily="34" charset="0"/>
+                  </a:endParaRPr>
+                </a:p>
+              </p:txBody>
+            </p:sp>
+            <p:sp>
+              <p:nvSpPr>
+                <p:cNvPr id="231" name="Rectangle 230">
+                  <a:extLst>
+                    <a:ext uri="{FF2B5EF4-FFF2-40B4-BE49-F238E27FC236}">
+                      <a16:creationId xmlns:a16="http://schemas.microsoft.com/office/drawing/2014/main" id="{2B717AFF-679C-CD63-8A96-D2E0741F47FB}"/>
+                    </a:ext>
+                  </a:extLst>
+                </p:cNvPr>
+                <p:cNvSpPr/>
+                <p:nvPr/>
+              </p:nvSpPr>
+              <p:spPr>
+                <a:xfrm>
+                  <a:off x="2227486" y="3153670"/>
+                  <a:ext cx="769187" cy="216015"/>
+                </a:xfrm>
+                <a:prstGeom prst="rect">
+                  <a:avLst/>
+                </a:prstGeom>
+                <a:ln w="6350">
+                  <a:solidFill>
+                    <a:schemeClr val="accent2"/>
+                  </a:solidFill>
+                </a:ln>
+              </p:spPr>
+              <p:style>
+                <a:lnRef idx="2">
+                  <a:schemeClr val="accent1">
+                    <a:shade val="50000"/>
+                  </a:schemeClr>
+                </a:lnRef>
+                <a:fillRef idx="1">
+                  <a:schemeClr val="accent1"/>
+                </a:fillRef>
+                <a:effectRef idx="0">
+                  <a:schemeClr val="accent1"/>
+                </a:effectRef>
+                <a:fontRef idx="minor">
+                  <a:schemeClr val="lt1"/>
+                </a:fontRef>
+              </p:style>
+              <p:txBody>
+                <a:bodyPr rtlCol="0" anchor="ctr"/>
+                <a:lstStyle/>
+                <a:p>
+                  <a:pPr algn="ctr"/>
+                  <a:endParaRPr lang="en-US" b="1" dirty="0">
+                    <a:latin typeface="Arial" pitchFamily="34" charset="0"/>
+                    <a:cs typeface="Arial" pitchFamily="34" charset="0"/>
+                  </a:endParaRPr>
+                </a:p>
+              </p:txBody>
+            </p:sp>
+          </p:grpSp>
+          <p:cxnSp>
+            <p:nvCxnSpPr>
+              <p:cNvPr id="232" name="Straight Arrow Connector 231">
+                <a:extLst>
+                  <a:ext uri="{FF2B5EF4-FFF2-40B4-BE49-F238E27FC236}">
+                    <a16:creationId xmlns:a16="http://schemas.microsoft.com/office/drawing/2014/main" id="{3F74486A-69A1-D8CC-A900-E0C145E67D58}"/>
+                  </a:ext>
+                </a:extLst>
+              </p:cNvPr>
+              <p:cNvCxnSpPr>
+                <a:cxnSpLocks/>
+              </p:cNvCxnSpPr>
+              <p:nvPr/>
+            </p:nvCxnSpPr>
+            <p:spPr>
+              <a:xfrm flipH="1">
+                <a:off x="6237962" y="5597624"/>
+                <a:ext cx="769187" cy="0"/>
+              </a:xfrm>
+              <a:prstGeom prst="straightConnector1">
+                <a:avLst/>
+              </a:prstGeom>
+              <a:ln w="19050">
+                <a:solidFill>
+                  <a:schemeClr val="tx1"/>
+                </a:solidFill>
+                <a:headEnd type="triangle"/>
+                <a:tailEnd type="triangle"/>
+              </a:ln>
+            </p:spPr>
+            <p:style>
+              <a:lnRef idx="1">
+                <a:schemeClr val="accent1"/>
+              </a:lnRef>
+              <a:fillRef idx="0">
+                <a:schemeClr val="accent1"/>
+              </a:fillRef>
+              <a:effectRef idx="0">
+                <a:schemeClr val="accent1"/>
+              </a:effectRef>
+              <a:fontRef idx="minor">
+                <a:schemeClr val="tx1"/>
+              </a:fontRef>
+            </p:style>
+          </p:cxnSp>
+          <p:cxnSp>
+            <p:nvCxnSpPr>
+              <p:cNvPr id="233" name="Straight Arrow Connector 232">
+                <a:extLst>
+                  <a:ext uri="{FF2B5EF4-FFF2-40B4-BE49-F238E27FC236}">
+                    <a16:creationId xmlns:a16="http://schemas.microsoft.com/office/drawing/2014/main" id="{AD894C25-EA15-A231-0050-96B12CF6F1C0}"/>
+                  </a:ext>
+                </a:extLst>
+              </p:cNvPr>
+              <p:cNvCxnSpPr>
+                <a:cxnSpLocks/>
+              </p:cNvCxnSpPr>
+              <p:nvPr/>
+            </p:nvCxnSpPr>
+            <p:spPr>
+              <a:xfrm flipV="1">
+                <a:off x="6193661" y="3250121"/>
+                <a:ext cx="0" cy="172801"/>
+              </a:xfrm>
+              <a:prstGeom prst="straightConnector1">
+                <a:avLst/>
+              </a:prstGeom>
+              <a:ln w="19050">
+                <a:solidFill>
+                  <a:schemeClr val="tx1"/>
+                </a:solidFill>
+                <a:headEnd type="triangle"/>
+                <a:tailEnd type="triangle"/>
+              </a:ln>
+            </p:spPr>
+            <p:style>
+              <a:lnRef idx="1">
+                <a:schemeClr val="accent1"/>
+              </a:lnRef>
+              <a:fillRef idx="0">
+                <a:schemeClr val="accent1"/>
+              </a:fillRef>
+              <a:effectRef idx="0">
+                <a:schemeClr val="accent1"/>
+              </a:effectRef>
+              <a:fontRef idx="minor">
+                <a:schemeClr val="tx1"/>
+              </a:fontRef>
+            </p:style>
+          </p:cxnSp>
+          <p:cxnSp>
+            <p:nvCxnSpPr>
+              <p:cNvPr id="234" name="Straight Arrow Connector 233">
+                <a:extLst>
+                  <a:ext uri="{FF2B5EF4-FFF2-40B4-BE49-F238E27FC236}">
+                    <a16:creationId xmlns:a16="http://schemas.microsoft.com/office/drawing/2014/main" id="{BC9106DD-F55F-DE12-54D7-BB0435445641}"/>
+                  </a:ext>
+                </a:extLst>
+              </p:cNvPr>
+              <p:cNvCxnSpPr>
+                <a:cxnSpLocks/>
+              </p:cNvCxnSpPr>
+              <p:nvPr/>
+            </p:nvCxnSpPr>
+            <p:spPr>
+              <a:xfrm flipH="1">
+                <a:off x="7468597" y="3299718"/>
+                <a:ext cx="215931" cy="225617"/>
+              </a:xfrm>
+              <a:prstGeom prst="straightConnector1">
+                <a:avLst/>
+              </a:prstGeom>
+              <a:ln w="19050">
+                <a:solidFill>
+                  <a:schemeClr val="tx1"/>
+                </a:solidFill>
+                <a:headEnd type="triangle"/>
+                <a:tailEnd type="triangle"/>
+              </a:ln>
+            </p:spPr>
+            <p:style>
+              <a:lnRef idx="1">
+                <a:schemeClr val="accent1"/>
+              </a:lnRef>
+              <a:fillRef idx="0">
+                <a:schemeClr val="accent1"/>
+              </a:fillRef>
+              <a:effectRef idx="0">
+                <a:schemeClr val="accent1"/>
+              </a:effectRef>
+              <a:fontRef idx="minor">
+                <a:schemeClr val="tx1"/>
+              </a:fontRef>
+            </p:style>
+          </p:cxnSp>
+          <p:sp>
+            <p:nvSpPr>
+              <p:cNvPr id="235" name="TextBox 234">
+                <a:extLst>
+                  <a:ext uri="{FF2B5EF4-FFF2-40B4-BE49-F238E27FC236}">
+                    <a16:creationId xmlns:a16="http://schemas.microsoft.com/office/drawing/2014/main" id="{0FD3E873-26AD-E687-FC0A-E3349589BD35}"/>
+                  </a:ext>
+                </a:extLst>
+              </p:cNvPr>
+              <p:cNvSpPr txBox="1"/>
+              <p:nvPr/>
+            </p:nvSpPr>
+            <p:spPr>
+              <a:xfrm>
+                <a:off x="7559015" y="3293368"/>
+                <a:ext cx="1028172" cy="253916"/>
+              </a:xfrm>
+              <a:prstGeom prst="rect">
+                <a:avLst/>
+              </a:prstGeom>
+              <a:noFill/>
+            </p:spPr>
+            <p:txBody>
+              <a:bodyPr wrap="square" rtlCol="0">
+                <a:spAutoFit/>
+              </a:bodyPr>
+              <a:lstStyle/>
+              <a:p>
+                <a:r>
+                  <a:rPr lang="en-US" sz="1050" b="1" dirty="0">
+                    <a:latin typeface="Courier New" panose="02070309020205020404" pitchFamily="49" charset="0"/>
+                    <a:cs typeface="Courier New" panose="02070309020205020404" pitchFamily="49" charset="0"/>
+                  </a:rPr>
+                  <a:t>finSpacing</a:t>
+                </a:r>
+              </a:p>
+            </p:txBody>
+          </p:sp>
+          <p:cxnSp>
+            <p:nvCxnSpPr>
+              <p:cNvPr id="236" name="Straight Arrow Connector 235">
+                <a:extLst>
+                  <a:ext uri="{FF2B5EF4-FFF2-40B4-BE49-F238E27FC236}">
+                    <a16:creationId xmlns:a16="http://schemas.microsoft.com/office/drawing/2014/main" id="{56931269-9998-B26C-FB72-42E9241DB40B}"/>
+                  </a:ext>
+                </a:extLst>
+              </p:cNvPr>
+              <p:cNvCxnSpPr>
+                <a:cxnSpLocks/>
+              </p:cNvCxnSpPr>
+              <p:nvPr/>
+            </p:nvCxnSpPr>
+            <p:spPr>
+              <a:xfrm flipV="1">
+                <a:off x="6238111" y="4108678"/>
+                <a:ext cx="0" cy="594070"/>
+              </a:xfrm>
+              <a:prstGeom prst="straightConnector1">
+                <a:avLst/>
+              </a:prstGeom>
+              <a:ln w="19050">
+                <a:solidFill>
+                  <a:schemeClr val="tx1"/>
+                </a:solidFill>
+                <a:headEnd type="triangle"/>
+                <a:tailEnd type="triangle"/>
+              </a:ln>
+            </p:spPr>
+            <p:style>
+              <a:lnRef idx="1">
+                <a:schemeClr val="accent1"/>
+              </a:lnRef>
+              <a:fillRef idx="0">
+                <a:schemeClr val="accent1"/>
+              </a:fillRef>
+              <a:effectRef idx="0">
+                <a:schemeClr val="accent1"/>
+              </a:effectRef>
+              <a:fontRef idx="minor">
+                <a:schemeClr val="tx1"/>
+              </a:fontRef>
+            </p:style>
+          </p:cxnSp>
+          <p:sp>
+            <p:nvSpPr>
+              <p:cNvPr id="237" name="TextBox 236">
+                <a:extLst>
+                  <a:ext uri="{FF2B5EF4-FFF2-40B4-BE49-F238E27FC236}">
+                    <a16:creationId xmlns:a16="http://schemas.microsoft.com/office/drawing/2014/main" id="{30C2ED26-9791-3989-42D4-D46873A78AB6}"/>
+                  </a:ext>
+                </a:extLst>
+              </p:cNvPr>
+              <p:cNvSpPr txBox="1"/>
+              <p:nvPr/>
+            </p:nvSpPr>
+            <p:spPr>
+              <a:xfrm>
+                <a:off x="5374019" y="4276116"/>
+                <a:ext cx="933794" cy="253916"/>
+              </a:xfrm>
+              <a:prstGeom prst="rect">
+                <a:avLst/>
+              </a:prstGeom>
+              <a:noFill/>
+            </p:spPr>
+            <p:txBody>
+              <a:bodyPr wrap="square" rtlCol="0">
+                <a:spAutoFit/>
+              </a:bodyPr>
+              <a:lstStyle/>
+              <a:p>
+                <a:r>
+                  <a:rPr lang="en-US" sz="1050" b="1" dirty="0">
+                    <a:latin typeface="Courier New" panose="02070309020205020404" pitchFamily="49" charset="0"/>
+                    <a:cs typeface="Courier New" panose="02070309020205020404" pitchFamily="49" charset="0"/>
+                  </a:rPr>
+                  <a:t>gapHTubes</a:t>
+                </a:r>
+              </a:p>
+            </p:txBody>
+          </p:sp>
+          <p:cxnSp>
+            <p:nvCxnSpPr>
+              <p:cNvPr id="238" name="Straight Arrow Connector 237">
+                <a:extLst>
+                  <a:ext uri="{FF2B5EF4-FFF2-40B4-BE49-F238E27FC236}">
+                    <a16:creationId xmlns:a16="http://schemas.microsoft.com/office/drawing/2014/main" id="{C178A274-B208-BF8A-7C43-EAD2B1F6AA4F}"/>
+                  </a:ext>
+                </a:extLst>
+              </p:cNvPr>
+              <p:cNvCxnSpPr>
+                <a:cxnSpLocks/>
+              </p:cNvCxnSpPr>
+              <p:nvPr/>
+            </p:nvCxnSpPr>
+            <p:spPr>
+              <a:xfrm flipH="1">
+                <a:off x="7095129" y="3685517"/>
+                <a:ext cx="1829502" cy="1864118"/>
+              </a:xfrm>
+              <a:prstGeom prst="straightConnector1">
+                <a:avLst/>
+              </a:prstGeom>
+              <a:ln w="19050">
+                <a:solidFill>
+                  <a:schemeClr val="tx1"/>
+                </a:solidFill>
+                <a:headEnd type="triangle"/>
+                <a:tailEnd type="triangle"/>
+              </a:ln>
+            </p:spPr>
+            <p:style>
+              <a:lnRef idx="1">
+                <a:schemeClr val="accent1"/>
+              </a:lnRef>
+              <a:fillRef idx="0">
+                <a:schemeClr val="accent1"/>
+              </a:fillRef>
+              <a:effectRef idx="0">
+                <a:schemeClr val="accent1"/>
+              </a:effectRef>
+              <a:fontRef idx="minor">
+                <a:schemeClr val="tx1"/>
+              </a:fontRef>
+            </p:style>
+          </p:cxnSp>
+          <p:sp>
+            <p:nvSpPr>
+              <p:cNvPr id="239" name="TextBox 238">
+                <a:extLst>
+                  <a:ext uri="{FF2B5EF4-FFF2-40B4-BE49-F238E27FC236}">
+                    <a16:creationId xmlns:a16="http://schemas.microsoft.com/office/drawing/2014/main" id="{4BA622B2-E9B3-D7CB-A217-229A7303A762}"/>
+                  </a:ext>
+                </a:extLst>
+              </p:cNvPr>
+              <p:cNvSpPr txBox="1"/>
+              <p:nvPr/>
+            </p:nvSpPr>
+            <p:spPr>
+              <a:xfrm rot="18836397">
+                <a:off x="7624317" y="4562086"/>
+                <a:ext cx="1028172" cy="253916"/>
+              </a:xfrm>
+              <a:prstGeom prst="rect">
+                <a:avLst/>
+              </a:prstGeom>
+              <a:noFill/>
+            </p:spPr>
+            <p:txBody>
+              <a:bodyPr wrap="square" rtlCol="0">
+                <a:spAutoFit/>
+              </a:bodyPr>
+              <a:lstStyle/>
+              <a:p>
+                <a:r>
+                  <a:rPr lang="en-US" sz="1050" b="1" dirty="0">
+                    <a:latin typeface="Courier New" panose="02070309020205020404" pitchFamily="49" charset="0"/>
+                    <a:cs typeface="Courier New" panose="02070309020205020404" pitchFamily="49" charset="0"/>
+                  </a:rPr>
+                  <a:t>HEXTubeL</a:t>
+                </a:r>
+              </a:p>
+            </p:txBody>
+          </p:sp>
+          <p:cxnSp>
+            <p:nvCxnSpPr>
+              <p:cNvPr id="240" name="Straight Arrow Connector 239">
+                <a:extLst>
+                  <a:ext uri="{FF2B5EF4-FFF2-40B4-BE49-F238E27FC236}">
+                    <a16:creationId xmlns:a16="http://schemas.microsoft.com/office/drawing/2014/main" id="{A90BC69F-7B3E-DBD2-940C-66F88B1AE612}"/>
+                  </a:ext>
+                </a:extLst>
+              </p:cNvPr>
+              <p:cNvCxnSpPr>
+                <a:cxnSpLocks/>
+              </p:cNvCxnSpPr>
+              <p:nvPr/>
+            </p:nvCxnSpPr>
+            <p:spPr>
+              <a:xfrm>
+                <a:off x="9017476" y="773088"/>
+                <a:ext cx="0" cy="2808312"/>
+              </a:xfrm>
+              <a:prstGeom prst="straightConnector1">
+                <a:avLst/>
+              </a:prstGeom>
+              <a:ln w="19050">
+                <a:solidFill>
+                  <a:schemeClr val="tx1"/>
+                </a:solidFill>
+                <a:headEnd type="triangle"/>
+                <a:tailEnd type="triangle"/>
+              </a:ln>
+            </p:spPr>
+            <p:style>
+              <a:lnRef idx="1">
+                <a:schemeClr val="accent1"/>
+              </a:lnRef>
+              <a:fillRef idx="0">
+                <a:schemeClr val="accent1"/>
+              </a:fillRef>
+              <a:effectRef idx="0">
+                <a:schemeClr val="accent1"/>
+              </a:effectRef>
+              <a:fontRef idx="minor">
+                <a:schemeClr val="tx1"/>
+              </a:fontRef>
+            </p:style>
+          </p:cxnSp>
+          <p:sp>
+            <p:nvSpPr>
+              <p:cNvPr id="241" name="TextBox 240">
+                <a:extLst>
+                  <a:ext uri="{FF2B5EF4-FFF2-40B4-BE49-F238E27FC236}">
+                    <a16:creationId xmlns:a16="http://schemas.microsoft.com/office/drawing/2014/main" id="{842296BC-F355-3117-FE32-7FAE26E02E9D}"/>
+                  </a:ext>
+                </a:extLst>
+              </p:cNvPr>
+              <p:cNvSpPr txBox="1"/>
+              <p:nvPr/>
+            </p:nvSpPr>
+            <p:spPr>
+              <a:xfrm>
+                <a:off x="9099398" y="1610165"/>
+                <a:ext cx="1028172" cy="253916"/>
+              </a:xfrm>
+              <a:prstGeom prst="rect">
+                <a:avLst/>
+              </a:prstGeom>
+              <a:noFill/>
+            </p:spPr>
+            <p:txBody>
+              <a:bodyPr wrap="square" rtlCol="0">
+                <a:spAutoFit/>
+              </a:bodyPr>
+              <a:lstStyle/>
+              <a:p>
+                <a:r>
+                  <a:rPr lang="en-US" sz="1050" b="1" dirty="0">
+                    <a:latin typeface="Courier New" panose="02070309020205020404" pitchFamily="49" charset="0"/>
+                    <a:cs typeface="Courier New" panose="02070309020205020404" pitchFamily="49" charset="0"/>
+                  </a:rPr>
+                  <a:t>HEXCoreH</a:t>
+                </a:r>
+              </a:p>
+            </p:txBody>
+          </p:sp>
+          <p:cxnSp>
+            <p:nvCxnSpPr>
+              <p:cNvPr id="242" name="Straight Arrow Connector 241">
+                <a:extLst>
+                  <a:ext uri="{FF2B5EF4-FFF2-40B4-BE49-F238E27FC236}">
+                    <a16:creationId xmlns:a16="http://schemas.microsoft.com/office/drawing/2014/main" id="{1C716964-AA7E-5D39-E711-0487F9616D5F}"/>
+                  </a:ext>
+                </a:extLst>
+              </p:cNvPr>
+              <p:cNvCxnSpPr>
+                <a:cxnSpLocks/>
+              </p:cNvCxnSpPr>
+              <p:nvPr/>
+            </p:nvCxnSpPr>
+            <p:spPr>
+              <a:xfrm flipH="1">
+                <a:off x="8830399" y="2610697"/>
+                <a:ext cx="864096" cy="0"/>
+              </a:xfrm>
+              <a:prstGeom prst="straightConnector1">
+                <a:avLst/>
+              </a:prstGeom>
+              <a:ln w="57150">
+                <a:solidFill>
+                  <a:srgbClr val="9064FF"/>
+                </a:solidFill>
+                <a:tailEnd type="triangle"/>
+              </a:ln>
+            </p:spPr>
+            <p:style>
+              <a:lnRef idx="1">
+                <a:schemeClr val="accent1"/>
+              </a:lnRef>
+              <a:fillRef idx="0">
+                <a:schemeClr val="accent1"/>
+              </a:fillRef>
+              <a:effectRef idx="0">
+                <a:schemeClr val="accent1"/>
+              </a:effectRef>
+              <a:fontRef idx="minor">
+                <a:schemeClr val="tx1"/>
+              </a:fontRef>
+            </p:style>
+          </p:cxnSp>
+          <p:sp>
+            <p:nvSpPr>
+              <p:cNvPr id="243" name="TextBox 242">
+                <a:extLst>
+                  <a:ext uri="{FF2B5EF4-FFF2-40B4-BE49-F238E27FC236}">
+                    <a16:creationId xmlns:a16="http://schemas.microsoft.com/office/drawing/2014/main" id="{C9FA8182-49F2-F817-C0DD-B5AA7BBE9A44}"/>
+                  </a:ext>
+                </a:extLst>
+              </p:cNvPr>
+              <p:cNvSpPr txBox="1"/>
+              <p:nvPr/>
+            </p:nvSpPr>
+            <p:spPr>
+              <a:xfrm>
+                <a:off x="9249250" y="2610697"/>
+                <a:ext cx="1540320" cy="253916"/>
+              </a:xfrm>
+              <a:prstGeom prst="rect">
+                <a:avLst/>
+              </a:prstGeom>
+              <a:noFill/>
+            </p:spPr>
+            <p:txBody>
+              <a:bodyPr wrap="square" rtlCol="0">
+                <a:spAutoFit/>
+              </a:bodyPr>
+              <a:lstStyle/>
+              <a:p>
+                <a:r>
+                  <a:rPr lang="en-US" sz="1050" b="1" dirty="0">
+                    <a:latin typeface="+mj-lt"/>
+                    <a:cs typeface="Courier New" panose="02070309020205020404" pitchFamily="49" charset="0"/>
+                  </a:rPr>
+                  <a:t>Moist Air flow</a:t>
+                </a:r>
+              </a:p>
+            </p:txBody>
+          </p:sp>
+          <p:cxnSp>
+            <p:nvCxnSpPr>
+              <p:cNvPr id="244" name="Straight Arrow Connector 243">
+                <a:extLst>
+                  <a:ext uri="{FF2B5EF4-FFF2-40B4-BE49-F238E27FC236}">
+                    <a16:creationId xmlns:a16="http://schemas.microsoft.com/office/drawing/2014/main" id="{B753D0A9-79D9-AEB9-421C-A255615684A0}"/>
+                  </a:ext>
+                </a:extLst>
+              </p:cNvPr>
+              <p:cNvCxnSpPr>
+                <a:cxnSpLocks/>
+              </p:cNvCxnSpPr>
+              <p:nvPr/>
+            </p:nvCxnSpPr>
+            <p:spPr>
+              <a:xfrm flipV="1">
+                <a:off x="5806063" y="4824950"/>
+                <a:ext cx="523974" cy="510766"/>
+              </a:xfrm>
+              <a:prstGeom prst="straightConnector1">
+                <a:avLst/>
+              </a:prstGeom>
+              <a:ln w="57150">
+                <a:solidFill>
+                  <a:srgbClr val="EBC67C"/>
+                </a:solidFill>
+                <a:tailEnd type="triangle"/>
+              </a:ln>
+            </p:spPr>
+            <p:style>
+              <a:lnRef idx="1">
+                <a:schemeClr val="accent1"/>
+              </a:lnRef>
+              <a:fillRef idx="0">
+                <a:schemeClr val="accent1"/>
+              </a:fillRef>
+              <a:effectRef idx="0">
+                <a:schemeClr val="accent1"/>
+              </a:effectRef>
+              <a:fontRef idx="minor">
+                <a:schemeClr val="tx1"/>
+              </a:fontRef>
+            </p:style>
+          </p:cxnSp>
+          <p:sp>
+            <p:nvSpPr>
+              <p:cNvPr id="245" name="TextBox 244">
+                <a:extLst>
+                  <a:ext uri="{FF2B5EF4-FFF2-40B4-BE49-F238E27FC236}">
+                    <a16:creationId xmlns:a16="http://schemas.microsoft.com/office/drawing/2014/main" id="{D552D664-65E3-0227-F68F-0F2A69BED646}"/>
+                  </a:ext>
+                </a:extLst>
+              </p:cNvPr>
+              <p:cNvSpPr txBox="1"/>
+              <p:nvPr/>
+            </p:nvSpPr>
+            <p:spPr>
+              <a:xfrm>
+                <a:off x="4799856" y="5230284"/>
+                <a:ext cx="1540320" cy="253916"/>
+              </a:xfrm>
+              <a:prstGeom prst="rect">
+                <a:avLst/>
+              </a:prstGeom>
+              <a:noFill/>
+            </p:spPr>
+            <p:txBody>
+              <a:bodyPr wrap="square" rtlCol="0">
+                <a:spAutoFit/>
+              </a:bodyPr>
+              <a:lstStyle/>
+              <a:p>
+                <a:r>
+                  <a:rPr lang="en-US" sz="1050" b="1" dirty="0">
+                    <a:latin typeface="+mj-lt"/>
+                    <a:cs typeface="Courier New" panose="02070309020205020404" pitchFamily="49" charset="0"/>
+                  </a:rPr>
+                  <a:t>Thermal Liquid flow</a:t>
+                </a:r>
+              </a:p>
+            </p:txBody>
+          </p:sp>
+        </p:grpSp>
+      </p:grpSp>
+      <p:pic>
+        <p:nvPicPr>
+          <p:cNvPr id="140" name="Picture 139">
+            <a:extLst>
+              <a:ext uri="{FF2B5EF4-FFF2-40B4-BE49-F238E27FC236}">
+                <a16:creationId xmlns:a16="http://schemas.microsoft.com/office/drawing/2014/main" id="{DACF5330-59F2-930D-C8FD-B3546E5979D5}"/>
+              </a:ext>
+            </a:extLst>
+          </p:cNvPr>
+          <p:cNvPicPr>
+            <a:picLocks noChangeAspect="1"/>
+          </p:cNvPicPr>
+          <p:nvPr/>
+        </p:nvPicPr>
+        <p:blipFill>
+          <a:blip r:embed="rId2"/>
+          <a:stretch>
+            <a:fillRect/>
+          </a:stretch>
+        </p:blipFill>
+        <p:spPr>
+          <a:xfrm>
+            <a:off x="723975" y="541064"/>
+            <a:ext cx="6053853" cy="5255207"/>
+          </a:xfrm>
+          <a:prstGeom prst="rect">
+            <a:avLst/>
+          </a:prstGeom>
+        </p:spPr>
+      </p:pic>
+    </p:spTree>
+    <p:extLst>
+      <p:ext uri="{BB962C8B-B14F-4D97-AF65-F5344CB8AC3E}">
+        <p14:creationId xmlns:p14="http://schemas.microsoft.com/office/powerpoint/2010/main" val="3828434918"/>
+      </p:ext>
+    </p:extLst>
+  </p:cSld>
+  <p:clrMapOvr>
+    <a:masterClrMapping/>
+  </p:clrMapOvr>
+</p:sld>
+</file>
+
 <file path=ppt/theme/theme1.xml><?xml version="1.0" encoding="utf-8"?>
 <a:theme xmlns:a="http://schemas.openxmlformats.org/drawingml/2006/main" name="MW_Public_widescreen">
   <a:themeElements>
@@ -13441,21 +20008,6 @@
 </file>
 
 <file path=customXml/item1.xml><?xml version="1.0" encoding="utf-8"?>
-<?mso-contentType ?>
-<FormTemplates xmlns="http://schemas.microsoft.com/sharepoint/v3/contenttype/forms">
-  <Display>DocumentLibraryForm</Display>
-  <Edit>DocumentLibraryForm</Edit>
-  <New>DocumentLibraryForm</New>
-</FormTemplates>
-</file>
-
-<file path=customXml/item2.xml><?xml version="1.0" encoding="utf-8"?>
-<p:properties xmlns:p="http://schemas.microsoft.com/office/2006/metadata/properties" xmlns:xsi="http://www.w3.org/2001/XMLSchema-instance" xmlns:pc="http://schemas.microsoft.com/office/infopath/2007/PartnerControls">
-  <documentManagement/>
-</p:properties>
-</file>
-
-<file path=customXml/item3.xml><?xml version="1.0" encoding="utf-8"?>
 <ct:contentTypeSchema xmlns:ct="http://schemas.microsoft.com/office/2006/metadata/contentType" xmlns:ma="http://schemas.microsoft.com/office/2006/metadata/properties/metaAttributes" ct:_="" ma:_="" ma:contentTypeName="Document" ma:contentTypeID="0x010100E8BDF109259C3742B70118398EA662DF" ma:contentTypeVersion="4" ma:contentTypeDescription="Create a new document." ma:contentTypeScope="" ma:versionID="739f9c85490d5e8d428cdd675dd8c7cd">
   <xsd:schema xmlns:xsd="http://www.w3.org/2001/XMLSchema" xmlns:xs="http://www.w3.org/2001/XMLSchema" xmlns:p="http://schemas.microsoft.com/office/2006/metadata/properties" xmlns:ns2="c0427815-c159-405c-a9c3-9204bd95a48e" targetNamespace="http://schemas.microsoft.com/office/2006/metadata/properties" ma:root="true" ma:fieldsID="3e30fb21375f54844de811bb38b6912f" ns2:_="">
     <xsd:import namespace="c0427815-c159-405c-a9c3-9204bd95a48e"/>
@@ -13599,10 +20151,35 @@
 </ct:contentTypeSchema>
 </file>
 
+<file path=customXml/item2.xml><?xml version="1.0" encoding="utf-8"?>
+<p:properties xmlns:p="http://schemas.microsoft.com/office/2006/metadata/properties" xmlns:xsi="http://www.w3.org/2001/XMLSchema-instance" xmlns:pc="http://schemas.microsoft.com/office/infopath/2007/PartnerControls">
+  <documentManagement/>
+</p:properties>
+</file>
+
+<file path=customXml/item3.xml><?xml version="1.0" encoding="utf-8"?>
+<?mso-contentType ?>
+<FormTemplates xmlns="http://schemas.microsoft.com/sharepoint/v3/contenttype/forms">
+  <Display>DocumentLibraryForm</Display>
+  <Edit>DocumentLibraryForm</Edit>
+  <New>DocumentLibraryForm</New>
+</FormTemplates>
+</file>
+
 <file path=customXml/itemProps1.xml><?xml version="1.0" encoding="utf-8"?>
-<ds:datastoreItem xmlns:ds="http://schemas.openxmlformats.org/officeDocument/2006/customXml" ds:itemID="{3B61DF2E-245C-45DF-A9A5-EABECEA4295F}">
+<ds:datastoreItem xmlns:ds="http://schemas.openxmlformats.org/officeDocument/2006/customXml" ds:itemID="{183B886A-FCC7-4CFA-98AF-7EF1C1F11BA2}">
   <ds:schemaRefs>
-    <ds:schemaRef ds:uri="http://schemas.microsoft.com/sharepoint/v3/contenttype/forms"/>
+    <ds:schemaRef ds:uri="http://schemas.microsoft.com/office/2006/metadata/contentType"/>
+    <ds:schemaRef ds:uri="http://schemas.microsoft.com/office/2006/metadata/properties/metaAttributes"/>
+    <ds:schemaRef ds:uri="http://www.w3.org/2001/XMLSchema"/>
+    <ds:schemaRef ds:uri="http://schemas.microsoft.com/office/2006/metadata/properties"/>
+    <ds:schemaRef ds:uri="c0427815-c159-405c-a9c3-9204bd95a48e"/>
+    <ds:schemaRef ds:uri="http://schemas.microsoft.com/office/2006/documentManagement/types"/>
+    <ds:schemaRef ds:uri="http://schemas.microsoft.com/office/infopath/2007/PartnerControls"/>
+    <ds:schemaRef ds:uri="http://schemas.openxmlformats.org/package/2006/metadata/core-properties"/>
+    <ds:schemaRef ds:uri="http://purl.org/dc/elements/1.1/"/>
+    <ds:schemaRef ds:uri="http://purl.org/dc/terms/"/>
+    <ds:schemaRef ds:uri="http://schemas.microsoft.com/internal/obd"/>
   </ds:schemaRefs>
 </ds:datastoreItem>
 </file>
@@ -13626,19 +20203,9 @@
 </file>
 
 <file path=customXml/itemProps3.xml><?xml version="1.0" encoding="utf-8"?>
-<ds:datastoreItem xmlns:ds="http://schemas.openxmlformats.org/officeDocument/2006/customXml" ds:itemID="{183B886A-FCC7-4CFA-98AF-7EF1C1F11BA2}">
+<ds:datastoreItem xmlns:ds="http://schemas.openxmlformats.org/officeDocument/2006/customXml" ds:itemID="{3B61DF2E-245C-45DF-A9A5-EABECEA4295F}">
   <ds:schemaRefs>
-    <ds:schemaRef ds:uri="http://schemas.microsoft.com/office/2006/metadata/contentType"/>
-    <ds:schemaRef ds:uri="http://schemas.microsoft.com/office/2006/metadata/properties/metaAttributes"/>
-    <ds:schemaRef ds:uri="http://www.w3.org/2001/XMLSchema"/>
-    <ds:schemaRef ds:uri="http://schemas.microsoft.com/office/2006/metadata/properties"/>
-    <ds:schemaRef ds:uri="c0427815-c159-405c-a9c3-9204bd95a48e"/>
-    <ds:schemaRef ds:uri="http://schemas.microsoft.com/office/2006/documentManagement/types"/>
-    <ds:schemaRef ds:uri="http://schemas.microsoft.com/office/infopath/2007/PartnerControls"/>
-    <ds:schemaRef ds:uri="http://schemas.openxmlformats.org/package/2006/metadata/core-properties"/>
-    <ds:schemaRef ds:uri="http://purl.org/dc/elements/1.1/"/>
-    <ds:schemaRef ds:uri="http://purl.org/dc/terms/"/>
-    <ds:schemaRef ds:uri="http://schemas.microsoft.com/internal/obd"/>
+    <ds:schemaRef ds:uri="http://schemas.microsoft.com/sharepoint/v3/contenttype/forms"/>
   </ds:schemaRefs>
 </ds:datastoreItem>
 </file>